--- a/Rapport_projet_SRTP.pptx
+++ b/Rapport_projet_SRTP.pptx
@@ -3802,12 +3802,21 @@
           <a:bodyPr/>
           <a:lstStyle/>
           <a:p>
-            <a:pPr marL="0" indent="0">
-              <a:buNone/>
-            </a:pPr>
             <a:r>
               <a:rPr lang="fr-BE" dirty="0"/>
-              <a:t>Le champ Timestamp est utilisé pour calculer le RTT (temps que met une requête pour être traité et que la réponse revienne). Il sert également à définir un timeout. Nous l’initialisons comme le temps actuel multiplié par 1000 modulo 32 bits (2 exposant 32). Cela nous permet de toujours savoir le moment où la requête a été envoyé.</a:t>
+              <a:t>Utilisé pour calculer le RTT (temps que met une requête pour être traité et que la réponse revienne) et définir un timeout.</a:t>
+            </a:r>
+          </a:p>
+          <a:p>
+            <a:r>
+              <a:rPr lang="fr-BE" dirty="0"/>
+              <a:t>Initialisé comme le temps actuel multiplié par 1000 modulo 32 bits (2 exposant 32).</a:t>
+            </a:r>
+          </a:p>
+          <a:p>
+            <a:r>
+              <a:rPr lang="fr-BE" dirty="0"/>
+              <a:t>Permet de toujours savoir le moment où la requête a été envoyé.</a:t>
             </a:r>
           </a:p>
         </p:txBody>
@@ -3891,12 +3900,15 @@
           <a:bodyPr/>
           <a:lstStyle/>
           <a:p>
-            <a:pPr marL="0" indent="0">
-              <a:buNone/>
-            </a:pPr>
             <a:r>
               <a:rPr lang="fr-BE" dirty="0"/>
-              <a:t>Notre RTO (retransmission timeout) est adaptatif, nous choisissons le maximum entre 0.5 et 2.5 fois le RTT estimé (0.875 * ancien RTT + 0.125 * mesure). Cela nous permet d’éviter les retransmissions inutiles tout en étant réactif aux variations réseaux.</a:t>
+              <a:t>Adaptatif, maximum entre 0.5 et 2.5 fois RTT estimé (0.875 * ancien RTT + 0.125 * mesure). </a:t>
+            </a:r>
+          </a:p>
+          <a:p>
+            <a:r>
+              <a:rPr lang="fr-BE" dirty="0"/>
+              <a:t>Permet d’éviter les retransmissions inutiles tout en étant réactif aux variations réseaux.</a:t>
             </a:r>
           </a:p>
         </p:txBody>

--- a/Rapport_projet_SRTP.pptx
+++ b/Rapport_projet_SRTP.pptx
@@ -13,6 +13,7 @@
     <p:sldId id="262" r:id="rId7"/>
     <p:sldId id="263" r:id="rId8"/>
     <p:sldId id="264" r:id="rId9"/>
+    <p:sldId id="266" r:id="rId10"/>
   </p:sldIdLst>
   <p:sldSz cx="12192000" cy="6858000"/>
   <p:notesSz cx="6858000" cy="9144000"/>
@@ -4099,10 +4100,50 @@
         </p:nvSpPr>
         <p:spPr/>
         <p:txBody>
-          <a:bodyPr/>
-          <a:lstStyle/>
-          <a:p>
-            <a:endParaRPr lang="fr-BE"/>
+          <a:bodyPr>
+            <a:normAutofit/>
+          </a:bodyPr>
+          <a:lstStyle/>
+          <a:p>
+            <a:r>
+              <a:rPr lang="fr-BE" dirty="0"/>
+              <a:t>Mesures : débit (bytes/sec), temps de transfert, nombre de retransmissions</a:t>
+            </a:r>
+          </a:p>
+          <a:p>
+            <a:r>
+              <a:rPr lang="fr-BE" dirty="0"/>
+              <a:t>Scénarios : réseau parfait, pertes, fichiers de tailles variés</a:t>
+            </a:r>
+          </a:p>
+          <a:p>
+            <a:r>
+              <a:rPr lang="fr-BE" dirty="0"/>
+              <a:t>Méthodologie : </a:t>
+            </a:r>
+            <a:r>
+              <a:rPr lang="fr-FR" dirty="0"/>
+              <a:t>Comparaison </a:t>
+            </a:r>
+            <a:r>
+              <a:rPr lang="fr-FR" b="1" dirty="0"/>
+              <a:t>MD5</a:t>
+            </a:r>
+            <a:r>
+              <a:rPr lang="fr-FR" dirty="0"/>
+              <a:t> (intégrité), Tests automatisés avec </a:t>
+            </a:r>
+            <a:r>
+              <a:rPr lang="fr-FR" dirty="0" err="1"/>
+              <a:t>pytest</a:t>
+            </a:r>
+            <a:r>
+              <a:rPr lang="fr-FR" dirty="0"/>
+              <a:t>, Proxy UDP pour interopérabilité, fichiers déterministes, environnement contrôlé (loopback) </a:t>
+            </a:r>
+          </a:p>
+          <a:p>
+            <a:endParaRPr lang="fr-BE" dirty="0"/>
           </a:p>
         </p:txBody>
       </p:sp>
@@ -4182,10 +4223,72 @@
         </p:nvSpPr>
         <p:spPr/>
         <p:txBody>
-          <a:bodyPr/>
-          <a:lstStyle/>
-          <a:p>
-            <a:endParaRPr lang="fr-BE"/>
+          <a:bodyPr>
+            <a:normAutofit/>
+          </a:bodyPr>
+          <a:lstStyle/>
+          <a:p>
+            <a:r>
+              <a:rPr lang="fr-FR" b="1" dirty="0"/>
+              <a:t> Tests unitaires : </a:t>
+            </a:r>
+            <a:r>
+              <a:rPr lang="fr-FR" dirty="0" err="1"/>
+              <a:t>empackage</a:t>
+            </a:r>
+            <a:r>
+              <a:rPr lang="fr-FR" dirty="0"/>
+              <a:t> / </a:t>
+            </a:r>
+            <a:r>
+              <a:rPr lang="fr-FR" dirty="0" err="1"/>
+              <a:t>depackage</a:t>
+            </a:r>
+            <a:r>
+              <a:rPr lang="fr-FR" dirty="0"/>
+              <a:t>, CRC, SACK encode/</a:t>
+            </a:r>
+            <a:r>
+              <a:rPr lang="fr-FR" dirty="0" err="1"/>
+              <a:t>decode</a:t>
+            </a:r>
+            <a:r>
+              <a:rPr lang="fr-FR" dirty="0"/>
+              <a:t> </a:t>
+            </a:r>
+          </a:p>
+          <a:p>
+            <a:r>
+              <a:rPr lang="fr-FR" b="1" dirty="0"/>
+              <a:t>Tests d’intégration : </a:t>
+            </a:r>
+            <a:r>
+              <a:rPr lang="fr-FR" dirty="0"/>
+              <a:t>client ↔ serveur, fichiers de tailles variées </a:t>
+            </a:r>
+          </a:p>
+          <a:p>
+            <a:r>
+              <a:rPr lang="fr-FR" b="1" dirty="0"/>
+              <a:t>Tests d’interopérabilité : </a:t>
+            </a:r>
+            <a:r>
+              <a:rPr lang="fr-FR" dirty="0"/>
+              <a:t>avec implémentation de référence </a:t>
+            </a:r>
+          </a:p>
+          <a:p>
+            <a:r>
+              <a:rPr lang="fr-FR" b="1" dirty="0"/>
+              <a:t>Tests robustesse :</a:t>
+            </a:r>
+            <a:r>
+              <a:rPr lang="fr-FR" dirty="0"/>
+              <a:t>pertes, corruption, multi-clients </a:t>
+            </a:r>
+          </a:p>
+          <a:p>
+            <a:endParaRPr lang="fr-BE" dirty="0"/>
           </a:p>
         </p:txBody>
       </p:sp>
@@ -4193,6 +4296,105 @@
     <p:extLst>
       <p:ext uri="{BB962C8B-B14F-4D97-AF65-F5344CB8AC3E}">
         <p14:creationId xmlns:p14="http://schemas.microsoft.com/office/powerpoint/2010/main" val="3638850692"/>
+      </p:ext>
+    </p:extLst>
+  </p:cSld>
+  <p:clrMapOvr>
+    <a:masterClrMapping/>
+  </p:clrMapOvr>
+</p:sld>
+</file>
+
+<file path=ppt/slides/slide9.xml><?xml version="1.0" encoding="utf-8"?>
+<p:sld xmlns:a="http://schemas.openxmlformats.org/drawingml/2006/main" xmlns:r="http://schemas.openxmlformats.org/officeDocument/2006/relationships" xmlns:p="http://schemas.openxmlformats.org/presentationml/2006/main">
+  <p:cSld>
+    <p:spTree>
+      <p:nvGrpSpPr>
+        <p:cNvPr id="1" name=""/>
+        <p:cNvGrpSpPr/>
+        <p:nvPr/>
+      </p:nvGrpSpPr>
+      <p:grpSpPr>
+        <a:xfrm>
+          <a:off x="0" y="0"/>
+          <a:ext cx="0" cy="0"/>
+          <a:chOff x="0" y="0"/>
+          <a:chExt cx="0" cy="0"/>
+        </a:xfrm>
+      </p:grpSpPr>
+      <p:sp>
+        <p:nvSpPr>
+          <p:cNvPr id="2" name="Titre 1">
+            <a:extLst>
+              <a:ext uri="{FF2B5EF4-FFF2-40B4-BE49-F238E27FC236}">
+                <a16:creationId xmlns:a16="http://schemas.microsoft.com/office/drawing/2014/main" id="{665BC356-2857-F420-C840-CA32203444E3}"/>
+              </a:ext>
+            </a:extLst>
+          </p:cNvPr>
+          <p:cNvSpPr>
+            <a:spLocks noGrp="1"/>
+          </p:cNvSpPr>
+          <p:nvPr>
+            <p:ph type="title"/>
+          </p:nvPr>
+        </p:nvSpPr>
+        <p:spPr/>
+        <p:txBody>
+          <a:bodyPr/>
+          <a:lstStyle/>
+          <a:p>
+            <a:r>
+              <a:rPr lang="fr-BE" dirty="0"/>
+              <a:t>Acquittements sélectifs</a:t>
+            </a:r>
+          </a:p>
+        </p:txBody>
+      </p:sp>
+      <p:sp>
+        <p:nvSpPr>
+          <p:cNvPr id="3" name="Espace réservé du contenu 2">
+            <a:extLst>
+              <a:ext uri="{FF2B5EF4-FFF2-40B4-BE49-F238E27FC236}">
+                <a16:creationId xmlns:a16="http://schemas.microsoft.com/office/drawing/2014/main" id="{4D1BF957-E9DF-D69A-49C0-2A5ECDC58B66}"/>
+              </a:ext>
+            </a:extLst>
+          </p:cNvPr>
+          <p:cNvSpPr>
+            <a:spLocks noGrp="1"/>
+          </p:cNvSpPr>
+          <p:nvPr>
+            <p:ph idx="1"/>
+          </p:nvPr>
+        </p:nvSpPr>
+        <p:spPr/>
+        <p:txBody>
+          <a:bodyPr/>
+          <a:lstStyle/>
+          <a:p>
+            <a:r>
+              <a:rPr lang="fr-BE" dirty="0"/>
+              <a:t>Retransmissions ciblées : plus efficace en cas de perte, moins de trafic inutile</a:t>
+            </a:r>
+          </a:p>
+          <a:p>
+            <a:r>
+              <a:rPr lang="fr-BE" dirty="0"/>
+              <a:t>Gains : amélioration du débit, réduction latence, plus efficace face aux pertes</a:t>
+            </a:r>
+          </a:p>
+          <a:p>
+            <a:pPr>
+              <a:buFont typeface="Wingdings" panose="05000000000000000000" pitchFamily="2" charset="2"/>
+              <a:buChar char="Ø"/>
+            </a:pPr>
+            <a:endParaRPr lang="fr-BE" dirty="0"/>
+          </a:p>
+        </p:txBody>
+      </p:sp>
+    </p:spTree>
+    <p:extLst>
+      <p:ext uri="{BB962C8B-B14F-4D97-AF65-F5344CB8AC3E}">
+        <p14:creationId xmlns:p14="http://schemas.microsoft.com/office/powerpoint/2010/main" val="1681758928"/>
       </p:ext>
     </p:extLst>
   </p:cSld>

--- a/Rapport_projet_SRTP.pptx
+++ b/Rapport_projet_SRTP.pptx
@@ -12,8 +12,9 @@
     <p:sldId id="261" r:id="rId6"/>
     <p:sldId id="262" r:id="rId7"/>
     <p:sldId id="263" r:id="rId8"/>
-    <p:sldId id="264" r:id="rId9"/>
-    <p:sldId id="266" r:id="rId10"/>
+    <p:sldId id="267" r:id="rId9"/>
+    <p:sldId id="264" r:id="rId10"/>
+    <p:sldId id="266" r:id="rId11"/>
   </p:sldIdLst>
   <p:sldSz cx="12192000" cy="6858000"/>
   <p:notesSz cx="6858000" cy="9144000"/>
@@ -3445,6 +3446,105 @@
 </p:sld>
 </file>
 
+<file path=ppt/slides/slide10.xml><?xml version="1.0" encoding="utf-8"?>
+<p:sld xmlns:a="http://schemas.openxmlformats.org/drawingml/2006/main" xmlns:r="http://schemas.openxmlformats.org/officeDocument/2006/relationships" xmlns:p="http://schemas.openxmlformats.org/presentationml/2006/main">
+  <p:cSld>
+    <p:spTree>
+      <p:nvGrpSpPr>
+        <p:cNvPr id="1" name=""/>
+        <p:cNvGrpSpPr/>
+        <p:nvPr/>
+      </p:nvGrpSpPr>
+      <p:grpSpPr>
+        <a:xfrm>
+          <a:off x="0" y="0"/>
+          <a:ext cx="0" cy="0"/>
+          <a:chOff x="0" y="0"/>
+          <a:chExt cx="0" cy="0"/>
+        </a:xfrm>
+      </p:grpSpPr>
+      <p:sp>
+        <p:nvSpPr>
+          <p:cNvPr id="2" name="Titre 1">
+            <a:extLst>
+              <a:ext uri="{FF2B5EF4-FFF2-40B4-BE49-F238E27FC236}">
+                <a16:creationId xmlns:a16="http://schemas.microsoft.com/office/drawing/2014/main" id="{665BC356-2857-F420-C840-CA32203444E3}"/>
+              </a:ext>
+            </a:extLst>
+          </p:cNvPr>
+          <p:cNvSpPr>
+            <a:spLocks noGrp="1"/>
+          </p:cNvSpPr>
+          <p:nvPr>
+            <p:ph type="title"/>
+          </p:nvPr>
+        </p:nvSpPr>
+        <p:spPr/>
+        <p:txBody>
+          <a:bodyPr/>
+          <a:lstStyle/>
+          <a:p>
+            <a:r>
+              <a:rPr lang="fr-BE" dirty="0"/>
+              <a:t>Acquittements sélectifs</a:t>
+            </a:r>
+          </a:p>
+        </p:txBody>
+      </p:sp>
+      <p:sp>
+        <p:nvSpPr>
+          <p:cNvPr id="3" name="Espace réservé du contenu 2">
+            <a:extLst>
+              <a:ext uri="{FF2B5EF4-FFF2-40B4-BE49-F238E27FC236}">
+                <a16:creationId xmlns:a16="http://schemas.microsoft.com/office/drawing/2014/main" id="{4D1BF957-E9DF-D69A-49C0-2A5ECDC58B66}"/>
+              </a:ext>
+            </a:extLst>
+          </p:cNvPr>
+          <p:cNvSpPr>
+            <a:spLocks noGrp="1"/>
+          </p:cNvSpPr>
+          <p:nvPr>
+            <p:ph idx="1"/>
+          </p:nvPr>
+        </p:nvSpPr>
+        <p:spPr/>
+        <p:txBody>
+          <a:bodyPr/>
+          <a:lstStyle/>
+          <a:p>
+            <a:r>
+              <a:rPr lang="fr-BE" dirty="0"/>
+              <a:t>Retransmissions ciblées : plus efficace en cas de perte, moins de trafic inutile</a:t>
+            </a:r>
+          </a:p>
+          <a:p>
+            <a:r>
+              <a:rPr lang="fr-BE" dirty="0"/>
+              <a:t>Gains : amélioration du débit, réduction latence, plus efficace face aux pertes (moins de retransmissions)</a:t>
+            </a:r>
+          </a:p>
+          <a:p>
+            <a:pPr>
+              <a:buFont typeface="Wingdings" panose="05000000000000000000" pitchFamily="2" charset="2"/>
+              <a:buChar char="Ø"/>
+            </a:pPr>
+            <a:endParaRPr lang="fr-BE" dirty="0"/>
+          </a:p>
+        </p:txBody>
+      </p:sp>
+    </p:spTree>
+    <p:extLst>
+      <p:ext uri="{BB962C8B-B14F-4D97-AF65-F5344CB8AC3E}">
+        <p14:creationId xmlns:p14="http://schemas.microsoft.com/office/powerpoint/2010/main" val="1681758928"/>
+      </p:ext>
+    </p:extLst>
+  </p:cSld>
+  <p:clrMapOvr>
+    <a:masterClrMapping/>
+  </p:clrMapOvr>
+</p:sld>
+</file>
+
 <file path=ppt/slides/slide2.xml><?xml version="1.0" encoding="utf-8"?>
 <p:sld xmlns:a="http://schemas.openxmlformats.org/drawingml/2006/main" xmlns:r="http://schemas.openxmlformats.org/officeDocument/2006/relationships" xmlns:p="http://schemas.openxmlformats.org/presentationml/2006/main">
   <p:cSld>
@@ -4179,123 +4279,1859 @@
       </p:grpSpPr>
       <p:sp>
         <p:nvSpPr>
-          <p:cNvPr id="2" name="Titre 1">
-            <a:extLst>
-              <a:ext uri="{FF2B5EF4-FFF2-40B4-BE49-F238E27FC236}">
-                <a16:creationId xmlns:a16="http://schemas.microsoft.com/office/drawing/2014/main" id="{93966033-240C-9EA6-F680-D9EEFEFA2B33}"/>
-              </a:ext>
-            </a:extLst>
-          </p:cNvPr>
-          <p:cNvSpPr>
-            <a:spLocks noGrp="1"/>
-          </p:cNvSpPr>
-          <p:nvPr>
-            <p:ph type="title"/>
-          </p:nvPr>
-        </p:nvSpPr>
-        <p:spPr/>
+          <p:cNvPr id="3" name="Espace réservé du contenu 2">
+            <a:extLst>
+              <a:ext uri="{FF2B5EF4-FFF2-40B4-BE49-F238E27FC236}">
+                <a16:creationId xmlns:a16="http://schemas.microsoft.com/office/drawing/2014/main" id="{B3594255-E7EC-3F1F-DEE5-9B856BC9339B}"/>
+              </a:ext>
+            </a:extLst>
+          </p:cNvPr>
+          <p:cNvSpPr>
+            <a:spLocks noGrp="1"/>
+          </p:cNvSpPr>
+          <p:nvPr>
+            <p:ph idx="1"/>
+          </p:nvPr>
+        </p:nvSpPr>
+        <p:spPr>
+          <a:xfrm>
+            <a:off x="838200" y="0"/>
+            <a:ext cx="10515600" cy="6766560"/>
+          </a:xfrm>
+        </p:spPr>
         <p:txBody>
           <a:bodyPr/>
           <a:lstStyle/>
           <a:p>
+            <a:pPr marL="0" indent="0">
+              <a:buNone/>
+            </a:pPr>
             <a:r>
               <a:rPr lang="fr-BE" dirty="0"/>
-              <a:t>Tests</a:t>
-            </a:r>
-          </a:p>
-        </p:txBody>
-      </p:sp>
-      <p:sp>
-        <p:nvSpPr>
-          <p:cNvPr id="3" name="Espace réservé du contenu 2">
-            <a:extLst>
-              <a:ext uri="{FF2B5EF4-FFF2-40B4-BE49-F238E27FC236}">
-                <a16:creationId xmlns:a16="http://schemas.microsoft.com/office/drawing/2014/main" id="{2E8B874C-98CB-20AD-055C-CE7C143C9C0F}"/>
-              </a:ext>
-            </a:extLst>
-          </p:cNvPr>
-          <p:cNvSpPr>
-            <a:spLocks noGrp="1"/>
-          </p:cNvSpPr>
-          <p:nvPr>
-            <p:ph idx="1"/>
-          </p:nvPr>
-        </p:nvSpPr>
-        <p:spPr/>
-        <p:txBody>
-          <a:bodyPr>
-            <a:normAutofit/>
+              <a:t> </a:t>
+            </a:r>
+          </a:p>
+        </p:txBody>
+      </p:sp>
+      <p:graphicFrame>
+        <p:nvGraphicFramePr>
+          <p:cNvPr id="4" name="Tableau 3">
+            <a:extLst>
+              <a:ext uri="{FF2B5EF4-FFF2-40B4-BE49-F238E27FC236}">
+                <a16:creationId xmlns:a16="http://schemas.microsoft.com/office/drawing/2014/main" id="{A3FA5860-7BE6-9223-B071-F70F567C7CBF}"/>
+              </a:ext>
+            </a:extLst>
+          </p:cNvPr>
+          <p:cNvGraphicFramePr>
+            <a:graphicFrameLocks noGrp="1"/>
+          </p:cNvGraphicFramePr>
+          <p:nvPr>
+            <p:extLst>
+              <p:ext uri="{D42A27DB-BD31-4B8C-83A1-F6EECF244321}">
+                <p14:modId xmlns:p14="http://schemas.microsoft.com/office/powerpoint/2010/main" val="2237111868"/>
+              </p:ext>
+            </p:extLst>
+          </p:nvPr>
+        </p:nvGraphicFramePr>
+        <p:xfrm>
+          <a:off x="838200" y="561364"/>
+          <a:ext cx="7464552" cy="1463040"/>
+        </p:xfrm>
+        <a:graphic>
+          <a:graphicData uri="http://schemas.openxmlformats.org/drawingml/2006/table">
+            <a:tbl>
+              <a:tblPr/>
+              <a:tblGrid>
+                <a:gridCol w="1866138">
+                  <a:extLst>
+                    <a:ext uri="{9D8B030D-6E8A-4147-A177-3AD203B41FA5}">
+                      <a16:colId xmlns:a16="http://schemas.microsoft.com/office/drawing/2014/main" val="2205102735"/>
+                    </a:ext>
+                  </a:extLst>
+                </a:gridCol>
+                <a:gridCol w="1866138">
+                  <a:extLst>
+                    <a:ext uri="{9D8B030D-6E8A-4147-A177-3AD203B41FA5}">
+                      <a16:colId xmlns:a16="http://schemas.microsoft.com/office/drawing/2014/main" val="1732646216"/>
+                    </a:ext>
+                  </a:extLst>
+                </a:gridCol>
+                <a:gridCol w="1866138">
+                  <a:extLst>
+                    <a:ext uri="{9D8B030D-6E8A-4147-A177-3AD203B41FA5}">
+                      <a16:colId xmlns:a16="http://schemas.microsoft.com/office/drawing/2014/main" val="797674455"/>
+                    </a:ext>
+                  </a:extLst>
+                </a:gridCol>
+                <a:gridCol w="1866138">
+                  <a:extLst>
+                    <a:ext uri="{9D8B030D-6E8A-4147-A177-3AD203B41FA5}">
+                      <a16:colId xmlns:a16="http://schemas.microsoft.com/office/drawing/2014/main" val="1703387754"/>
+                    </a:ext>
+                  </a:extLst>
+                </a:gridCol>
+              </a:tblGrid>
+              <a:tr h="0">
+                <a:tc>
+                  <a:txBody>
+                    <a:bodyPr/>
+                    <a:lstStyle/>
+                    <a:p>
+                      <a:pPr>
+                        <a:buNone/>
+                      </a:pPr>
+                      <a:r>
+                        <a:rPr lang="fr-BE" dirty="0"/>
+                        <a:t>Taille fichier</a:t>
+                      </a:r>
+                    </a:p>
+                  </a:txBody>
+                  <a:tcPr anchor="ctr">
+                    <a:lnL>
+                      <a:noFill/>
+                    </a:lnL>
+                    <a:lnR>
+                      <a:noFill/>
+                    </a:lnR>
+                    <a:lnT>
+                      <a:noFill/>
+                    </a:lnT>
+                    <a:lnB>
+                      <a:noFill/>
+                    </a:lnB>
+                    <a:noFill/>
+                  </a:tcPr>
+                </a:tc>
+                <a:tc>
+                  <a:txBody>
+                    <a:bodyPr/>
+                    <a:lstStyle/>
+                    <a:p>
+                      <a:pPr>
+                        <a:buNone/>
+                      </a:pPr>
+                      <a:r>
+                        <a:rPr lang="fr-BE"/>
+                        <a:t>Temps</a:t>
+                      </a:r>
+                    </a:p>
+                  </a:txBody>
+                  <a:tcPr anchor="ctr">
+                    <a:lnL>
+                      <a:noFill/>
+                    </a:lnL>
+                    <a:lnR>
+                      <a:noFill/>
+                    </a:lnR>
+                    <a:lnT>
+                      <a:noFill/>
+                    </a:lnT>
+                    <a:lnB>
+                      <a:noFill/>
+                    </a:lnB>
+                    <a:noFill/>
+                  </a:tcPr>
+                </a:tc>
+                <a:tc>
+                  <a:txBody>
+                    <a:bodyPr/>
+                    <a:lstStyle/>
+                    <a:p>
+                      <a:pPr>
+                        <a:buNone/>
+                      </a:pPr>
+                      <a:r>
+                        <a:rPr lang="fr-BE"/>
+                        <a:t>Débit</a:t>
+                      </a:r>
+                    </a:p>
+                  </a:txBody>
+                  <a:tcPr anchor="ctr">
+                    <a:lnL>
+                      <a:noFill/>
+                    </a:lnL>
+                    <a:lnR>
+                      <a:noFill/>
+                    </a:lnR>
+                    <a:lnT>
+                      <a:noFill/>
+                    </a:lnT>
+                    <a:lnB>
+                      <a:noFill/>
+                    </a:lnB>
+                    <a:noFill/>
+                  </a:tcPr>
+                </a:tc>
+                <a:tc>
+                  <a:txBody>
+                    <a:bodyPr/>
+                    <a:lstStyle/>
+                    <a:p>
+                      <a:pPr>
+                        <a:buNone/>
+                      </a:pPr>
+                      <a:r>
+                        <a:rPr lang="fr-BE"/>
+                        <a:t>Retransmissions</a:t>
+                      </a:r>
+                    </a:p>
+                  </a:txBody>
+                  <a:tcPr anchor="ctr">
+                    <a:lnL>
+                      <a:noFill/>
+                    </a:lnL>
+                    <a:lnR>
+                      <a:noFill/>
+                    </a:lnR>
+                    <a:lnT>
+                      <a:noFill/>
+                    </a:lnT>
+                    <a:lnB>
+                      <a:noFill/>
+                    </a:lnB>
+                    <a:noFill/>
+                  </a:tcPr>
+                </a:tc>
+                <a:extLst>
+                  <a:ext uri="{0D108BD9-81ED-4DB2-BD59-A6C34878D82A}">
+                    <a16:rowId xmlns:a16="http://schemas.microsoft.com/office/drawing/2014/main" val="104180528"/>
+                  </a:ext>
+                </a:extLst>
+              </a:tr>
+              <a:tr h="0">
+                <a:tc>
+                  <a:txBody>
+                    <a:bodyPr/>
+                    <a:lstStyle/>
+                    <a:p>
+                      <a:pPr>
+                        <a:buNone/>
+                      </a:pPr>
+                      <a:r>
+                        <a:rPr lang="fr-BE"/>
+                        <a:t>500 B</a:t>
+                      </a:r>
+                    </a:p>
+                  </a:txBody>
+                  <a:tcPr anchor="ctr">
+                    <a:lnL>
+                      <a:noFill/>
+                    </a:lnL>
+                    <a:lnR>
+                      <a:noFill/>
+                    </a:lnR>
+                    <a:lnT>
+                      <a:noFill/>
+                    </a:lnT>
+                    <a:lnB>
+                      <a:noFill/>
+                    </a:lnB>
+                    <a:noFill/>
+                  </a:tcPr>
+                </a:tc>
+                <a:tc>
+                  <a:txBody>
+                    <a:bodyPr/>
+                    <a:lstStyle/>
+                    <a:p>
+                      <a:pPr>
+                        <a:buNone/>
+                      </a:pPr>
+                      <a:r>
+                        <a:rPr lang="fr-BE" dirty="0"/>
+                        <a:t>6 ms</a:t>
+                      </a:r>
+                    </a:p>
+                  </a:txBody>
+                  <a:tcPr anchor="ctr">
+                    <a:lnL>
+                      <a:noFill/>
+                    </a:lnL>
+                    <a:lnR>
+                      <a:noFill/>
+                    </a:lnR>
+                    <a:lnT>
+                      <a:noFill/>
+                    </a:lnT>
+                    <a:lnB>
+                      <a:noFill/>
+                    </a:lnB>
+                    <a:noFill/>
+                  </a:tcPr>
+                </a:tc>
+                <a:tc>
+                  <a:txBody>
+                    <a:bodyPr/>
+                    <a:lstStyle/>
+                    <a:p>
+                      <a:pPr>
+                        <a:buNone/>
+                      </a:pPr>
+                      <a:r>
+                        <a:rPr lang="fr-BE" dirty="0"/>
+                        <a:t>98 KB/s</a:t>
+                      </a:r>
+                    </a:p>
+                  </a:txBody>
+                  <a:tcPr anchor="ctr">
+                    <a:lnL>
+                      <a:noFill/>
+                    </a:lnL>
+                    <a:lnR>
+                      <a:noFill/>
+                    </a:lnR>
+                    <a:lnT>
+                      <a:noFill/>
+                    </a:lnT>
+                    <a:lnB>
+                      <a:noFill/>
+                    </a:lnB>
+                    <a:noFill/>
+                  </a:tcPr>
+                </a:tc>
+                <a:tc>
+                  <a:txBody>
+                    <a:bodyPr/>
+                    <a:lstStyle/>
+                    <a:p>
+                      <a:pPr>
+                        <a:buNone/>
+                      </a:pPr>
+                      <a:r>
+                        <a:rPr lang="fr-BE"/>
+                        <a:t>0</a:t>
+                      </a:r>
+                    </a:p>
+                  </a:txBody>
+                  <a:tcPr anchor="ctr">
+                    <a:lnL>
+                      <a:noFill/>
+                    </a:lnL>
+                    <a:lnR>
+                      <a:noFill/>
+                    </a:lnR>
+                    <a:lnT>
+                      <a:noFill/>
+                    </a:lnT>
+                    <a:lnB>
+                      <a:noFill/>
+                    </a:lnB>
+                    <a:noFill/>
+                  </a:tcPr>
+                </a:tc>
+                <a:extLst>
+                  <a:ext uri="{0D108BD9-81ED-4DB2-BD59-A6C34878D82A}">
+                    <a16:rowId xmlns:a16="http://schemas.microsoft.com/office/drawing/2014/main" val="206193627"/>
+                  </a:ext>
+                </a:extLst>
+              </a:tr>
+              <a:tr h="0">
+                <a:tc>
+                  <a:txBody>
+                    <a:bodyPr/>
+                    <a:lstStyle/>
+                    <a:p>
+                      <a:pPr>
+                        <a:buNone/>
+                      </a:pPr>
+                      <a:r>
+                        <a:rPr lang="fr-BE"/>
+                        <a:t>5 KB</a:t>
+                      </a:r>
+                    </a:p>
+                  </a:txBody>
+                  <a:tcPr anchor="ctr">
+                    <a:lnL>
+                      <a:noFill/>
+                    </a:lnL>
+                    <a:lnR>
+                      <a:noFill/>
+                    </a:lnR>
+                    <a:lnT>
+                      <a:noFill/>
+                    </a:lnT>
+                    <a:lnB>
+                      <a:noFill/>
+                    </a:lnB>
+                    <a:noFill/>
+                  </a:tcPr>
+                </a:tc>
+                <a:tc>
+                  <a:txBody>
+                    <a:bodyPr/>
+                    <a:lstStyle/>
+                    <a:p>
+                      <a:pPr>
+                        <a:buNone/>
+                      </a:pPr>
+                      <a:r>
+                        <a:rPr lang="fr-BE" dirty="0"/>
+                        <a:t>17 ms</a:t>
+                      </a:r>
+                    </a:p>
+                  </a:txBody>
+                  <a:tcPr anchor="ctr">
+                    <a:lnL>
+                      <a:noFill/>
+                    </a:lnL>
+                    <a:lnR>
+                      <a:noFill/>
+                    </a:lnR>
+                    <a:lnT>
+                      <a:noFill/>
+                    </a:lnT>
+                    <a:lnB>
+                      <a:noFill/>
+                    </a:lnB>
+                    <a:noFill/>
+                  </a:tcPr>
+                </a:tc>
+                <a:tc>
+                  <a:txBody>
+                    <a:bodyPr/>
+                    <a:lstStyle/>
+                    <a:p>
+                      <a:pPr>
+                        <a:buNone/>
+                      </a:pPr>
+                      <a:r>
+                        <a:rPr lang="fr-BE" dirty="0"/>
+                        <a:t>324 KB/s</a:t>
+                      </a:r>
+                    </a:p>
+                  </a:txBody>
+                  <a:tcPr anchor="ctr">
+                    <a:lnL>
+                      <a:noFill/>
+                    </a:lnL>
+                    <a:lnR>
+                      <a:noFill/>
+                    </a:lnR>
+                    <a:lnT>
+                      <a:noFill/>
+                    </a:lnT>
+                    <a:lnB>
+                      <a:noFill/>
+                    </a:lnB>
+                    <a:noFill/>
+                  </a:tcPr>
+                </a:tc>
+                <a:tc>
+                  <a:txBody>
+                    <a:bodyPr/>
+                    <a:lstStyle/>
+                    <a:p>
+                      <a:pPr>
+                        <a:buNone/>
+                      </a:pPr>
+                      <a:r>
+                        <a:rPr lang="fr-BE"/>
+                        <a:t>0</a:t>
+                      </a:r>
+                    </a:p>
+                  </a:txBody>
+                  <a:tcPr anchor="ctr">
+                    <a:lnL>
+                      <a:noFill/>
+                    </a:lnL>
+                    <a:lnR>
+                      <a:noFill/>
+                    </a:lnR>
+                    <a:lnT>
+                      <a:noFill/>
+                    </a:lnT>
+                    <a:lnB>
+                      <a:noFill/>
+                    </a:lnB>
+                    <a:noFill/>
+                  </a:tcPr>
+                </a:tc>
+                <a:extLst>
+                  <a:ext uri="{0D108BD9-81ED-4DB2-BD59-A6C34878D82A}">
+                    <a16:rowId xmlns:a16="http://schemas.microsoft.com/office/drawing/2014/main" val="2301649309"/>
+                  </a:ext>
+                </a:extLst>
+              </a:tr>
+              <a:tr h="0">
+                <a:tc>
+                  <a:txBody>
+                    <a:bodyPr/>
+                    <a:lstStyle/>
+                    <a:p>
+                      <a:pPr>
+                        <a:buNone/>
+                      </a:pPr>
+                      <a:r>
+                        <a:rPr lang="fr-BE"/>
+                        <a:t>50 KB</a:t>
+                      </a:r>
+                    </a:p>
+                  </a:txBody>
+                  <a:tcPr anchor="ctr">
+                    <a:lnL>
+                      <a:noFill/>
+                    </a:lnL>
+                    <a:lnR>
+                      <a:noFill/>
+                    </a:lnR>
+                    <a:lnT>
+                      <a:noFill/>
+                    </a:lnT>
+                    <a:lnB>
+                      <a:noFill/>
+                    </a:lnB>
+                    <a:noFill/>
+                  </a:tcPr>
+                </a:tc>
+                <a:tc>
+                  <a:txBody>
+                    <a:bodyPr/>
+                    <a:lstStyle/>
+                    <a:p>
+                      <a:pPr>
+                        <a:buNone/>
+                      </a:pPr>
+                      <a:r>
+                        <a:rPr lang="fr-BE" dirty="0"/>
+                        <a:t>85 ms</a:t>
+                      </a:r>
+                    </a:p>
+                  </a:txBody>
+                  <a:tcPr anchor="ctr">
+                    <a:lnL>
+                      <a:noFill/>
+                    </a:lnL>
+                    <a:lnR>
+                      <a:noFill/>
+                    </a:lnR>
+                    <a:lnT>
+                      <a:noFill/>
+                    </a:lnT>
+                    <a:lnB>
+                      <a:noFill/>
+                    </a:lnB>
+                    <a:noFill/>
+                  </a:tcPr>
+                </a:tc>
+                <a:tc>
+                  <a:txBody>
+                    <a:bodyPr/>
+                    <a:lstStyle/>
+                    <a:p>
+                      <a:pPr>
+                        <a:buNone/>
+                      </a:pPr>
+                      <a:r>
+                        <a:rPr lang="fr-BE" dirty="0"/>
+                        <a:t>619 KB/s</a:t>
+                      </a:r>
+                    </a:p>
+                  </a:txBody>
+                  <a:tcPr anchor="ctr">
+                    <a:lnL>
+                      <a:noFill/>
+                    </a:lnL>
+                    <a:lnR>
+                      <a:noFill/>
+                    </a:lnR>
+                    <a:lnT>
+                      <a:noFill/>
+                    </a:lnT>
+                    <a:lnB>
+                      <a:noFill/>
+                    </a:lnB>
+                    <a:noFill/>
+                  </a:tcPr>
+                </a:tc>
+                <a:tc>
+                  <a:txBody>
+                    <a:bodyPr/>
+                    <a:lstStyle/>
+                    <a:p>
+                      <a:pPr>
+                        <a:buNone/>
+                      </a:pPr>
+                      <a:r>
+                        <a:rPr lang="fr-BE" dirty="0"/>
+                        <a:t>0</a:t>
+                      </a:r>
+                    </a:p>
+                  </a:txBody>
+                  <a:tcPr anchor="ctr">
+                    <a:lnL>
+                      <a:noFill/>
+                    </a:lnL>
+                    <a:lnR>
+                      <a:noFill/>
+                    </a:lnR>
+                    <a:lnT>
+                      <a:noFill/>
+                    </a:lnT>
+                    <a:lnB>
+                      <a:noFill/>
+                    </a:lnB>
+                    <a:noFill/>
+                  </a:tcPr>
+                </a:tc>
+                <a:extLst>
+                  <a:ext uri="{0D108BD9-81ED-4DB2-BD59-A6C34878D82A}">
+                    <a16:rowId xmlns:a16="http://schemas.microsoft.com/office/drawing/2014/main" val="4152128043"/>
+                  </a:ext>
+                </a:extLst>
+              </a:tr>
+            </a:tbl>
+          </a:graphicData>
+        </a:graphic>
+      </p:graphicFrame>
+      <p:graphicFrame>
+        <p:nvGraphicFramePr>
+          <p:cNvPr id="7" name="Tableau 6">
+            <a:extLst>
+              <a:ext uri="{FF2B5EF4-FFF2-40B4-BE49-F238E27FC236}">
+                <a16:creationId xmlns:a16="http://schemas.microsoft.com/office/drawing/2014/main" id="{70892891-7F5D-F2F3-345B-E0F52702AB06}"/>
+              </a:ext>
+            </a:extLst>
+          </p:cNvPr>
+          <p:cNvGraphicFramePr>
+            <a:graphicFrameLocks noGrp="1"/>
+          </p:cNvGraphicFramePr>
+          <p:nvPr>
+            <p:extLst>
+              <p:ext uri="{D42A27DB-BD31-4B8C-83A1-F6EECF244321}">
+                <p14:modId xmlns:p14="http://schemas.microsoft.com/office/powerpoint/2010/main" val="962946953"/>
+              </p:ext>
+            </p:extLst>
+          </p:nvPr>
+        </p:nvGraphicFramePr>
+        <p:xfrm>
+          <a:off x="838200" y="2697480"/>
+          <a:ext cx="7546848" cy="1463040"/>
+        </p:xfrm>
+        <a:graphic>
+          <a:graphicData uri="http://schemas.openxmlformats.org/drawingml/2006/table">
+            <a:tbl>
+              <a:tblPr/>
+              <a:tblGrid>
+                <a:gridCol w="1886712">
+                  <a:extLst>
+                    <a:ext uri="{9D8B030D-6E8A-4147-A177-3AD203B41FA5}">
+                      <a16:colId xmlns:a16="http://schemas.microsoft.com/office/drawing/2014/main" val="4176000407"/>
+                    </a:ext>
+                  </a:extLst>
+                </a:gridCol>
+                <a:gridCol w="1886712">
+                  <a:extLst>
+                    <a:ext uri="{9D8B030D-6E8A-4147-A177-3AD203B41FA5}">
+                      <a16:colId xmlns:a16="http://schemas.microsoft.com/office/drawing/2014/main" val="890025117"/>
+                    </a:ext>
+                  </a:extLst>
+                </a:gridCol>
+                <a:gridCol w="1886712">
+                  <a:extLst>
+                    <a:ext uri="{9D8B030D-6E8A-4147-A177-3AD203B41FA5}">
+                      <a16:colId xmlns:a16="http://schemas.microsoft.com/office/drawing/2014/main" val="2112727141"/>
+                    </a:ext>
+                  </a:extLst>
+                </a:gridCol>
+                <a:gridCol w="1886712">
+                  <a:extLst>
+                    <a:ext uri="{9D8B030D-6E8A-4147-A177-3AD203B41FA5}">
+                      <a16:colId xmlns:a16="http://schemas.microsoft.com/office/drawing/2014/main" val="3296924093"/>
+                    </a:ext>
+                  </a:extLst>
+                </a:gridCol>
+              </a:tblGrid>
+              <a:tr h="0">
+                <a:tc>
+                  <a:txBody>
+                    <a:bodyPr/>
+                    <a:lstStyle/>
+                    <a:p>
+                      <a:pPr>
+                        <a:buNone/>
+                      </a:pPr>
+                      <a:r>
+                        <a:rPr lang="fr-BE"/>
+                        <a:t>Taille fichier</a:t>
+                      </a:r>
+                    </a:p>
+                  </a:txBody>
+                  <a:tcPr anchor="ctr">
+                    <a:lnL>
+                      <a:noFill/>
+                    </a:lnL>
+                    <a:lnR>
+                      <a:noFill/>
+                    </a:lnR>
+                    <a:lnT>
+                      <a:noFill/>
+                    </a:lnT>
+                    <a:lnB>
+                      <a:noFill/>
+                    </a:lnB>
+                    <a:noFill/>
+                  </a:tcPr>
+                </a:tc>
+                <a:tc>
+                  <a:txBody>
+                    <a:bodyPr/>
+                    <a:lstStyle/>
+                    <a:p>
+                      <a:pPr>
+                        <a:buNone/>
+                      </a:pPr>
+                      <a:r>
+                        <a:rPr lang="fr-BE"/>
+                        <a:t>Temps</a:t>
+                      </a:r>
+                    </a:p>
+                  </a:txBody>
+                  <a:tcPr anchor="ctr">
+                    <a:lnL>
+                      <a:noFill/>
+                    </a:lnL>
+                    <a:lnR>
+                      <a:noFill/>
+                    </a:lnR>
+                    <a:lnT>
+                      <a:noFill/>
+                    </a:lnT>
+                    <a:lnB>
+                      <a:noFill/>
+                    </a:lnB>
+                    <a:noFill/>
+                  </a:tcPr>
+                </a:tc>
+                <a:tc>
+                  <a:txBody>
+                    <a:bodyPr/>
+                    <a:lstStyle/>
+                    <a:p>
+                      <a:pPr>
+                        <a:buNone/>
+                      </a:pPr>
+                      <a:r>
+                        <a:rPr lang="fr-BE"/>
+                        <a:t>Débit</a:t>
+                      </a:r>
+                    </a:p>
+                  </a:txBody>
+                  <a:tcPr anchor="ctr">
+                    <a:lnL>
+                      <a:noFill/>
+                    </a:lnL>
+                    <a:lnR>
+                      <a:noFill/>
+                    </a:lnR>
+                    <a:lnT>
+                      <a:noFill/>
+                    </a:lnT>
+                    <a:lnB>
+                      <a:noFill/>
+                    </a:lnB>
+                    <a:noFill/>
+                  </a:tcPr>
+                </a:tc>
+                <a:tc>
+                  <a:txBody>
+                    <a:bodyPr/>
+                    <a:lstStyle/>
+                    <a:p>
+                      <a:pPr>
+                        <a:buNone/>
+                      </a:pPr>
+                      <a:r>
+                        <a:rPr lang="fr-BE"/>
+                        <a:t>Retransmissions</a:t>
+                      </a:r>
+                    </a:p>
+                  </a:txBody>
+                  <a:tcPr anchor="ctr">
+                    <a:lnL>
+                      <a:noFill/>
+                    </a:lnL>
+                    <a:lnR>
+                      <a:noFill/>
+                    </a:lnR>
+                    <a:lnT>
+                      <a:noFill/>
+                    </a:lnT>
+                    <a:lnB>
+                      <a:noFill/>
+                    </a:lnB>
+                    <a:noFill/>
+                  </a:tcPr>
+                </a:tc>
+                <a:extLst>
+                  <a:ext uri="{0D108BD9-81ED-4DB2-BD59-A6C34878D82A}">
+                    <a16:rowId xmlns:a16="http://schemas.microsoft.com/office/drawing/2014/main" val="1181159754"/>
+                  </a:ext>
+                </a:extLst>
+              </a:tr>
+              <a:tr h="0">
+                <a:tc>
+                  <a:txBody>
+                    <a:bodyPr/>
+                    <a:lstStyle/>
+                    <a:p>
+                      <a:pPr>
+                        <a:buNone/>
+                      </a:pPr>
+                      <a:r>
+                        <a:rPr lang="fr-BE"/>
+                        <a:t>500 B</a:t>
+                      </a:r>
+                    </a:p>
+                  </a:txBody>
+                  <a:tcPr anchor="ctr">
+                    <a:lnL>
+                      <a:noFill/>
+                    </a:lnL>
+                    <a:lnR>
+                      <a:noFill/>
+                    </a:lnR>
+                    <a:lnT>
+                      <a:noFill/>
+                    </a:lnT>
+                    <a:lnB>
+                      <a:noFill/>
+                    </a:lnB>
+                    <a:noFill/>
+                  </a:tcPr>
+                </a:tc>
+                <a:tc>
+                  <a:txBody>
+                    <a:bodyPr/>
+                    <a:lstStyle/>
+                    <a:p>
+                      <a:pPr>
+                        <a:buNone/>
+                      </a:pPr>
+                      <a:r>
+                        <a:rPr lang="fr-BE" dirty="0"/>
+                        <a:t>9 ms</a:t>
+                      </a:r>
+                    </a:p>
+                  </a:txBody>
+                  <a:tcPr anchor="ctr">
+                    <a:lnL>
+                      <a:noFill/>
+                    </a:lnL>
+                    <a:lnR>
+                      <a:noFill/>
+                    </a:lnR>
+                    <a:lnT>
+                      <a:noFill/>
+                    </a:lnT>
+                    <a:lnB>
+                      <a:noFill/>
+                    </a:lnB>
+                    <a:noFill/>
+                  </a:tcPr>
+                </a:tc>
+                <a:tc>
+                  <a:txBody>
+                    <a:bodyPr/>
+                    <a:lstStyle/>
+                    <a:p>
+                      <a:pPr>
+                        <a:buNone/>
+                      </a:pPr>
+                      <a:r>
+                        <a:rPr lang="fr-BE" dirty="0"/>
+                        <a:t>58 KB/s</a:t>
+                      </a:r>
+                    </a:p>
+                  </a:txBody>
+                  <a:tcPr anchor="ctr">
+                    <a:lnL>
+                      <a:noFill/>
+                    </a:lnL>
+                    <a:lnR>
+                      <a:noFill/>
+                    </a:lnR>
+                    <a:lnT>
+                      <a:noFill/>
+                    </a:lnT>
+                    <a:lnB>
+                      <a:noFill/>
+                    </a:lnB>
+                    <a:noFill/>
+                  </a:tcPr>
+                </a:tc>
+                <a:tc>
+                  <a:txBody>
+                    <a:bodyPr/>
+                    <a:lstStyle/>
+                    <a:p>
+                      <a:pPr>
+                        <a:buNone/>
+                      </a:pPr>
+                      <a:r>
+                        <a:rPr lang="fr-BE"/>
+                        <a:t>2</a:t>
+                      </a:r>
+                    </a:p>
+                  </a:txBody>
+                  <a:tcPr anchor="ctr">
+                    <a:lnL>
+                      <a:noFill/>
+                    </a:lnL>
+                    <a:lnR>
+                      <a:noFill/>
+                    </a:lnR>
+                    <a:lnT>
+                      <a:noFill/>
+                    </a:lnT>
+                    <a:lnB>
+                      <a:noFill/>
+                    </a:lnB>
+                    <a:noFill/>
+                  </a:tcPr>
+                </a:tc>
+                <a:extLst>
+                  <a:ext uri="{0D108BD9-81ED-4DB2-BD59-A6C34878D82A}">
+                    <a16:rowId xmlns:a16="http://schemas.microsoft.com/office/drawing/2014/main" val="1915089580"/>
+                  </a:ext>
+                </a:extLst>
+              </a:tr>
+              <a:tr h="0">
+                <a:tc>
+                  <a:txBody>
+                    <a:bodyPr/>
+                    <a:lstStyle/>
+                    <a:p>
+                      <a:pPr>
+                        <a:buNone/>
+                      </a:pPr>
+                      <a:r>
+                        <a:rPr lang="fr-BE"/>
+                        <a:t>5 KB</a:t>
+                      </a:r>
+                    </a:p>
+                  </a:txBody>
+                  <a:tcPr anchor="ctr">
+                    <a:lnL>
+                      <a:noFill/>
+                    </a:lnL>
+                    <a:lnR>
+                      <a:noFill/>
+                    </a:lnR>
+                    <a:lnT>
+                      <a:noFill/>
+                    </a:lnT>
+                    <a:lnB>
+                      <a:noFill/>
+                    </a:lnB>
+                    <a:noFill/>
+                  </a:tcPr>
+                </a:tc>
+                <a:tc>
+                  <a:txBody>
+                    <a:bodyPr/>
+                    <a:lstStyle/>
+                    <a:p>
+                      <a:pPr>
+                        <a:buNone/>
+                      </a:pPr>
+                      <a:r>
+                        <a:rPr lang="fr-BE" dirty="0"/>
+                        <a:t>39 ms</a:t>
+                      </a:r>
+                    </a:p>
+                  </a:txBody>
+                  <a:tcPr anchor="ctr">
+                    <a:lnL>
+                      <a:noFill/>
+                    </a:lnL>
+                    <a:lnR>
+                      <a:noFill/>
+                    </a:lnR>
+                    <a:lnT>
+                      <a:noFill/>
+                    </a:lnT>
+                    <a:lnB>
+                      <a:noFill/>
+                    </a:lnB>
+                    <a:noFill/>
+                  </a:tcPr>
+                </a:tc>
+                <a:tc>
+                  <a:txBody>
+                    <a:bodyPr/>
+                    <a:lstStyle/>
+                    <a:p>
+                      <a:pPr>
+                        <a:buNone/>
+                      </a:pPr>
+                      <a:r>
+                        <a:rPr lang="fr-BE" dirty="0"/>
+                        <a:t>133 KB/s</a:t>
+                      </a:r>
+                    </a:p>
+                  </a:txBody>
+                  <a:tcPr anchor="ctr">
+                    <a:lnL>
+                      <a:noFill/>
+                    </a:lnL>
+                    <a:lnR>
+                      <a:noFill/>
+                    </a:lnR>
+                    <a:lnT>
+                      <a:noFill/>
+                    </a:lnT>
+                    <a:lnB>
+                      <a:noFill/>
+                    </a:lnB>
+                    <a:noFill/>
+                  </a:tcPr>
+                </a:tc>
+                <a:tc>
+                  <a:txBody>
+                    <a:bodyPr/>
+                    <a:lstStyle/>
+                    <a:p>
+                      <a:pPr>
+                        <a:buNone/>
+                      </a:pPr>
+                      <a:r>
+                        <a:rPr lang="fr-BE" dirty="0"/>
+                        <a:t>13</a:t>
+                      </a:r>
+                    </a:p>
+                  </a:txBody>
+                  <a:tcPr anchor="ctr">
+                    <a:lnL>
+                      <a:noFill/>
+                    </a:lnL>
+                    <a:lnR>
+                      <a:noFill/>
+                    </a:lnR>
+                    <a:lnT>
+                      <a:noFill/>
+                    </a:lnT>
+                    <a:lnB>
+                      <a:noFill/>
+                    </a:lnB>
+                    <a:noFill/>
+                  </a:tcPr>
+                </a:tc>
+                <a:extLst>
+                  <a:ext uri="{0D108BD9-81ED-4DB2-BD59-A6C34878D82A}">
+                    <a16:rowId xmlns:a16="http://schemas.microsoft.com/office/drawing/2014/main" val="3328699980"/>
+                  </a:ext>
+                </a:extLst>
+              </a:tr>
+              <a:tr h="0">
+                <a:tc>
+                  <a:txBody>
+                    <a:bodyPr/>
+                    <a:lstStyle/>
+                    <a:p>
+                      <a:pPr>
+                        <a:buNone/>
+                      </a:pPr>
+                      <a:r>
+                        <a:rPr lang="fr-BE"/>
+                        <a:t>50 KB</a:t>
+                      </a:r>
+                    </a:p>
+                  </a:txBody>
+                  <a:tcPr anchor="ctr">
+                    <a:lnL>
+                      <a:noFill/>
+                    </a:lnL>
+                    <a:lnR>
+                      <a:noFill/>
+                    </a:lnR>
+                    <a:lnT>
+                      <a:noFill/>
+                    </a:lnT>
+                    <a:lnB>
+                      <a:noFill/>
+                    </a:lnB>
+                    <a:noFill/>
+                  </a:tcPr>
+                </a:tc>
+                <a:tc>
+                  <a:txBody>
+                    <a:bodyPr/>
+                    <a:lstStyle/>
+                    <a:p>
+                      <a:pPr>
+                        <a:buNone/>
+                      </a:pPr>
+                      <a:r>
+                        <a:rPr lang="fr-BE" dirty="0"/>
+                        <a:t>211 ms</a:t>
+                      </a:r>
+                    </a:p>
+                  </a:txBody>
+                  <a:tcPr anchor="ctr">
+                    <a:lnL>
+                      <a:noFill/>
+                    </a:lnL>
+                    <a:lnR>
+                      <a:noFill/>
+                    </a:lnR>
+                    <a:lnT>
+                      <a:noFill/>
+                    </a:lnT>
+                    <a:lnB>
+                      <a:noFill/>
+                    </a:lnB>
+                    <a:noFill/>
+                  </a:tcPr>
+                </a:tc>
+                <a:tc>
+                  <a:txBody>
+                    <a:bodyPr/>
+                    <a:lstStyle/>
+                    <a:p>
+                      <a:pPr>
+                        <a:buNone/>
+                      </a:pPr>
+                      <a:r>
+                        <a:rPr lang="fr-BE" dirty="0"/>
+                        <a:t>230 KB/s</a:t>
+                      </a:r>
+                    </a:p>
+                  </a:txBody>
+                  <a:tcPr anchor="ctr">
+                    <a:lnL>
+                      <a:noFill/>
+                    </a:lnL>
+                    <a:lnR>
+                      <a:noFill/>
+                    </a:lnR>
+                    <a:lnT>
+                      <a:noFill/>
+                    </a:lnT>
+                    <a:lnB>
+                      <a:noFill/>
+                    </a:lnB>
+                    <a:noFill/>
+                  </a:tcPr>
+                </a:tc>
+                <a:tc>
+                  <a:txBody>
+                    <a:bodyPr/>
+                    <a:lstStyle/>
+                    <a:p>
+                      <a:pPr>
+                        <a:buNone/>
+                      </a:pPr>
+                      <a:r>
+                        <a:rPr lang="fr-BE" dirty="0"/>
+                        <a:t>41</a:t>
+                      </a:r>
+                    </a:p>
+                  </a:txBody>
+                  <a:tcPr anchor="ctr">
+                    <a:lnL>
+                      <a:noFill/>
+                    </a:lnL>
+                    <a:lnR>
+                      <a:noFill/>
+                    </a:lnR>
+                    <a:lnT>
+                      <a:noFill/>
+                    </a:lnT>
+                    <a:lnB>
+                      <a:noFill/>
+                    </a:lnB>
+                    <a:noFill/>
+                  </a:tcPr>
+                </a:tc>
+                <a:extLst>
+                  <a:ext uri="{0D108BD9-81ED-4DB2-BD59-A6C34878D82A}">
+                    <a16:rowId xmlns:a16="http://schemas.microsoft.com/office/drawing/2014/main" val="2066704408"/>
+                  </a:ext>
+                </a:extLst>
+              </a:tr>
+            </a:tbl>
+          </a:graphicData>
+        </a:graphic>
+      </p:graphicFrame>
+      <p:sp>
+        <p:nvSpPr>
+          <p:cNvPr id="8" name="ZoneTexte 7">
+            <a:extLst>
+              <a:ext uri="{FF2B5EF4-FFF2-40B4-BE49-F238E27FC236}">
+                <a16:creationId xmlns:a16="http://schemas.microsoft.com/office/drawing/2014/main" id="{C47A4C76-4017-5CF2-508A-51FBD5C3D5D1}"/>
+              </a:ext>
+            </a:extLst>
+          </p:cNvPr>
+          <p:cNvSpPr txBox="1"/>
+          <p:nvPr/>
+        </p:nvSpPr>
+        <p:spPr>
+          <a:xfrm>
+            <a:off x="838200" y="2216436"/>
+            <a:ext cx="2057400" cy="369332"/>
+          </a:xfrm>
+          <a:prstGeom prst="rect">
+            <a:avLst/>
+          </a:prstGeom>
+          <a:noFill/>
+        </p:spPr>
+        <p:txBody>
+          <a:bodyPr wrap="square" rtlCol="0">
+            <a:spAutoFit/>
           </a:bodyPr>
           <a:lstStyle/>
           <a:p>
             <a:r>
-              <a:rPr lang="fr-FR" b="1" dirty="0"/>
-              <a:t> Tests unitaires : </a:t>
-            </a:r>
-            <a:r>
-              <a:rPr lang="fr-FR" dirty="0" err="1"/>
-              <a:t>empackage</a:t>
-            </a:r>
-            <a:r>
-              <a:rPr lang="fr-FR" dirty="0"/>
-              <a:t> / </a:t>
-            </a:r>
-            <a:r>
-              <a:rPr lang="fr-FR" dirty="0" err="1"/>
-              <a:t>depackage</a:t>
-            </a:r>
-            <a:r>
-              <a:rPr lang="fr-FR" dirty="0"/>
-              <a:t>, CRC, SACK encode/</a:t>
-            </a:r>
-            <a:r>
-              <a:rPr lang="fr-FR" dirty="0" err="1"/>
-              <a:t>decode</a:t>
-            </a:r>
-            <a:r>
-              <a:rPr lang="fr-FR" dirty="0"/>
-              <a:t> </a:t>
-            </a:r>
-          </a:p>
-          <a:p>
-            <a:r>
-              <a:rPr lang="fr-FR" b="1" dirty="0"/>
-              <a:t>Tests d’intégration : </a:t>
-            </a:r>
-            <a:r>
-              <a:rPr lang="fr-FR" dirty="0"/>
-              <a:t>client ↔ serveur, fichiers de tailles variées </a:t>
-            </a:r>
-          </a:p>
-          <a:p>
-            <a:r>
-              <a:rPr lang="fr-FR" b="1" dirty="0"/>
-              <a:t>Tests d’interopérabilité : </a:t>
-            </a:r>
-            <a:r>
-              <a:rPr lang="fr-FR" dirty="0"/>
-              <a:t>avec implémentation de référence </a:t>
-            </a:r>
-          </a:p>
-          <a:p>
-            <a:r>
-              <a:rPr lang="fr-FR" b="1" dirty="0"/>
-              <a:t>Tests robustesse :</a:t>
-            </a:r>
-            <a:r>
-              <a:rPr lang="fr-FR" dirty="0"/>
-              <a:t>pertes, corruption, multi-clients </a:t>
-            </a:r>
-          </a:p>
-          <a:p>
-            <a:endParaRPr lang="fr-BE" dirty="0"/>
+              <a:rPr lang="fr-BE" b="1" dirty="0"/>
+              <a:t>Pertes (5%)</a:t>
+            </a:r>
+          </a:p>
+        </p:txBody>
+      </p:sp>
+      <p:sp>
+        <p:nvSpPr>
+          <p:cNvPr id="9" name="ZoneTexte 8">
+            <a:extLst>
+              <a:ext uri="{FF2B5EF4-FFF2-40B4-BE49-F238E27FC236}">
+                <a16:creationId xmlns:a16="http://schemas.microsoft.com/office/drawing/2014/main" id="{8972BCAB-C111-396D-7FB5-4FBA2FE8765A}"/>
+              </a:ext>
+            </a:extLst>
+          </p:cNvPr>
+          <p:cNvSpPr txBox="1"/>
+          <p:nvPr/>
+        </p:nvSpPr>
+        <p:spPr>
+          <a:xfrm>
+            <a:off x="838200" y="91440"/>
+            <a:ext cx="2532888" cy="369332"/>
+          </a:xfrm>
+          <a:prstGeom prst="rect">
+            <a:avLst/>
+          </a:prstGeom>
+          <a:noFill/>
+        </p:spPr>
+        <p:txBody>
+          <a:bodyPr wrap="square" rtlCol="0">
+            <a:spAutoFit/>
+          </a:bodyPr>
+          <a:lstStyle/>
+          <a:p>
+            <a:r>
+              <a:rPr lang="fr-BE" b="1" dirty="0"/>
+              <a:t>Réseau parfait</a:t>
+            </a:r>
+          </a:p>
+        </p:txBody>
+      </p:sp>
+      <p:graphicFrame>
+        <p:nvGraphicFramePr>
+          <p:cNvPr id="11" name="Tableau 10">
+            <a:extLst>
+              <a:ext uri="{FF2B5EF4-FFF2-40B4-BE49-F238E27FC236}">
+                <a16:creationId xmlns:a16="http://schemas.microsoft.com/office/drawing/2014/main" id="{E23F853A-1A2F-1761-A6CC-1AD191FF70EF}"/>
+              </a:ext>
+            </a:extLst>
+          </p:cNvPr>
+          <p:cNvGraphicFramePr>
+            <a:graphicFrameLocks noGrp="1"/>
+          </p:cNvGraphicFramePr>
+          <p:nvPr>
+            <p:extLst>
+              <p:ext uri="{D42A27DB-BD31-4B8C-83A1-F6EECF244321}">
+                <p14:modId xmlns:p14="http://schemas.microsoft.com/office/powerpoint/2010/main" val="3522110954"/>
+              </p:ext>
+            </p:extLst>
+          </p:nvPr>
+        </p:nvGraphicFramePr>
+        <p:xfrm>
+          <a:off x="838200" y="4833596"/>
+          <a:ext cx="7830312" cy="1463040"/>
+        </p:xfrm>
+        <a:graphic>
+          <a:graphicData uri="http://schemas.openxmlformats.org/drawingml/2006/table">
+            <a:tbl>
+              <a:tblPr/>
+              <a:tblGrid>
+                <a:gridCol w="1957578">
+                  <a:extLst>
+                    <a:ext uri="{9D8B030D-6E8A-4147-A177-3AD203B41FA5}">
+                      <a16:colId xmlns:a16="http://schemas.microsoft.com/office/drawing/2014/main" val="1366090509"/>
+                    </a:ext>
+                  </a:extLst>
+                </a:gridCol>
+                <a:gridCol w="1957578">
+                  <a:extLst>
+                    <a:ext uri="{9D8B030D-6E8A-4147-A177-3AD203B41FA5}">
+                      <a16:colId xmlns:a16="http://schemas.microsoft.com/office/drawing/2014/main" val="2545641747"/>
+                    </a:ext>
+                  </a:extLst>
+                </a:gridCol>
+                <a:gridCol w="1957578">
+                  <a:extLst>
+                    <a:ext uri="{9D8B030D-6E8A-4147-A177-3AD203B41FA5}">
+                      <a16:colId xmlns:a16="http://schemas.microsoft.com/office/drawing/2014/main" val="2372894590"/>
+                    </a:ext>
+                  </a:extLst>
+                </a:gridCol>
+                <a:gridCol w="1957578">
+                  <a:extLst>
+                    <a:ext uri="{9D8B030D-6E8A-4147-A177-3AD203B41FA5}">
+                      <a16:colId xmlns:a16="http://schemas.microsoft.com/office/drawing/2014/main" val="540934929"/>
+                    </a:ext>
+                  </a:extLst>
+                </a:gridCol>
+              </a:tblGrid>
+              <a:tr h="0">
+                <a:tc>
+                  <a:txBody>
+                    <a:bodyPr/>
+                    <a:lstStyle/>
+                    <a:p>
+                      <a:pPr>
+                        <a:buNone/>
+                      </a:pPr>
+                      <a:r>
+                        <a:rPr lang="fr-BE"/>
+                        <a:t>Taille fichier</a:t>
+                      </a:r>
+                    </a:p>
+                  </a:txBody>
+                  <a:tcPr anchor="ctr">
+                    <a:lnL>
+                      <a:noFill/>
+                    </a:lnL>
+                    <a:lnR>
+                      <a:noFill/>
+                    </a:lnR>
+                    <a:lnT>
+                      <a:noFill/>
+                    </a:lnT>
+                    <a:lnB>
+                      <a:noFill/>
+                    </a:lnB>
+                    <a:noFill/>
+                  </a:tcPr>
+                </a:tc>
+                <a:tc>
+                  <a:txBody>
+                    <a:bodyPr/>
+                    <a:lstStyle/>
+                    <a:p>
+                      <a:pPr>
+                        <a:buNone/>
+                      </a:pPr>
+                      <a:r>
+                        <a:rPr lang="fr-BE"/>
+                        <a:t>Temps</a:t>
+                      </a:r>
+                    </a:p>
+                  </a:txBody>
+                  <a:tcPr anchor="ctr">
+                    <a:lnL>
+                      <a:noFill/>
+                    </a:lnL>
+                    <a:lnR>
+                      <a:noFill/>
+                    </a:lnR>
+                    <a:lnT>
+                      <a:noFill/>
+                    </a:lnT>
+                    <a:lnB>
+                      <a:noFill/>
+                    </a:lnB>
+                    <a:noFill/>
+                  </a:tcPr>
+                </a:tc>
+                <a:tc>
+                  <a:txBody>
+                    <a:bodyPr/>
+                    <a:lstStyle/>
+                    <a:p>
+                      <a:pPr>
+                        <a:buNone/>
+                      </a:pPr>
+                      <a:r>
+                        <a:rPr lang="fr-BE"/>
+                        <a:t>Débit</a:t>
+                      </a:r>
+                    </a:p>
+                  </a:txBody>
+                  <a:tcPr anchor="ctr">
+                    <a:lnL>
+                      <a:noFill/>
+                    </a:lnL>
+                    <a:lnR>
+                      <a:noFill/>
+                    </a:lnR>
+                    <a:lnT>
+                      <a:noFill/>
+                    </a:lnT>
+                    <a:lnB>
+                      <a:noFill/>
+                    </a:lnB>
+                    <a:noFill/>
+                  </a:tcPr>
+                </a:tc>
+                <a:tc>
+                  <a:txBody>
+                    <a:bodyPr/>
+                    <a:lstStyle/>
+                    <a:p>
+                      <a:pPr>
+                        <a:buNone/>
+                      </a:pPr>
+                      <a:r>
+                        <a:rPr lang="fr-BE"/>
+                        <a:t>Retransmissions</a:t>
+                      </a:r>
+                    </a:p>
+                  </a:txBody>
+                  <a:tcPr anchor="ctr">
+                    <a:lnL>
+                      <a:noFill/>
+                    </a:lnL>
+                    <a:lnR>
+                      <a:noFill/>
+                    </a:lnR>
+                    <a:lnT>
+                      <a:noFill/>
+                    </a:lnT>
+                    <a:lnB>
+                      <a:noFill/>
+                    </a:lnB>
+                    <a:noFill/>
+                  </a:tcPr>
+                </a:tc>
+                <a:extLst>
+                  <a:ext uri="{0D108BD9-81ED-4DB2-BD59-A6C34878D82A}">
+                    <a16:rowId xmlns:a16="http://schemas.microsoft.com/office/drawing/2014/main" val="2689981673"/>
+                  </a:ext>
+                </a:extLst>
+              </a:tr>
+              <a:tr h="0">
+                <a:tc>
+                  <a:txBody>
+                    <a:bodyPr/>
+                    <a:lstStyle/>
+                    <a:p>
+                      <a:pPr>
+                        <a:buNone/>
+                      </a:pPr>
+                      <a:r>
+                        <a:rPr lang="fr-BE"/>
+                        <a:t>500 B</a:t>
+                      </a:r>
+                    </a:p>
+                  </a:txBody>
+                  <a:tcPr anchor="ctr">
+                    <a:lnL>
+                      <a:noFill/>
+                    </a:lnL>
+                    <a:lnR>
+                      <a:noFill/>
+                    </a:lnR>
+                    <a:lnT>
+                      <a:noFill/>
+                    </a:lnT>
+                    <a:lnB>
+                      <a:noFill/>
+                    </a:lnB>
+                    <a:noFill/>
+                  </a:tcPr>
+                </a:tc>
+                <a:tc>
+                  <a:txBody>
+                    <a:bodyPr/>
+                    <a:lstStyle/>
+                    <a:p>
+                      <a:pPr>
+                        <a:buNone/>
+                      </a:pPr>
+                      <a:r>
+                        <a:rPr lang="fr-BE" dirty="0"/>
+                        <a:t>14 ms</a:t>
+                      </a:r>
+                    </a:p>
+                  </a:txBody>
+                  <a:tcPr anchor="ctr">
+                    <a:lnL>
+                      <a:noFill/>
+                    </a:lnL>
+                    <a:lnR>
+                      <a:noFill/>
+                    </a:lnR>
+                    <a:lnT>
+                      <a:noFill/>
+                    </a:lnT>
+                    <a:lnB>
+                      <a:noFill/>
+                    </a:lnB>
+                    <a:noFill/>
+                  </a:tcPr>
+                </a:tc>
+                <a:tc>
+                  <a:txBody>
+                    <a:bodyPr/>
+                    <a:lstStyle/>
+                    <a:p>
+                      <a:pPr>
+                        <a:buNone/>
+                      </a:pPr>
+                      <a:r>
+                        <a:rPr lang="fr-BE" dirty="0"/>
+                        <a:t>46 KB/s</a:t>
+                      </a:r>
+                    </a:p>
+                  </a:txBody>
+                  <a:tcPr anchor="ctr">
+                    <a:lnL>
+                      <a:noFill/>
+                    </a:lnL>
+                    <a:lnR>
+                      <a:noFill/>
+                    </a:lnR>
+                    <a:lnT>
+                      <a:noFill/>
+                    </a:lnT>
+                    <a:lnB>
+                      <a:noFill/>
+                    </a:lnB>
+                    <a:noFill/>
+                  </a:tcPr>
+                </a:tc>
+                <a:tc>
+                  <a:txBody>
+                    <a:bodyPr/>
+                    <a:lstStyle/>
+                    <a:p>
+                      <a:pPr>
+                        <a:buNone/>
+                      </a:pPr>
+                      <a:r>
+                        <a:rPr lang="fr-BE" dirty="0"/>
+                        <a:t>4</a:t>
+                      </a:r>
+                    </a:p>
+                  </a:txBody>
+                  <a:tcPr anchor="ctr">
+                    <a:lnL>
+                      <a:noFill/>
+                    </a:lnL>
+                    <a:lnR>
+                      <a:noFill/>
+                    </a:lnR>
+                    <a:lnT>
+                      <a:noFill/>
+                    </a:lnT>
+                    <a:lnB>
+                      <a:noFill/>
+                    </a:lnB>
+                    <a:noFill/>
+                  </a:tcPr>
+                </a:tc>
+                <a:extLst>
+                  <a:ext uri="{0D108BD9-81ED-4DB2-BD59-A6C34878D82A}">
+                    <a16:rowId xmlns:a16="http://schemas.microsoft.com/office/drawing/2014/main" val="185995019"/>
+                  </a:ext>
+                </a:extLst>
+              </a:tr>
+              <a:tr h="0">
+                <a:tc>
+                  <a:txBody>
+                    <a:bodyPr/>
+                    <a:lstStyle/>
+                    <a:p>
+                      <a:pPr>
+                        <a:buNone/>
+                      </a:pPr>
+                      <a:r>
+                        <a:rPr lang="fr-BE"/>
+                        <a:t>5 KB</a:t>
+                      </a:r>
+                    </a:p>
+                  </a:txBody>
+                  <a:tcPr anchor="ctr">
+                    <a:lnL>
+                      <a:noFill/>
+                    </a:lnL>
+                    <a:lnR>
+                      <a:noFill/>
+                    </a:lnR>
+                    <a:lnT>
+                      <a:noFill/>
+                    </a:lnT>
+                    <a:lnB>
+                      <a:noFill/>
+                    </a:lnB>
+                    <a:noFill/>
+                  </a:tcPr>
+                </a:tc>
+                <a:tc>
+                  <a:txBody>
+                    <a:bodyPr/>
+                    <a:lstStyle/>
+                    <a:p>
+                      <a:pPr>
+                        <a:buNone/>
+                      </a:pPr>
+                      <a:r>
+                        <a:rPr lang="fr-BE" dirty="0"/>
+                        <a:t>67 ms</a:t>
+                      </a:r>
+                    </a:p>
+                  </a:txBody>
+                  <a:tcPr anchor="ctr">
+                    <a:lnL>
+                      <a:noFill/>
+                    </a:lnL>
+                    <a:lnR>
+                      <a:noFill/>
+                    </a:lnR>
+                    <a:lnT>
+                      <a:noFill/>
+                    </a:lnT>
+                    <a:lnB>
+                      <a:noFill/>
+                    </a:lnB>
+                    <a:noFill/>
+                  </a:tcPr>
+                </a:tc>
+                <a:tc>
+                  <a:txBody>
+                    <a:bodyPr/>
+                    <a:lstStyle/>
+                    <a:p>
+                      <a:pPr>
+                        <a:buNone/>
+                      </a:pPr>
+                      <a:r>
+                        <a:rPr lang="fr-BE" dirty="0"/>
+                        <a:t>94 KB/s</a:t>
+                      </a:r>
+                    </a:p>
+                  </a:txBody>
+                  <a:tcPr anchor="ctr">
+                    <a:lnL>
+                      <a:noFill/>
+                    </a:lnL>
+                    <a:lnR>
+                      <a:noFill/>
+                    </a:lnR>
+                    <a:lnT>
+                      <a:noFill/>
+                    </a:lnT>
+                    <a:lnB>
+                      <a:noFill/>
+                    </a:lnB>
+                    <a:noFill/>
+                  </a:tcPr>
+                </a:tc>
+                <a:tc>
+                  <a:txBody>
+                    <a:bodyPr/>
+                    <a:lstStyle/>
+                    <a:p>
+                      <a:pPr>
+                        <a:buNone/>
+                      </a:pPr>
+                      <a:r>
+                        <a:rPr lang="fr-BE" dirty="0"/>
+                        <a:t>23</a:t>
+                      </a:r>
+                    </a:p>
+                  </a:txBody>
+                  <a:tcPr anchor="ctr">
+                    <a:lnL>
+                      <a:noFill/>
+                    </a:lnL>
+                    <a:lnR>
+                      <a:noFill/>
+                    </a:lnR>
+                    <a:lnT>
+                      <a:noFill/>
+                    </a:lnT>
+                    <a:lnB>
+                      <a:noFill/>
+                    </a:lnB>
+                    <a:noFill/>
+                  </a:tcPr>
+                </a:tc>
+                <a:extLst>
+                  <a:ext uri="{0D108BD9-81ED-4DB2-BD59-A6C34878D82A}">
+                    <a16:rowId xmlns:a16="http://schemas.microsoft.com/office/drawing/2014/main" val="2816722628"/>
+                  </a:ext>
+                </a:extLst>
+              </a:tr>
+              <a:tr h="0">
+                <a:tc>
+                  <a:txBody>
+                    <a:bodyPr/>
+                    <a:lstStyle/>
+                    <a:p>
+                      <a:pPr>
+                        <a:buNone/>
+                      </a:pPr>
+                      <a:r>
+                        <a:rPr lang="fr-BE"/>
+                        <a:t>50 KB</a:t>
+                      </a:r>
+                    </a:p>
+                  </a:txBody>
+                  <a:tcPr anchor="ctr">
+                    <a:lnL>
+                      <a:noFill/>
+                    </a:lnL>
+                    <a:lnR>
+                      <a:noFill/>
+                    </a:lnR>
+                    <a:lnT>
+                      <a:noFill/>
+                    </a:lnT>
+                    <a:lnB>
+                      <a:noFill/>
+                    </a:lnB>
+                    <a:noFill/>
+                  </a:tcPr>
+                </a:tc>
+                <a:tc>
+                  <a:txBody>
+                    <a:bodyPr/>
+                    <a:lstStyle/>
+                    <a:p>
+                      <a:pPr>
+                        <a:buNone/>
+                      </a:pPr>
+                      <a:r>
+                        <a:rPr lang="fr-BE" dirty="0"/>
+                        <a:t>442 ms</a:t>
+                      </a:r>
+                    </a:p>
+                  </a:txBody>
+                  <a:tcPr anchor="ctr">
+                    <a:lnL>
+                      <a:noFill/>
+                    </a:lnL>
+                    <a:lnR>
+                      <a:noFill/>
+                    </a:lnR>
+                    <a:lnT>
+                      <a:noFill/>
+                    </a:lnT>
+                    <a:lnB>
+                      <a:noFill/>
+                    </a:lnB>
+                    <a:noFill/>
+                  </a:tcPr>
+                </a:tc>
+                <a:tc>
+                  <a:txBody>
+                    <a:bodyPr/>
+                    <a:lstStyle/>
+                    <a:p>
+                      <a:pPr>
+                        <a:buNone/>
+                      </a:pPr>
+                      <a:r>
+                        <a:rPr lang="fr-BE" dirty="0"/>
+                        <a:t>141 KB/s</a:t>
+                      </a:r>
+                    </a:p>
+                  </a:txBody>
+                  <a:tcPr anchor="ctr">
+                    <a:lnL>
+                      <a:noFill/>
+                    </a:lnL>
+                    <a:lnR>
+                      <a:noFill/>
+                    </a:lnR>
+                    <a:lnT>
+                      <a:noFill/>
+                    </a:lnT>
+                    <a:lnB>
+                      <a:noFill/>
+                    </a:lnB>
+                    <a:noFill/>
+                  </a:tcPr>
+                </a:tc>
+                <a:tc>
+                  <a:txBody>
+                    <a:bodyPr/>
+                    <a:lstStyle/>
+                    <a:p>
+                      <a:pPr>
+                        <a:buNone/>
+                      </a:pPr>
+                      <a:r>
+                        <a:rPr lang="fr-BE" dirty="0"/>
+                        <a:t>99</a:t>
+                      </a:r>
+                    </a:p>
+                  </a:txBody>
+                  <a:tcPr anchor="ctr">
+                    <a:lnL>
+                      <a:noFill/>
+                    </a:lnL>
+                    <a:lnR>
+                      <a:noFill/>
+                    </a:lnR>
+                    <a:lnT>
+                      <a:noFill/>
+                    </a:lnT>
+                    <a:lnB>
+                      <a:noFill/>
+                    </a:lnB>
+                    <a:noFill/>
+                  </a:tcPr>
+                </a:tc>
+                <a:extLst>
+                  <a:ext uri="{0D108BD9-81ED-4DB2-BD59-A6C34878D82A}">
+                    <a16:rowId xmlns:a16="http://schemas.microsoft.com/office/drawing/2014/main" val="3324136742"/>
+                  </a:ext>
+                </a:extLst>
+              </a:tr>
+            </a:tbl>
+          </a:graphicData>
+        </a:graphic>
+      </p:graphicFrame>
+      <p:sp>
+        <p:nvSpPr>
+          <p:cNvPr id="12" name="ZoneTexte 11">
+            <a:extLst>
+              <a:ext uri="{FF2B5EF4-FFF2-40B4-BE49-F238E27FC236}">
+                <a16:creationId xmlns:a16="http://schemas.microsoft.com/office/drawing/2014/main" id="{23E9FAAC-2008-81F4-280D-FD0B2A9844EC}"/>
+              </a:ext>
+            </a:extLst>
+          </p:cNvPr>
+          <p:cNvSpPr txBox="1"/>
+          <p:nvPr/>
+        </p:nvSpPr>
+        <p:spPr>
+          <a:xfrm>
+            <a:off x="838200" y="4363672"/>
+            <a:ext cx="1499616" cy="369332"/>
+          </a:xfrm>
+          <a:prstGeom prst="rect">
+            <a:avLst/>
+          </a:prstGeom>
+          <a:noFill/>
+        </p:spPr>
+        <p:txBody>
+          <a:bodyPr wrap="square" rtlCol="0">
+            <a:spAutoFit/>
+          </a:bodyPr>
+          <a:lstStyle/>
+          <a:p>
+            <a:r>
+              <a:rPr lang="fr-BE" b="1" dirty="0"/>
+              <a:t>Pertes (10%)</a:t>
+            </a:r>
           </a:p>
         </p:txBody>
       </p:sp>
     </p:spTree>
     <p:extLst>
       <p:ext uri="{BB962C8B-B14F-4D97-AF65-F5344CB8AC3E}">
-        <p14:creationId xmlns:p14="http://schemas.microsoft.com/office/powerpoint/2010/main" val="3638850692"/>
+        <p14:creationId xmlns:p14="http://schemas.microsoft.com/office/powerpoint/2010/main" val="3750657961"/>
       </p:ext>
     </p:extLst>
   </p:cSld>
@@ -4327,7 +6163,7 @@
           <p:cNvPr id="2" name="Titre 1">
             <a:extLst>
               <a:ext uri="{FF2B5EF4-FFF2-40B4-BE49-F238E27FC236}">
-                <a16:creationId xmlns:a16="http://schemas.microsoft.com/office/drawing/2014/main" id="{665BC356-2857-F420-C840-CA32203444E3}"/>
+                <a16:creationId xmlns:a16="http://schemas.microsoft.com/office/drawing/2014/main" id="{93966033-240C-9EA6-F680-D9EEFEFA2B33}"/>
               </a:ext>
             </a:extLst>
           </p:cNvPr>
@@ -4345,7 +6181,7 @@
           <a:p>
             <a:r>
               <a:rPr lang="fr-BE" dirty="0"/>
-              <a:t>Acquittements sélectifs</a:t>
+              <a:t>Tests</a:t>
             </a:r>
           </a:p>
         </p:txBody>
@@ -4355,7 +6191,7 @@
           <p:cNvPr id="3" name="Espace réservé du contenu 2">
             <a:extLst>
               <a:ext uri="{FF2B5EF4-FFF2-40B4-BE49-F238E27FC236}">
-                <a16:creationId xmlns:a16="http://schemas.microsoft.com/office/drawing/2014/main" id="{4D1BF957-E9DF-D69A-49C0-2A5ECDC58B66}"/>
+                <a16:creationId xmlns:a16="http://schemas.microsoft.com/office/drawing/2014/main" id="{2E8B874C-98CB-20AD-055C-CE7C143C9C0F}"/>
               </a:ext>
             </a:extLst>
           </p:cNvPr>
@@ -4368,25 +6204,71 @@
         </p:nvSpPr>
         <p:spPr/>
         <p:txBody>
-          <a:bodyPr/>
-          <a:lstStyle/>
-          <a:p>
-            <a:r>
-              <a:rPr lang="fr-BE" dirty="0"/>
-              <a:t>Retransmissions ciblées : plus efficace en cas de perte, moins de trafic inutile</a:t>
-            </a:r>
-          </a:p>
-          <a:p>
-            <a:r>
-              <a:rPr lang="fr-BE" dirty="0"/>
-              <a:t>Gains : amélioration du débit, réduction latence, plus efficace face aux pertes</a:t>
-            </a:r>
-          </a:p>
-          <a:p>
-            <a:pPr>
-              <a:buFont typeface="Wingdings" panose="05000000000000000000" pitchFamily="2" charset="2"/>
-              <a:buChar char="Ø"/>
-            </a:pPr>
+          <a:bodyPr>
+            <a:normAutofit/>
+          </a:bodyPr>
+          <a:lstStyle/>
+          <a:p>
+            <a:r>
+              <a:rPr lang="fr-FR" b="1" dirty="0"/>
+              <a:t> Tests unitaires : </a:t>
+            </a:r>
+            <a:r>
+              <a:rPr lang="fr-FR" dirty="0" err="1"/>
+              <a:t>empackage</a:t>
+            </a:r>
+            <a:r>
+              <a:rPr lang="fr-FR" dirty="0"/>
+              <a:t> / </a:t>
+            </a:r>
+            <a:r>
+              <a:rPr lang="fr-FR" dirty="0" err="1"/>
+              <a:t>depackage</a:t>
+            </a:r>
+            <a:r>
+              <a:rPr lang="fr-FR" dirty="0"/>
+              <a:t>, CRC, SACK encode/</a:t>
+            </a:r>
+            <a:r>
+              <a:rPr lang="fr-FR" dirty="0" err="1"/>
+              <a:t>decode</a:t>
+            </a:r>
+            <a:r>
+              <a:rPr lang="fr-FR" dirty="0"/>
+              <a:t> </a:t>
+            </a:r>
+          </a:p>
+          <a:p>
+            <a:r>
+              <a:rPr lang="fr-FR" b="1" dirty="0"/>
+              <a:t>Tests d’intégration : </a:t>
+            </a:r>
+            <a:r>
+              <a:rPr lang="fr-FR" dirty="0"/>
+              <a:t>client ↔ serveur, fichiers de tailles variées </a:t>
+            </a:r>
+          </a:p>
+          <a:p>
+            <a:r>
+              <a:rPr lang="fr-FR" b="1" dirty="0"/>
+              <a:t>Tests d’interopérabilité : </a:t>
+            </a:r>
+            <a:r>
+              <a:rPr lang="fr-FR" dirty="0"/>
+              <a:t>avec implémentation de référence </a:t>
+            </a:r>
+          </a:p>
+          <a:p>
+            <a:r>
+              <a:rPr lang="fr-FR" b="1" dirty="0"/>
+              <a:t>Tests robustesse :</a:t>
+            </a:r>
+            <a:r>
+              <a:rPr lang="fr-FR" dirty="0"/>
+              <a:t>pertes, corruption, multi-clients </a:t>
+            </a:r>
+          </a:p>
+          <a:p>
             <a:endParaRPr lang="fr-BE" dirty="0"/>
           </a:p>
         </p:txBody>
@@ -4394,7 +6276,7 @@
     </p:spTree>
     <p:extLst>
       <p:ext uri="{BB962C8B-B14F-4D97-AF65-F5344CB8AC3E}">
-        <p14:creationId xmlns:p14="http://schemas.microsoft.com/office/powerpoint/2010/main" val="1681758928"/>
+        <p14:creationId xmlns:p14="http://schemas.microsoft.com/office/powerpoint/2010/main" val="3638850692"/>
       </p:ext>
     </p:extLst>
   </p:cSld>

--- a/Rapport_projet_SRTP.pptx
+++ b/Rapport_projet_SRTP.pptx
@@ -4,6 +4,9 @@
   <p:sldMasterIdLst>
     <p:sldMasterId id="2147483648" r:id="rId1"/>
   </p:sldMasterIdLst>
+  <p:notesMasterIdLst>
+    <p:notesMasterId r:id="rId12"/>
+  </p:notesMasterIdLst>
   <p:sldIdLst>
     <p:sldId id="256" r:id="rId2"/>
     <p:sldId id="257" r:id="rId3"/>
@@ -121,6 +124,356 @@
 </p:presentation>
 </file>
 
+<file path=ppt/notesMasters/notesMaster1.xml><?xml version="1.0" encoding="utf-8"?>
+<p:notesMaster xmlns:a="http://schemas.openxmlformats.org/drawingml/2006/main" xmlns:r="http://schemas.openxmlformats.org/officeDocument/2006/relationships" xmlns:p="http://schemas.openxmlformats.org/presentationml/2006/main">
+  <p:cSld>
+    <p:bg>
+      <p:bgRef idx="1001">
+        <a:schemeClr val="bg1"/>
+      </p:bgRef>
+    </p:bg>
+    <p:spTree>
+      <p:nvGrpSpPr>
+        <p:cNvPr id="1" name=""/>
+        <p:cNvGrpSpPr/>
+        <p:nvPr/>
+      </p:nvGrpSpPr>
+      <p:grpSpPr>
+        <a:xfrm>
+          <a:off x="0" y="0"/>
+          <a:ext cx="0" cy="0"/>
+          <a:chOff x="0" y="0"/>
+          <a:chExt cx="0" cy="0"/>
+        </a:xfrm>
+      </p:grpSpPr>
+      <p:sp>
+        <p:nvSpPr>
+          <p:cNvPr id="2" name="Espace réservé de l'en-tête 1"/>
+          <p:cNvSpPr>
+            <a:spLocks noGrp="1"/>
+          </p:cNvSpPr>
+          <p:nvPr>
+            <p:ph type="hdr" sz="quarter"/>
+          </p:nvPr>
+        </p:nvSpPr>
+        <p:spPr>
+          <a:xfrm>
+            <a:off x="0" y="0"/>
+            <a:ext cx="2971800" cy="458788"/>
+          </a:xfrm>
+          <a:prstGeom prst="rect">
+            <a:avLst/>
+          </a:prstGeom>
+        </p:spPr>
+        <p:txBody>
+          <a:bodyPr vert="horz" lIns="91440" tIns="45720" rIns="91440" bIns="45720" rtlCol="0"/>
+          <a:lstStyle>
+            <a:lvl1pPr algn="l">
+              <a:defRPr sz="1200"/>
+            </a:lvl1pPr>
+          </a:lstStyle>
+          <a:p>
+            <a:endParaRPr lang="fr-BE"/>
+          </a:p>
+        </p:txBody>
+      </p:sp>
+      <p:sp>
+        <p:nvSpPr>
+          <p:cNvPr id="3" name="Espace réservé de la date 2"/>
+          <p:cNvSpPr>
+            <a:spLocks noGrp="1"/>
+          </p:cNvSpPr>
+          <p:nvPr>
+            <p:ph type="dt" idx="1"/>
+          </p:nvPr>
+        </p:nvSpPr>
+        <p:spPr>
+          <a:xfrm>
+            <a:off x="3884613" y="0"/>
+            <a:ext cx="2971800" cy="458788"/>
+          </a:xfrm>
+          <a:prstGeom prst="rect">
+            <a:avLst/>
+          </a:prstGeom>
+        </p:spPr>
+        <p:txBody>
+          <a:bodyPr vert="horz" lIns="91440" tIns="45720" rIns="91440" bIns="45720" rtlCol="0"/>
+          <a:lstStyle>
+            <a:lvl1pPr algn="r">
+              <a:defRPr sz="1200"/>
+            </a:lvl1pPr>
+          </a:lstStyle>
+          <a:p>
+            <a:fld id="{42CCBD27-2017-4083-8306-4AF4201DE26C}" type="datetimeFigureOut">
+              <a:rPr lang="fr-BE" smtClean="0"/>
+              <a:t>23-03-26</a:t>
+            </a:fld>
+            <a:endParaRPr lang="fr-BE"/>
+          </a:p>
+        </p:txBody>
+      </p:sp>
+      <p:sp>
+        <p:nvSpPr>
+          <p:cNvPr id="4" name="Espace réservé de l'image des diapositives 3"/>
+          <p:cNvSpPr>
+            <a:spLocks noGrp="1" noRot="1" noChangeAspect="1"/>
+          </p:cNvSpPr>
+          <p:nvPr>
+            <p:ph type="sldImg" idx="2"/>
+          </p:nvPr>
+        </p:nvSpPr>
+        <p:spPr>
+          <a:xfrm>
+            <a:off x="685800" y="1143000"/>
+            <a:ext cx="5486400" cy="3086100"/>
+          </a:xfrm>
+          <a:prstGeom prst="rect">
+            <a:avLst/>
+          </a:prstGeom>
+          <a:noFill/>
+          <a:ln w="12700">
+            <a:solidFill>
+              <a:prstClr val="black"/>
+            </a:solidFill>
+          </a:ln>
+        </p:spPr>
+        <p:txBody>
+          <a:bodyPr vert="horz" lIns="91440" tIns="45720" rIns="91440" bIns="45720" rtlCol="0" anchor="ctr"/>
+          <a:lstStyle/>
+          <a:p>
+            <a:endParaRPr lang="fr-BE"/>
+          </a:p>
+        </p:txBody>
+      </p:sp>
+      <p:sp>
+        <p:nvSpPr>
+          <p:cNvPr id="5" name="Espace réservé des notes 4"/>
+          <p:cNvSpPr>
+            <a:spLocks noGrp="1"/>
+          </p:cNvSpPr>
+          <p:nvPr>
+            <p:ph type="body" sz="quarter" idx="3"/>
+          </p:nvPr>
+        </p:nvSpPr>
+        <p:spPr>
+          <a:xfrm>
+            <a:off x="685800" y="4400550"/>
+            <a:ext cx="5486400" cy="3600450"/>
+          </a:xfrm>
+          <a:prstGeom prst="rect">
+            <a:avLst/>
+          </a:prstGeom>
+        </p:spPr>
+        <p:txBody>
+          <a:bodyPr vert="horz" lIns="91440" tIns="45720" rIns="91440" bIns="45720" rtlCol="0"/>
+          <a:lstStyle/>
+          <a:p>
+            <a:pPr lvl="0"/>
+            <a:r>
+              <a:rPr lang="fr-FR"/>
+              <a:t>Cliquez pour modifier les styles du texte du masque</a:t>
+            </a:r>
+          </a:p>
+          <a:p>
+            <a:pPr lvl="1"/>
+            <a:r>
+              <a:rPr lang="fr-FR"/>
+              <a:t>Deuxième niveau</a:t>
+            </a:r>
+          </a:p>
+          <a:p>
+            <a:pPr lvl="2"/>
+            <a:r>
+              <a:rPr lang="fr-FR"/>
+              <a:t>Troisième niveau</a:t>
+            </a:r>
+          </a:p>
+          <a:p>
+            <a:pPr lvl="3"/>
+            <a:r>
+              <a:rPr lang="fr-FR"/>
+              <a:t>Quatrième niveau</a:t>
+            </a:r>
+          </a:p>
+          <a:p>
+            <a:pPr lvl="4"/>
+            <a:r>
+              <a:rPr lang="fr-FR"/>
+              <a:t>Cinquième niveau</a:t>
+            </a:r>
+            <a:endParaRPr lang="fr-BE"/>
+          </a:p>
+        </p:txBody>
+      </p:sp>
+      <p:sp>
+        <p:nvSpPr>
+          <p:cNvPr id="6" name="Espace réservé du pied de page 5"/>
+          <p:cNvSpPr>
+            <a:spLocks noGrp="1"/>
+          </p:cNvSpPr>
+          <p:nvPr>
+            <p:ph type="ftr" sz="quarter" idx="4"/>
+          </p:nvPr>
+        </p:nvSpPr>
+        <p:spPr>
+          <a:xfrm>
+            <a:off x="0" y="8685213"/>
+            <a:ext cx="2971800" cy="458787"/>
+          </a:xfrm>
+          <a:prstGeom prst="rect">
+            <a:avLst/>
+          </a:prstGeom>
+        </p:spPr>
+        <p:txBody>
+          <a:bodyPr vert="horz" lIns="91440" tIns="45720" rIns="91440" bIns="45720" rtlCol="0" anchor="b"/>
+          <a:lstStyle>
+            <a:lvl1pPr algn="l">
+              <a:defRPr sz="1200"/>
+            </a:lvl1pPr>
+          </a:lstStyle>
+          <a:p>
+            <a:endParaRPr lang="fr-BE"/>
+          </a:p>
+        </p:txBody>
+      </p:sp>
+      <p:sp>
+        <p:nvSpPr>
+          <p:cNvPr id="7" name="Espace réservé du numéro de diapositive 6"/>
+          <p:cNvSpPr>
+            <a:spLocks noGrp="1"/>
+          </p:cNvSpPr>
+          <p:nvPr>
+            <p:ph type="sldNum" sz="quarter" idx="5"/>
+          </p:nvPr>
+        </p:nvSpPr>
+        <p:spPr>
+          <a:xfrm>
+            <a:off x="3884613" y="8685213"/>
+            <a:ext cx="2971800" cy="458787"/>
+          </a:xfrm>
+          <a:prstGeom prst="rect">
+            <a:avLst/>
+          </a:prstGeom>
+        </p:spPr>
+        <p:txBody>
+          <a:bodyPr vert="horz" lIns="91440" tIns="45720" rIns="91440" bIns="45720" rtlCol="0" anchor="b"/>
+          <a:lstStyle>
+            <a:lvl1pPr algn="r">
+              <a:defRPr sz="1200"/>
+            </a:lvl1pPr>
+          </a:lstStyle>
+          <a:p>
+            <a:fld id="{64EBDF11-E6C0-49D4-AA9D-12CE67B77172}" type="slidenum">
+              <a:rPr lang="fr-BE" smtClean="0"/>
+              <a:t>‹N°›</a:t>
+            </a:fld>
+            <a:endParaRPr lang="fr-BE"/>
+          </a:p>
+        </p:txBody>
+      </p:sp>
+    </p:spTree>
+    <p:extLst>
+      <p:ext uri="{BB962C8B-B14F-4D97-AF65-F5344CB8AC3E}">
+        <p14:creationId xmlns:p14="http://schemas.microsoft.com/office/powerpoint/2010/main" val="861649688"/>
+      </p:ext>
+    </p:extLst>
+  </p:cSld>
+  <p:clrMap bg1="lt1" tx1="dk1" bg2="lt2" tx2="dk2" accent1="accent1" accent2="accent2" accent3="accent3" accent4="accent4" accent5="accent5" accent6="accent6" hlink="hlink" folHlink="folHlink"/>
+  <p:notesStyle>
+    <a:lvl1pPr marL="0" algn="l" defTabSz="914400" rtl="0" eaLnBrk="1" latinLnBrk="0" hangingPunct="1">
+      <a:defRPr sz="1200" kern="1200">
+        <a:solidFill>
+          <a:schemeClr val="tx1"/>
+        </a:solidFill>
+        <a:latin typeface="+mn-lt"/>
+        <a:ea typeface="+mn-ea"/>
+        <a:cs typeface="+mn-cs"/>
+      </a:defRPr>
+    </a:lvl1pPr>
+    <a:lvl2pPr marL="457200" algn="l" defTabSz="914400" rtl="0" eaLnBrk="1" latinLnBrk="0" hangingPunct="1">
+      <a:defRPr sz="1200" kern="1200">
+        <a:solidFill>
+          <a:schemeClr val="tx1"/>
+        </a:solidFill>
+        <a:latin typeface="+mn-lt"/>
+        <a:ea typeface="+mn-ea"/>
+        <a:cs typeface="+mn-cs"/>
+      </a:defRPr>
+    </a:lvl2pPr>
+    <a:lvl3pPr marL="914400" algn="l" defTabSz="914400" rtl="0" eaLnBrk="1" latinLnBrk="0" hangingPunct="1">
+      <a:defRPr sz="1200" kern="1200">
+        <a:solidFill>
+          <a:schemeClr val="tx1"/>
+        </a:solidFill>
+        <a:latin typeface="+mn-lt"/>
+        <a:ea typeface="+mn-ea"/>
+        <a:cs typeface="+mn-cs"/>
+      </a:defRPr>
+    </a:lvl3pPr>
+    <a:lvl4pPr marL="1371600" algn="l" defTabSz="914400" rtl="0" eaLnBrk="1" latinLnBrk="0" hangingPunct="1">
+      <a:defRPr sz="1200" kern="1200">
+        <a:solidFill>
+          <a:schemeClr val="tx1"/>
+        </a:solidFill>
+        <a:latin typeface="+mn-lt"/>
+        <a:ea typeface="+mn-ea"/>
+        <a:cs typeface="+mn-cs"/>
+      </a:defRPr>
+    </a:lvl4pPr>
+    <a:lvl5pPr marL="1828800" algn="l" defTabSz="914400" rtl="0" eaLnBrk="1" latinLnBrk="0" hangingPunct="1">
+      <a:defRPr sz="1200" kern="1200">
+        <a:solidFill>
+          <a:schemeClr val="tx1"/>
+        </a:solidFill>
+        <a:latin typeface="+mn-lt"/>
+        <a:ea typeface="+mn-ea"/>
+        <a:cs typeface="+mn-cs"/>
+      </a:defRPr>
+    </a:lvl5pPr>
+    <a:lvl6pPr marL="2286000" algn="l" defTabSz="914400" rtl="0" eaLnBrk="1" latinLnBrk="0" hangingPunct="1">
+      <a:defRPr sz="1200" kern="1200">
+        <a:solidFill>
+          <a:schemeClr val="tx1"/>
+        </a:solidFill>
+        <a:latin typeface="+mn-lt"/>
+        <a:ea typeface="+mn-ea"/>
+        <a:cs typeface="+mn-cs"/>
+      </a:defRPr>
+    </a:lvl6pPr>
+    <a:lvl7pPr marL="2743200" algn="l" defTabSz="914400" rtl="0" eaLnBrk="1" latinLnBrk="0" hangingPunct="1">
+      <a:defRPr sz="1200" kern="1200">
+        <a:solidFill>
+          <a:schemeClr val="tx1"/>
+        </a:solidFill>
+        <a:latin typeface="+mn-lt"/>
+        <a:ea typeface="+mn-ea"/>
+        <a:cs typeface="+mn-cs"/>
+      </a:defRPr>
+    </a:lvl7pPr>
+    <a:lvl8pPr marL="3200400" algn="l" defTabSz="914400" rtl="0" eaLnBrk="1" latinLnBrk="0" hangingPunct="1">
+      <a:defRPr sz="1200" kern="1200">
+        <a:solidFill>
+          <a:schemeClr val="tx1"/>
+        </a:solidFill>
+        <a:latin typeface="+mn-lt"/>
+        <a:ea typeface="+mn-ea"/>
+        <a:cs typeface="+mn-cs"/>
+      </a:defRPr>
+    </a:lvl8pPr>
+    <a:lvl9pPr marL="3657600" algn="l" defTabSz="914400" rtl="0" eaLnBrk="1" latinLnBrk="0" hangingPunct="1">
+      <a:defRPr sz="1200" kern="1200">
+        <a:solidFill>
+          <a:schemeClr val="tx1"/>
+        </a:solidFill>
+        <a:latin typeface="+mn-lt"/>
+        <a:ea typeface="+mn-ea"/>
+        <a:cs typeface="+mn-cs"/>
+      </a:defRPr>
+    </a:lvl9pPr>
+  </p:notesStyle>
+</p:notesMaster>
+</file>
+
 <file path=ppt/slideLayouts/slideLayout1.xml><?xml version="1.0" encoding="utf-8"?>
 <p:sldLayout xmlns:a="http://schemas.openxmlformats.org/drawingml/2006/main" xmlns:r="http://schemas.openxmlformats.org/officeDocument/2006/relationships" xmlns:p="http://schemas.openxmlformats.org/presentationml/2006/main" type="title" preserve="1">
   <p:cSld name="Diapositive de titre">
@@ -268,7 +621,7 @@
           <a:bodyPr/>
           <a:lstStyle/>
           <a:p>
-            <a:fld id="{AEA27D1D-B1B7-486D-84BC-07528D20262E}" type="datetimeFigureOut">
+            <a:fld id="{0EEF7359-6F4B-4DDE-B4B4-FCA63065D932}" type="datetime1">
               <a:rPr lang="fr-BE" smtClean="0"/>
               <a:t>23-03-26</a:t>
             </a:fld>
@@ -468,7 +821,7 @@
           <a:bodyPr/>
           <a:lstStyle/>
           <a:p>
-            <a:fld id="{AEA27D1D-B1B7-486D-84BC-07528D20262E}" type="datetimeFigureOut">
+            <a:fld id="{23BE8029-426D-497D-80B4-D4AD16055BC9}" type="datetime1">
               <a:rPr lang="fr-BE" smtClean="0"/>
               <a:t>23-03-26</a:t>
             </a:fld>
@@ -678,7 +1031,7 @@
           <a:bodyPr/>
           <a:lstStyle/>
           <a:p>
-            <a:fld id="{AEA27D1D-B1B7-486D-84BC-07528D20262E}" type="datetimeFigureOut">
+            <a:fld id="{66978CD1-4B56-4F0B-B848-FE19E6C0C64E}" type="datetime1">
               <a:rPr lang="fr-BE" smtClean="0"/>
               <a:t>23-03-26</a:t>
             </a:fld>
@@ -878,7 +1231,7 @@
           <a:bodyPr/>
           <a:lstStyle/>
           <a:p>
-            <a:fld id="{AEA27D1D-B1B7-486D-84BC-07528D20262E}" type="datetimeFigureOut">
+            <a:fld id="{961B25C4-57E3-4BAD-9025-80D611C580C5}" type="datetime1">
               <a:rPr lang="fr-BE" smtClean="0"/>
               <a:t>23-03-26</a:t>
             </a:fld>
@@ -1154,7 +1507,7 @@
           <a:bodyPr/>
           <a:lstStyle/>
           <a:p>
-            <a:fld id="{AEA27D1D-B1B7-486D-84BC-07528D20262E}" type="datetimeFigureOut">
+            <a:fld id="{F6AEE8E9-C149-4CBD-8A27-D3C134FE4790}" type="datetime1">
               <a:rPr lang="fr-BE" smtClean="0"/>
               <a:t>23-03-26</a:t>
             </a:fld>
@@ -1422,7 +1775,7 @@
           <a:bodyPr/>
           <a:lstStyle/>
           <a:p>
-            <a:fld id="{AEA27D1D-B1B7-486D-84BC-07528D20262E}" type="datetimeFigureOut">
+            <a:fld id="{8B50408B-0B2E-4C7C-AA7F-063F6F6EF8C4}" type="datetime1">
               <a:rPr lang="fr-BE" smtClean="0"/>
               <a:t>23-03-26</a:t>
             </a:fld>
@@ -1837,7 +2190,7 @@
           <a:bodyPr/>
           <a:lstStyle/>
           <a:p>
-            <a:fld id="{AEA27D1D-B1B7-486D-84BC-07528D20262E}" type="datetimeFigureOut">
+            <a:fld id="{171C273B-A74A-48F8-A6D4-D84FC06B84B9}" type="datetime1">
               <a:rPr lang="fr-BE" smtClean="0"/>
               <a:t>23-03-26</a:t>
             </a:fld>
@@ -1979,7 +2332,7 @@
           <a:bodyPr/>
           <a:lstStyle/>
           <a:p>
-            <a:fld id="{AEA27D1D-B1B7-486D-84BC-07528D20262E}" type="datetimeFigureOut">
+            <a:fld id="{938A11E5-1A77-4A3C-9204-B04202A08EF6}" type="datetime1">
               <a:rPr lang="fr-BE" smtClean="0"/>
               <a:t>23-03-26</a:t>
             </a:fld>
@@ -2092,7 +2445,7 @@
           <a:bodyPr/>
           <a:lstStyle/>
           <a:p>
-            <a:fld id="{AEA27D1D-B1B7-486D-84BC-07528D20262E}" type="datetimeFigureOut">
+            <a:fld id="{7ADA988F-6694-47E8-858D-407A6329EFB0}" type="datetime1">
               <a:rPr lang="fr-BE" smtClean="0"/>
               <a:t>23-03-26</a:t>
             </a:fld>
@@ -2405,7 +2758,7 @@
           <a:bodyPr/>
           <a:lstStyle/>
           <a:p>
-            <a:fld id="{AEA27D1D-B1B7-486D-84BC-07528D20262E}" type="datetimeFigureOut">
+            <a:fld id="{E0B35633-F119-425E-B57E-850D62C8335C}" type="datetime1">
               <a:rPr lang="fr-BE" smtClean="0"/>
               <a:t>23-03-26</a:t>
             </a:fld>
@@ -2694,7 +3047,7 @@
           <a:bodyPr/>
           <a:lstStyle/>
           <a:p>
-            <a:fld id="{AEA27D1D-B1B7-486D-84BC-07528D20262E}" type="datetimeFigureOut">
+            <a:fld id="{32ECA291-4A83-4694-9EB9-29897EE83568}" type="datetime1">
               <a:rPr lang="fr-BE" smtClean="0"/>
               <a:t>23-03-26</a:t>
             </a:fld>
@@ -2937,7 +3290,7 @@
             </a:lvl1pPr>
           </a:lstStyle>
           <a:p>
-            <a:fld id="{AEA27D1D-B1B7-486D-84BC-07528D20262E}" type="datetimeFigureOut">
+            <a:fld id="{85A3AF2D-059E-4402-BD1F-D0C247FC3B3C}" type="datetime1">
               <a:rPr lang="fr-BE" smtClean="0"/>
               <a:t>23-03-26</a:t>
             </a:fld>
@@ -3056,6 +3409,7 @@
     <p:sldLayoutId id="2147483658" r:id="rId10"/>
     <p:sldLayoutId id="2147483659" r:id="rId11"/>
   </p:sldLayoutIdLst>
+  <p:hf hdr="0" ftr="0" dt="0"/>
   <p:txStyles>
     <p:titleStyle>
       <a:lvl1pPr algn="l" defTabSz="914400" rtl="0" eaLnBrk="1" latinLnBrk="0" hangingPunct="1">
@@ -3433,6 +3787,35 @@
           </a:p>
         </p:txBody>
       </p:sp>
+      <p:sp>
+        <p:nvSpPr>
+          <p:cNvPr id="4" name="Espace réservé du numéro de diapositive 3">
+            <a:extLst>
+              <a:ext uri="{FF2B5EF4-FFF2-40B4-BE49-F238E27FC236}">
+                <a16:creationId xmlns:a16="http://schemas.microsoft.com/office/drawing/2014/main" id="{35F2E016-3249-9AF9-3FF4-0EDD024D807A}"/>
+              </a:ext>
+            </a:extLst>
+          </p:cNvPr>
+          <p:cNvSpPr>
+            <a:spLocks noGrp="1"/>
+          </p:cNvSpPr>
+          <p:nvPr>
+            <p:ph type="sldNum" sz="quarter" idx="12"/>
+          </p:nvPr>
+        </p:nvSpPr>
+        <p:spPr/>
+        <p:txBody>
+          <a:bodyPr/>
+          <a:lstStyle/>
+          <a:p>
+            <a:fld id="{6D78B8F9-767A-4546-9D20-2187B79FBE53}" type="slidenum">
+              <a:rPr lang="fr-BE" smtClean="0"/>
+              <a:t>1</a:t>
+            </a:fld>
+            <a:endParaRPr lang="fr-BE"/>
+          </a:p>
+        </p:txBody>
+      </p:sp>
     </p:spTree>
     <p:extLst>
       <p:ext uri="{BB962C8B-B14F-4D97-AF65-F5344CB8AC3E}">
@@ -3532,6 +3915,35 @@
           </a:p>
         </p:txBody>
       </p:sp>
+      <p:sp>
+        <p:nvSpPr>
+          <p:cNvPr id="4" name="Espace réservé du numéro de diapositive 3">
+            <a:extLst>
+              <a:ext uri="{FF2B5EF4-FFF2-40B4-BE49-F238E27FC236}">
+                <a16:creationId xmlns:a16="http://schemas.microsoft.com/office/drawing/2014/main" id="{8112E2C4-C639-2290-5E12-F7CDA1EF3302}"/>
+              </a:ext>
+            </a:extLst>
+          </p:cNvPr>
+          <p:cNvSpPr>
+            <a:spLocks noGrp="1"/>
+          </p:cNvSpPr>
+          <p:nvPr>
+            <p:ph type="sldNum" sz="quarter" idx="12"/>
+          </p:nvPr>
+        </p:nvSpPr>
+        <p:spPr/>
+        <p:txBody>
+          <a:bodyPr/>
+          <a:lstStyle/>
+          <a:p>
+            <a:fld id="{6D78B8F9-767A-4546-9D20-2187B79FBE53}" type="slidenum">
+              <a:rPr lang="fr-BE" smtClean="0"/>
+              <a:t>10</a:t>
+            </a:fld>
+            <a:endParaRPr lang="fr-BE"/>
+          </a:p>
+        </p:txBody>
+      </p:sp>
     </p:spTree>
     <p:extLst>
       <p:ext uri="{BB962C8B-B14F-4D97-AF65-F5344CB8AC3E}">
@@ -3664,6 +4076,35 @@
           </a:p>
         </p:txBody>
       </p:sp>
+      <p:sp>
+        <p:nvSpPr>
+          <p:cNvPr id="4" name="Espace réservé du numéro de diapositive 3">
+            <a:extLst>
+              <a:ext uri="{FF2B5EF4-FFF2-40B4-BE49-F238E27FC236}">
+                <a16:creationId xmlns:a16="http://schemas.microsoft.com/office/drawing/2014/main" id="{1A68964F-E60E-CA65-82CB-445B724563BF}"/>
+              </a:ext>
+            </a:extLst>
+          </p:cNvPr>
+          <p:cNvSpPr>
+            <a:spLocks noGrp="1"/>
+          </p:cNvSpPr>
+          <p:nvPr>
+            <p:ph type="sldNum" sz="quarter" idx="12"/>
+          </p:nvPr>
+        </p:nvSpPr>
+        <p:spPr/>
+        <p:txBody>
+          <a:bodyPr/>
+          <a:lstStyle/>
+          <a:p>
+            <a:fld id="{6D78B8F9-767A-4546-9D20-2187B79FBE53}" type="slidenum">
+              <a:rPr lang="fr-BE" smtClean="0"/>
+              <a:t>2</a:t>
+            </a:fld>
+            <a:endParaRPr lang="fr-BE"/>
+          </a:p>
+        </p:txBody>
+      </p:sp>
     </p:spTree>
     <p:extLst>
       <p:ext uri="{BB962C8B-B14F-4D97-AF65-F5344CB8AC3E}">
@@ -3824,6 +4265,35 @@
           </a:p>
         </p:txBody>
       </p:sp>
+      <p:sp>
+        <p:nvSpPr>
+          <p:cNvPr id="4" name="Espace réservé du numéro de diapositive 3">
+            <a:extLst>
+              <a:ext uri="{FF2B5EF4-FFF2-40B4-BE49-F238E27FC236}">
+                <a16:creationId xmlns:a16="http://schemas.microsoft.com/office/drawing/2014/main" id="{BC182156-267D-C3A8-434A-04AF4CE31218}"/>
+              </a:ext>
+            </a:extLst>
+          </p:cNvPr>
+          <p:cNvSpPr>
+            <a:spLocks noGrp="1"/>
+          </p:cNvSpPr>
+          <p:nvPr>
+            <p:ph type="sldNum" sz="quarter" idx="12"/>
+          </p:nvPr>
+        </p:nvSpPr>
+        <p:spPr/>
+        <p:txBody>
+          <a:bodyPr/>
+          <a:lstStyle/>
+          <a:p>
+            <a:fld id="{6D78B8F9-767A-4546-9D20-2187B79FBE53}" type="slidenum">
+              <a:rPr lang="fr-BE" smtClean="0"/>
+              <a:t>3</a:t>
+            </a:fld>
+            <a:endParaRPr lang="fr-BE"/>
+          </a:p>
+        </p:txBody>
+      </p:sp>
     </p:spTree>
     <p:extLst>
       <p:ext uri="{BB962C8B-B14F-4D97-AF65-F5344CB8AC3E}">
@@ -3922,6 +4392,35 @@
           </a:p>
         </p:txBody>
       </p:sp>
+      <p:sp>
+        <p:nvSpPr>
+          <p:cNvPr id="4" name="Espace réservé du numéro de diapositive 3">
+            <a:extLst>
+              <a:ext uri="{FF2B5EF4-FFF2-40B4-BE49-F238E27FC236}">
+                <a16:creationId xmlns:a16="http://schemas.microsoft.com/office/drawing/2014/main" id="{E811D8AD-6C4E-04EE-39D7-F13314069418}"/>
+              </a:ext>
+            </a:extLst>
+          </p:cNvPr>
+          <p:cNvSpPr>
+            <a:spLocks noGrp="1"/>
+          </p:cNvSpPr>
+          <p:nvPr>
+            <p:ph type="sldNum" sz="quarter" idx="12"/>
+          </p:nvPr>
+        </p:nvSpPr>
+        <p:spPr/>
+        <p:txBody>
+          <a:bodyPr/>
+          <a:lstStyle/>
+          <a:p>
+            <a:fld id="{6D78B8F9-767A-4546-9D20-2187B79FBE53}" type="slidenum">
+              <a:rPr lang="fr-BE" smtClean="0"/>
+              <a:t>4</a:t>
+            </a:fld>
+            <a:endParaRPr lang="fr-BE"/>
+          </a:p>
+        </p:txBody>
+      </p:sp>
     </p:spTree>
     <p:extLst>
       <p:ext uri="{BB962C8B-B14F-4D97-AF65-F5344CB8AC3E}">
@@ -4014,6 +4513,35 @@
           </a:p>
         </p:txBody>
       </p:sp>
+      <p:sp>
+        <p:nvSpPr>
+          <p:cNvPr id="4" name="Espace réservé du numéro de diapositive 3">
+            <a:extLst>
+              <a:ext uri="{FF2B5EF4-FFF2-40B4-BE49-F238E27FC236}">
+                <a16:creationId xmlns:a16="http://schemas.microsoft.com/office/drawing/2014/main" id="{4F09B27B-FBEA-B891-65BC-0F63ECCB6C6E}"/>
+              </a:ext>
+            </a:extLst>
+          </p:cNvPr>
+          <p:cNvSpPr>
+            <a:spLocks noGrp="1"/>
+          </p:cNvSpPr>
+          <p:nvPr>
+            <p:ph type="sldNum" sz="quarter" idx="12"/>
+          </p:nvPr>
+        </p:nvSpPr>
+        <p:spPr/>
+        <p:txBody>
+          <a:bodyPr/>
+          <a:lstStyle/>
+          <a:p>
+            <a:fld id="{6D78B8F9-767A-4546-9D20-2187B79FBE53}" type="slidenum">
+              <a:rPr lang="fr-BE" smtClean="0"/>
+              <a:t>5</a:t>
+            </a:fld>
+            <a:endParaRPr lang="fr-BE"/>
+          </a:p>
+        </p:txBody>
+      </p:sp>
     </p:spTree>
     <p:extLst>
       <p:ext uri="{BB962C8B-B14F-4D97-AF65-F5344CB8AC3E}">
@@ -4124,6 +4652,35 @@
           </a:p>
         </p:txBody>
       </p:sp>
+      <p:sp>
+        <p:nvSpPr>
+          <p:cNvPr id="4" name="Espace réservé du numéro de diapositive 3">
+            <a:extLst>
+              <a:ext uri="{FF2B5EF4-FFF2-40B4-BE49-F238E27FC236}">
+                <a16:creationId xmlns:a16="http://schemas.microsoft.com/office/drawing/2014/main" id="{B63BA72F-A06E-C982-6BE5-F3FAF30BCD8E}"/>
+              </a:ext>
+            </a:extLst>
+          </p:cNvPr>
+          <p:cNvSpPr>
+            <a:spLocks noGrp="1"/>
+          </p:cNvSpPr>
+          <p:nvPr>
+            <p:ph type="sldNum" sz="quarter" idx="12"/>
+          </p:nvPr>
+        </p:nvSpPr>
+        <p:spPr/>
+        <p:txBody>
+          <a:bodyPr/>
+          <a:lstStyle/>
+          <a:p>
+            <a:fld id="{6D78B8F9-767A-4546-9D20-2187B79FBE53}" type="slidenum">
+              <a:rPr lang="fr-BE" smtClean="0"/>
+              <a:t>6</a:t>
+            </a:fld>
+            <a:endParaRPr lang="fr-BE"/>
+          </a:p>
+        </p:txBody>
+      </p:sp>
     </p:spTree>
     <p:extLst>
       <p:ext uri="{BB962C8B-B14F-4D97-AF65-F5344CB8AC3E}">
@@ -4244,6 +4801,35 @@
           </a:p>
           <a:p>
             <a:endParaRPr lang="fr-BE" dirty="0"/>
+          </a:p>
+        </p:txBody>
+      </p:sp>
+      <p:sp>
+        <p:nvSpPr>
+          <p:cNvPr id="4" name="Espace réservé du numéro de diapositive 3">
+            <a:extLst>
+              <a:ext uri="{FF2B5EF4-FFF2-40B4-BE49-F238E27FC236}">
+                <a16:creationId xmlns:a16="http://schemas.microsoft.com/office/drawing/2014/main" id="{129C6140-EB72-8BB1-8908-BC05E56E758D}"/>
+              </a:ext>
+            </a:extLst>
+          </p:cNvPr>
+          <p:cNvSpPr>
+            <a:spLocks noGrp="1"/>
+          </p:cNvSpPr>
+          <p:nvPr>
+            <p:ph type="sldNum" sz="quarter" idx="12"/>
+          </p:nvPr>
+        </p:nvSpPr>
+        <p:spPr/>
+        <p:txBody>
+          <a:bodyPr/>
+          <a:lstStyle/>
+          <a:p>
+            <a:fld id="{6D78B8F9-767A-4546-9D20-2187B79FBE53}" type="slidenum">
+              <a:rPr lang="fr-BE" smtClean="0"/>
+              <a:t>7</a:t>
+            </a:fld>
+            <a:endParaRPr lang="fr-BE"/>
           </a:p>
         </p:txBody>
       </p:sp>
@@ -6128,6 +6714,35 @@
           </a:p>
         </p:txBody>
       </p:sp>
+      <p:sp>
+        <p:nvSpPr>
+          <p:cNvPr id="13" name="Espace réservé du numéro de diapositive 12">
+            <a:extLst>
+              <a:ext uri="{FF2B5EF4-FFF2-40B4-BE49-F238E27FC236}">
+                <a16:creationId xmlns:a16="http://schemas.microsoft.com/office/drawing/2014/main" id="{1DA15EBB-DA5D-6E92-320F-C1FDE0560A4C}"/>
+              </a:ext>
+            </a:extLst>
+          </p:cNvPr>
+          <p:cNvSpPr>
+            <a:spLocks noGrp="1"/>
+          </p:cNvSpPr>
+          <p:nvPr>
+            <p:ph type="sldNum" sz="quarter" idx="12"/>
+          </p:nvPr>
+        </p:nvSpPr>
+        <p:spPr/>
+        <p:txBody>
+          <a:bodyPr/>
+          <a:lstStyle/>
+          <a:p>
+            <a:fld id="{6D78B8F9-767A-4546-9D20-2187B79FBE53}" type="slidenum">
+              <a:rPr lang="fr-BE" smtClean="0"/>
+              <a:t>8</a:t>
+            </a:fld>
+            <a:endParaRPr lang="fr-BE"/>
+          </a:p>
+        </p:txBody>
+      </p:sp>
     </p:spTree>
     <p:extLst>
       <p:ext uri="{BB962C8B-B14F-4D97-AF65-F5344CB8AC3E}">
@@ -6270,6 +6885,35 @@
           </a:p>
           <a:p>
             <a:endParaRPr lang="fr-BE" dirty="0"/>
+          </a:p>
+        </p:txBody>
+      </p:sp>
+      <p:sp>
+        <p:nvSpPr>
+          <p:cNvPr id="4" name="Espace réservé du numéro de diapositive 3">
+            <a:extLst>
+              <a:ext uri="{FF2B5EF4-FFF2-40B4-BE49-F238E27FC236}">
+                <a16:creationId xmlns:a16="http://schemas.microsoft.com/office/drawing/2014/main" id="{4E0FA675-221B-C462-741E-CDAFC60C9CE8}"/>
+              </a:ext>
+            </a:extLst>
+          </p:cNvPr>
+          <p:cNvSpPr>
+            <a:spLocks noGrp="1"/>
+          </p:cNvSpPr>
+          <p:nvPr>
+            <p:ph type="sldNum" sz="quarter" idx="12"/>
+          </p:nvPr>
+        </p:nvSpPr>
+        <p:spPr/>
+        <p:txBody>
+          <a:bodyPr/>
+          <a:lstStyle/>
+          <a:p>
+            <a:fld id="{6D78B8F9-767A-4546-9D20-2187B79FBE53}" type="slidenum">
+              <a:rPr lang="fr-BE" smtClean="0"/>
+              <a:t>9</a:t>
+            </a:fld>
+            <a:endParaRPr lang="fr-BE"/>
           </a:p>
         </p:txBody>
       </p:sp>
@@ -6599,4 +7243,319 @@
     </a:ext>
   </a:extLst>
 </a:theme>
+</file>
+
+<file path=ppt/theme/theme2.xml><?xml version="1.0" encoding="utf-8"?>
+<a:theme xmlns:a="http://schemas.openxmlformats.org/drawingml/2006/main" name="Thème Office">
+  <a:themeElements>
+    <a:clrScheme name="Office">
+      <a:dk1>
+        <a:sysClr val="windowText" lastClr="000000"/>
+      </a:dk1>
+      <a:lt1>
+        <a:sysClr val="window" lastClr="FFFFFF"/>
+      </a:lt1>
+      <a:dk2>
+        <a:srgbClr val="0E2841"/>
+      </a:dk2>
+      <a:lt2>
+        <a:srgbClr val="E8E8E8"/>
+      </a:lt2>
+      <a:accent1>
+        <a:srgbClr val="156082"/>
+      </a:accent1>
+      <a:accent2>
+        <a:srgbClr val="E97132"/>
+      </a:accent2>
+      <a:accent3>
+        <a:srgbClr val="196B24"/>
+      </a:accent3>
+      <a:accent4>
+        <a:srgbClr val="0F9ED5"/>
+      </a:accent4>
+      <a:accent5>
+        <a:srgbClr val="A02B93"/>
+      </a:accent5>
+      <a:accent6>
+        <a:srgbClr val="4EA72E"/>
+      </a:accent6>
+      <a:hlink>
+        <a:srgbClr val="467886"/>
+      </a:hlink>
+      <a:folHlink>
+        <a:srgbClr val="96607D"/>
+      </a:folHlink>
+    </a:clrScheme>
+    <a:fontScheme name="Office">
+      <a:majorFont>
+        <a:latin typeface="Aptos Display" panose="02110004020202020204"/>
+        <a:ea typeface=""/>
+        <a:cs typeface=""/>
+        <a:font script="Jpan" typeface="游ゴシック Light"/>
+        <a:font script="Hang" typeface="맑은 고딕"/>
+        <a:font script="Hans" typeface="等线 Light"/>
+        <a:font script="Hant" typeface="新細明體"/>
+        <a:font script="Arab" typeface="Times New Roman"/>
+        <a:font script="Hebr" typeface="Times New Roman"/>
+        <a:font script="Thai" typeface="Angsana New"/>
+        <a:font script="Ethi" typeface="Nyala"/>
+        <a:font script="Beng" typeface="Vrinda"/>
+        <a:font script="Gujr" typeface="Shruti"/>
+        <a:font script="Khmr" typeface="MoolBoran"/>
+        <a:font script="Knda" typeface="Tunga"/>
+        <a:font script="Guru" typeface="Raavi"/>
+        <a:font script="Cans" typeface="Euphemia"/>
+        <a:font script="Cher" typeface="Plantagenet Cherokee"/>
+        <a:font script="Yiii" typeface="Microsoft Yi Baiti"/>
+        <a:font script="Tibt" typeface="Microsoft Himalaya"/>
+        <a:font script="Thaa" typeface="MV Boli"/>
+        <a:font script="Deva" typeface="Mangal"/>
+        <a:font script="Telu" typeface="Gautami"/>
+        <a:font script="Taml" typeface="Latha"/>
+        <a:font script="Syrc" typeface="Estrangelo Edessa"/>
+        <a:font script="Orya" typeface="Kalinga"/>
+        <a:font script="Mlym" typeface="Kartika"/>
+        <a:font script="Laoo" typeface="DokChampa"/>
+        <a:font script="Sinh" typeface="Iskoola Pota"/>
+        <a:font script="Mong" typeface="Mongolian Baiti"/>
+        <a:font script="Viet" typeface="Times New Roman"/>
+        <a:font script="Uigh" typeface="Microsoft Uighur"/>
+        <a:font script="Geor" typeface="Sylfaen"/>
+        <a:font script="Armn" typeface="Arial"/>
+        <a:font script="Bugi" typeface="Leelawadee UI"/>
+        <a:font script="Bopo" typeface="Microsoft JhengHei"/>
+        <a:font script="Java" typeface="Javanese Text"/>
+        <a:font script="Lisu" typeface="Segoe UI"/>
+        <a:font script="Mymr" typeface="Myanmar Text"/>
+        <a:font script="Nkoo" typeface="Ebrima"/>
+        <a:font script="Olck" typeface="Nirmala UI"/>
+        <a:font script="Osma" typeface="Ebrima"/>
+        <a:font script="Phag" typeface="Phagspa"/>
+        <a:font script="Syrn" typeface="Estrangelo Edessa"/>
+        <a:font script="Syrj" typeface="Estrangelo Edessa"/>
+        <a:font script="Syre" typeface="Estrangelo Edessa"/>
+        <a:font script="Sora" typeface="Nirmala UI"/>
+        <a:font script="Tale" typeface="Microsoft Tai Le"/>
+        <a:font script="Talu" typeface="Microsoft New Tai Lue"/>
+        <a:font script="Tfng" typeface="Ebrima"/>
+      </a:majorFont>
+      <a:minorFont>
+        <a:latin typeface="Aptos" panose="02110004020202020204"/>
+        <a:ea typeface=""/>
+        <a:cs typeface=""/>
+        <a:font script="Jpan" typeface="游ゴシック"/>
+        <a:font script="Hang" typeface="맑은 고딕"/>
+        <a:font script="Hans" typeface="等线"/>
+        <a:font script="Hant" typeface="新細明體"/>
+        <a:font script="Arab" typeface="Arial"/>
+        <a:font script="Hebr" typeface="Arial"/>
+        <a:font script="Thai" typeface="Cordia New"/>
+        <a:font script="Ethi" typeface="Nyala"/>
+        <a:font script="Beng" typeface="Vrinda"/>
+        <a:font script="Gujr" typeface="Shruti"/>
+        <a:font script="Khmr" typeface="DaunPenh"/>
+        <a:font script="Knda" typeface="Tunga"/>
+        <a:font script="Guru" typeface="Raavi"/>
+        <a:font script="Cans" typeface="Euphemia"/>
+        <a:font script="Cher" typeface="Plantagenet Cherokee"/>
+        <a:font script="Yiii" typeface="Microsoft Yi Baiti"/>
+        <a:font script="Tibt" typeface="Microsoft Himalaya"/>
+        <a:font script="Thaa" typeface="MV Boli"/>
+        <a:font script="Deva" typeface="Mangal"/>
+        <a:font script="Telu" typeface="Gautami"/>
+        <a:font script="Taml" typeface="Latha"/>
+        <a:font script="Syrc" typeface="Estrangelo Edessa"/>
+        <a:font script="Orya" typeface="Kalinga"/>
+        <a:font script="Mlym" typeface="Kartika"/>
+        <a:font script="Laoo" typeface="DokChampa"/>
+        <a:font script="Sinh" typeface="Iskoola Pota"/>
+        <a:font script="Mong" typeface="Mongolian Baiti"/>
+        <a:font script="Viet" typeface="Arial"/>
+        <a:font script="Uigh" typeface="Microsoft Uighur"/>
+        <a:font script="Geor" typeface="Sylfaen"/>
+        <a:font script="Armn" typeface="Arial"/>
+        <a:font script="Bugi" typeface="Leelawadee UI"/>
+        <a:font script="Bopo" typeface="Microsoft JhengHei"/>
+        <a:font script="Java" typeface="Javanese Text"/>
+        <a:font script="Lisu" typeface="Segoe UI"/>
+        <a:font script="Mymr" typeface="Myanmar Text"/>
+        <a:font script="Nkoo" typeface="Ebrima"/>
+        <a:font script="Olck" typeface="Nirmala UI"/>
+        <a:font script="Osma" typeface="Ebrima"/>
+        <a:font script="Phag" typeface="Phagspa"/>
+        <a:font script="Syrn" typeface="Estrangelo Edessa"/>
+        <a:font script="Syrj" typeface="Estrangelo Edessa"/>
+        <a:font script="Syre" typeface="Estrangelo Edessa"/>
+        <a:font script="Sora" typeface="Nirmala UI"/>
+        <a:font script="Tale" typeface="Microsoft Tai Le"/>
+        <a:font script="Talu" typeface="Microsoft New Tai Lue"/>
+        <a:font script="Tfng" typeface="Ebrima"/>
+      </a:minorFont>
+    </a:fontScheme>
+    <a:fmtScheme name="Office">
+      <a:fillStyleLst>
+        <a:solidFill>
+          <a:schemeClr val="phClr"/>
+        </a:solidFill>
+        <a:gradFill rotWithShape="1">
+          <a:gsLst>
+            <a:gs pos="0">
+              <a:schemeClr val="phClr">
+                <a:lumMod val="110000"/>
+                <a:satMod val="105000"/>
+                <a:tint val="67000"/>
+              </a:schemeClr>
+            </a:gs>
+            <a:gs pos="50000">
+              <a:schemeClr val="phClr">
+                <a:lumMod val="105000"/>
+                <a:satMod val="103000"/>
+                <a:tint val="73000"/>
+              </a:schemeClr>
+            </a:gs>
+            <a:gs pos="100000">
+              <a:schemeClr val="phClr">
+                <a:lumMod val="105000"/>
+                <a:satMod val="109000"/>
+                <a:tint val="81000"/>
+              </a:schemeClr>
+            </a:gs>
+          </a:gsLst>
+          <a:lin ang="5400000" scaled="0"/>
+        </a:gradFill>
+        <a:gradFill rotWithShape="1">
+          <a:gsLst>
+            <a:gs pos="0">
+              <a:schemeClr val="phClr">
+                <a:satMod val="103000"/>
+                <a:lumMod val="102000"/>
+                <a:tint val="94000"/>
+              </a:schemeClr>
+            </a:gs>
+            <a:gs pos="50000">
+              <a:schemeClr val="phClr">
+                <a:satMod val="110000"/>
+                <a:lumMod val="100000"/>
+                <a:shade val="100000"/>
+              </a:schemeClr>
+            </a:gs>
+            <a:gs pos="100000">
+              <a:schemeClr val="phClr">
+                <a:lumMod val="99000"/>
+                <a:satMod val="120000"/>
+                <a:shade val="78000"/>
+              </a:schemeClr>
+            </a:gs>
+          </a:gsLst>
+          <a:lin ang="5400000" scaled="0"/>
+        </a:gradFill>
+      </a:fillStyleLst>
+      <a:lnStyleLst>
+        <a:ln w="12700" cap="flat" cmpd="sng" algn="ctr">
+          <a:solidFill>
+            <a:schemeClr val="phClr"/>
+          </a:solidFill>
+          <a:prstDash val="solid"/>
+          <a:miter lim="800000"/>
+        </a:ln>
+        <a:ln w="19050" cap="flat" cmpd="sng" algn="ctr">
+          <a:solidFill>
+            <a:schemeClr val="phClr"/>
+          </a:solidFill>
+          <a:prstDash val="solid"/>
+          <a:miter lim="800000"/>
+        </a:ln>
+        <a:ln w="25400" cap="flat" cmpd="sng" algn="ctr">
+          <a:solidFill>
+            <a:schemeClr val="phClr"/>
+          </a:solidFill>
+          <a:prstDash val="solid"/>
+          <a:miter lim="800000"/>
+        </a:ln>
+      </a:lnStyleLst>
+      <a:effectStyleLst>
+        <a:effectStyle>
+          <a:effectLst/>
+        </a:effectStyle>
+        <a:effectStyle>
+          <a:effectLst/>
+        </a:effectStyle>
+        <a:effectStyle>
+          <a:effectLst>
+            <a:outerShdw blurRad="57150" dist="19050" dir="5400000" algn="ctr" rotWithShape="0">
+              <a:srgbClr val="000000">
+                <a:alpha val="63000"/>
+              </a:srgbClr>
+            </a:outerShdw>
+          </a:effectLst>
+        </a:effectStyle>
+      </a:effectStyleLst>
+      <a:bgFillStyleLst>
+        <a:solidFill>
+          <a:schemeClr val="phClr"/>
+        </a:solidFill>
+        <a:solidFill>
+          <a:schemeClr val="phClr">
+            <a:tint val="95000"/>
+            <a:satMod val="170000"/>
+          </a:schemeClr>
+        </a:solidFill>
+        <a:gradFill rotWithShape="1">
+          <a:gsLst>
+            <a:gs pos="0">
+              <a:schemeClr val="phClr">
+                <a:tint val="93000"/>
+                <a:satMod val="150000"/>
+                <a:shade val="98000"/>
+                <a:lumMod val="102000"/>
+              </a:schemeClr>
+            </a:gs>
+            <a:gs pos="50000">
+              <a:schemeClr val="phClr">
+                <a:tint val="98000"/>
+                <a:satMod val="130000"/>
+                <a:shade val="90000"/>
+                <a:lumMod val="103000"/>
+              </a:schemeClr>
+            </a:gs>
+            <a:gs pos="100000">
+              <a:schemeClr val="phClr">
+                <a:shade val="63000"/>
+                <a:satMod val="120000"/>
+              </a:schemeClr>
+            </a:gs>
+          </a:gsLst>
+          <a:lin ang="5400000" scaled="0"/>
+        </a:gradFill>
+      </a:bgFillStyleLst>
+    </a:fmtScheme>
+  </a:themeElements>
+  <a:objectDefaults>
+    <a:lnDef>
+      <a:spPr/>
+      <a:bodyPr/>
+      <a:lstStyle/>
+      <a:style>
+        <a:lnRef idx="2">
+          <a:schemeClr val="accent1"/>
+        </a:lnRef>
+        <a:fillRef idx="0">
+          <a:schemeClr val="accent1"/>
+        </a:fillRef>
+        <a:effectRef idx="1">
+          <a:schemeClr val="accent1"/>
+        </a:effectRef>
+        <a:fontRef idx="minor">
+          <a:schemeClr val="tx1"/>
+        </a:fontRef>
+      </a:style>
+    </a:lnDef>
+  </a:objectDefaults>
+  <a:extraClrSchemeLst/>
+  <a:extLst>
+    <a:ext uri="{05A4C25C-085E-4340-85A3-A5531E510DB2}">
+      <thm15:themeFamily xmlns:thm15="http://schemas.microsoft.com/office/thememl/2012/main" name="Office Theme" id="{2E142A2C-CD16-42D6-873A-C26D2A0506FA}" vid="{1BDDFF52-6CD6-40A5-AB3C-68EB2F1E4D0A}"/>
+    </a:ext>
+  </a:extLst>
+</a:theme>
 </file>
--- a/Rapport_projet_SRTP.pptx
+++ b/Rapport_projet_SRTP.pptx
@@ -1,11 +1,11 @@
 
 <file path=ppt/presentation.xml><?xml version="1.0" encoding="utf-8"?>
-<p:presentation xmlns:a="http://schemas.openxmlformats.org/drawingml/2006/main" xmlns:r="http://schemas.openxmlformats.org/officeDocument/2006/relationships" xmlns:p="http://schemas.openxmlformats.org/presentationml/2006/main" saveSubsetFonts="1">
+<p:presentation xmlns:a="http://schemas.openxmlformats.org/drawingml/2006/main" xmlns:r="http://schemas.openxmlformats.org/officeDocument/2006/relationships" xmlns:p="http://schemas.openxmlformats.org/presentationml/2006/main" showSpecialPlsOnTitleSld="0" saveSubsetFonts="1">
   <p:sldMasterIdLst>
     <p:sldMasterId id="2147483648" r:id="rId1"/>
   </p:sldMasterIdLst>
   <p:notesMasterIdLst>
-    <p:notesMasterId r:id="rId12"/>
+    <p:notesMasterId r:id="rId17"/>
   </p:notesMasterIdLst>
   <p:sldIdLst>
     <p:sldId id="256" r:id="rId2"/>
@@ -18,6 +18,11 @@
     <p:sldId id="267" r:id="rId9"/>
     <p:sldId id="264" r:id="rId10"/>
     <p:sldId id="266" r:id="rId11"/>
+    <p:sldId id="268" r:id="rId12"/>
+    <p:sldId id="269" r:id="rId13"/>
+    <p:sldId id="270" r:id="rId14"/>
+    <p:sldId id="271" r:id="rId15"/>
+    <p:sldId id="272" r:id="rId16"/>
   </p:sldIdLst>
   <p:sldSz cx="12192000" cy="6858000"/>
   <p:notesSz cx="6858000" cy="9144000"/>
@@ -206,7 +211,7 @@
           <a:p>
             <a:fld id="{42CCBD27-2017-4083-8306-4AF4201DE26C}" type="datetimeFigureOut">
               <a:rPr lang="fr-BE" smtClean="0"/>
-              <a:t>23-03-26</a:t>
+              <a:t>29-03-26</a:t>
             </a:fld>
             <a:endParaRPr lang="fr-BE"/>
           </a:p>
@@ -623,7 +628,7 @@
           <a:p>
             <a:fld id="{0EEF7359-6F4B-4DDE-B4B4-FCA63065D932}" type="datetime1">
               <a:rPr lang="fr-BE" smtClean="0"/>
-              <a:t>23-03-26</a:t>
+              <a:t>29-03-26</a:t>
             </a:fld>
             <a:endParaRPr lang="fr-BE"/>
           </a:p>
@@ -823,7 +828,7 @@
           <a:p>
             <a:fld id="{23BE8029-426D-497D-80B4-D4AD16055BC9}" type="datetime1">
               <a:rPr lang="fr-BE" smtClean="0"/>
-              <a:t>23-03-26</a:t>
+              <a:t>29-03-26</a:t>
             </a:fld>
             <a:endParaRPr lang="fr-BE"/>
           </a:p>
@@ -1033,7 +1038,7 @@
           <a:p>
             <a:fld id="{66978CD1-4B56-4F0B-B848-FE19E6C0C64E}" type="datetime1">
               <a:rPr lang="fr-BE" smtClean="0"/>
-              <a:t>23-03-26</a:t>
+              <a:t>29-03-26</a:t>
             </a:fld>
             <a:endParaRPr lang="fr-BE"/>
           </a:p>
@@ -1233,7 +1238,7 @@
           <a:p>
             <a:fld id="{961B25C4-57E3-4BAD-9025-80D611C580C5}" type="datetime1">
               <a:rPr lang="fr-BE" smtClean="0"/>
-              <a:t>23-03-26</a:t>
+              <a:t>29-03-26</a:t>
             </a:fld>
             <a:endParaRPr lang="fr-BE"/>
           </a:p>
@@ -1509,7 +1514,7 @@
           <a:p>
             <a:fld id="{F6AEE8E9-C149-4CBD-8A27-D3C134FE4790}" type="datetime1">
               <a:rPr lang="fr-BE" smtClean="0"/>
-              <a:t>23-03-26</a:t>
+              <a:t>29-03-26</a:t>
             </a:fld>
             <a:endParaRPr lang="fr-BE"/>
           </a:p>
@@ -1777,7 +1782,7 @@
           <a:p>
             <a:fld id="{8B50408B-0B2E-4C7C-AA7F-063F6F6EF8C4}" type="datetime1">
               <a:rPr lang="fr-BE" smtClean="0"/>
-              <a:t>23-03-26</a:t>
+              <a:t>29-03-26</a:t>
             </a:fld>
             <a:endParaRPr lang="fr-BE"/>
           </a:p>
@@ -2192,7 +2197,7 @@
           <a:p>
             <a:fld id="{171C273B-A74A-48F8-A6D4-D84FC06B84B9}" type="datetime1">
               <a:rPr lang="fr-BE" smtClean="0"/>
-              <a:t>23-03-26</a:t>
+              <a:t>29-03-26</a:t>
             </a:fld>
             <a:endParaRPr lang="fr-BE"/>
           </a:p>
@@ -2334,7 +2339,7 @@
           <a:p>
             <a:fld id="{938A11E5-1A77-4A3C-9204-B04202A08EF6}" type="datetime1">
               <a:rPr lang="fr-BE" smtClean="0"/>
-              <a:t>23-03-26</a:t>
+              <a:t>29-03-26</a:t>
             </a:fld>
             <a:endParaRPr lang="fr-BE"/>
           </a:p>
@@ -2447,7 +2452,7 @@
           <a:p>
             <a:fld id="{7ADA988F-6694-47E8-858D-407A6329EFB0}" type="datetime1">
               <a:rPr lang="fr-BE" smtClean="0"/>
-              <a:t>23-03-26</a:t>
+              <a:t>29-03-26</a:t>
             </a:fld>
             <a:endParaRPr lang="fr-BE"/>
           </a:p>
@@ -2760,7 +2765,7 @@
           <a:p>
             <a:fld id="{E0B35633-F119-425E-B57E-850D62C8335C}" type="datetime1">
               <a:rPr lang="fr-BE" smtClean="0"/>
-              <a:t>23-03-26</a:t>
+              <a:t>29-03-26</a:t>
             </a:fld>
             <a:endParaRPr lang="fr-BE"/>
           </a:p>
@@ -3049,7 +3054,7 @@
           <a:p>
             <a:fld id="{32ECA291-4A83-4694-9EB9-29897EE83568}" type="datetime1">
               <a:rPr lang="fr-BE" smtClean="0"/>
-              <a:t>23-03-26</a:t>
+              <a:t>29-03-26</a:t>
             </a:fld>
             <a:endParaRPr lang="fr-BE"/>
           </a:p>
@@ -3292,7 +3297,7 @@
           <a:p>
             <a:fld id="{85A3AF2D-059E-4402-BD1F-D0C247FC3B3C}" type="datetime1">
               <a:rPr lang="fr-BE" smtClean="0"/>
-              <a:t>23-03-26</a:t>
+              <a:t>29-03-26</a:t>
             </a:fld>
             <a:endParaRPr lang="fr-BE"/>
           </a:p>
@@ -3787,35 +3792,6 @@
           </a:p>
         </p:txBody>
       </p:sp>
-      <p:sp>
-        <p:nvSpPr>
-          <p:cNvPr id="4" name="Espace réservé du numéro de diapositive 3">
-            <a:extLst>
-              <a:ext uri="{FF2B5EF4-FFF2-40B4-BE49-F238E27FC236}">
-                <a16:creationId xmlns:a16="http://schemas.microsoft.com/office/drawing/2014/main" id="{35F2E016-3249-9AF9-3FF4-0EDD024D807A}"/>
-              </a:ext>
-            </a:extLst>
-          </p:cNvPr>
-          <p:cNvSpPr>
-            <a:spLocks noGrp="1"/>
-          </p:cNvSpPr>
-          <p:nvPr>
-            <p:ph type="sldNum" sz="quarter" idx="12"/>
-          </p:nvPr>
-        </p:nvSpPr>
-        <p:spPr/>
-        <p:txBody>
-          <a:bodyPr/>
-          <a:lstStyle/>
-          <a:p>
-            <a:fld id="{6D78B8F9-767A-4546-9D20-2187B79FBE53}" type="slidenum">
-              <a:rPr lang="fr-BE" smtClean="0"/>
-              <a:t>1</a:t>
-            </a:fld>
-            <a:endParaRPr lang="fr-BE"/>
-          </a:p>
-        </p:txBody>
-      </p:sp>
     </p:spTree>
     <p:extLst>
       <p:ext uri="{BB962C8B-B14F-4D97-AF65-F5344CB8AC3E}">
@@ -3957,6 +3933,1062 @@
 </p:sld>
 </file>
 
+<file path=ppt/slides/slide11.xml><?xml version="1.0" encoding="utf-8"?>
+<p:sld xmlns:a="http://schemas.openxmlformats.org/drawingml/2006/main" xmlns:r="http://schemas.openxmlformats.org/officeDocument/2006/relationships" xmlns:p="http://schemas.openxmlformats.org/presentationml/2006/main">
+  <p:cSld>
+    <p:spTree>
+      <p:nvGrpSpPr>
+        <p:cNvPr id="1" name=""/>
+        <p:cNvGrpSpPr/>
+        <p:nvPr/>
+      </p:nvGrpSpPr>
+      <p:grpSpPr>
+        <a:xfrm>
+          <a:off x="0" y="0"/>
+          <a:ext cx="0" cy="0"/>
+          <a:chOff x="0" y="0"/>
+          <a:chExt cx="0" cy="0"/>
+        </a:xfrm>
+      </p:grpSpPr>
+      <p:sp>
+        <p:nvSpPr>
+          <p:cNvPr id="2" name="Titre 1">
+            <a:extLst>
+              <a:ext uri="{FF2B5EF4-FFF2-40B4-BE49-F238E27FC236}">
+                <a16:creationId xmlns:a16="http://schemas.microsoft.com/office/drawing/2014/main" id="{123CE9BD-836B-0C7E-161F-C886EFC95CC3}"/>
+              </a:ext>
+            </a:extLst>
+          </p:cNvPr>
+          <p:cNvSpPr>
+            <a:spLocks noGrp="1"/>
+          </p:cNvSpPr>
+          <p:nvPr>
+            <p:ph type="title"/>
+          </p:nvPr>
+        </p:nvSpPr>
+        <p:spPr/>
+        <p:txBody>
+          <a:bodyPr/>
+          <a:lstStyle/>
+          <a:p>
+            <a:r>
+              <a:rPr lang="fr-BE"/>
+              <a:t>Interopérabilité</a:t>
+            </a:r>
+            <a:endParaRPr lang="fr-BE" dirty="0"/>
+          </a:p>
+        </p:txBody>
+      </p:sp>
+      <p:sp>
+        <p:nvSpPr>
+          <p:cNvPr id="3" name="Espace réservé du contenu 2">
+            <a:extLst>
+              <a:ext uri="{FF2B5EF4-FFF2-40B4-BE49-F238E27FC236}">
+                <a16:creationId xmlns:a16="http://schemas.microsoft.com/office/drawing/2014/main" id="{55059F73-2D2C-B7FA-DB24-8D7379948733}"/>
+              </a:ext>
+            </a:extLst>
+          </p:cNvPr>
+          <p:cNvSpPr>
+            <a:spLocks noGrp="1"/>
+          </p:cNvSpPr>
+          <p:nvPr>
+            <p:ph idx="1"/>
+          </p:nvPr>
+        </p:nvSpPr>
+        <p:spPr/>
+        <p:txBody>
+          <a:bodyPr/>
+          <a:lstStyle/>
+          <a:p>
+            <a:r>
+              <a:rPr lang="fr-BE" dirty="0"/>
+              <a:t>Tests avec groupes 42 et 61</a:t>
+            </a:r>
+          </a:p>
+          <a:p>
+            <a:r>
+              <a:rPr lang="fr-BE" dirty="0"/>
+              <a:t>Notre serveur/client fonctionnait avec ceux de ces groupes</a:t>
+            </a:r>
+          </a:p>
+          <a:p>
+            <a:r>
+              <a:rPr lang="fr-BE" dirty="0"/>
+              <a:t>Problèmes: erreurs dans le serveur du groupe 61 menant à des résultats inattendus</a:t>
+            </a:r>
+          </a:p>
+        </p:txBody>
+      </p:sp>
+      <p:sp>
+        <p:nvSpPr>
+          <p:cNvPr id="4" name="Espace réservé du numéro de diapositive 3">
+            <a:extLst>
+              <a:ext uri="{FF2B5EF4-FFF2-40B4-BE49-F238E27FC236}">
+                <a16:creationId xmlns:a16="http://schemas.microsoft.com/office/drawing/2014/main" id="{1FA693CD-153F-6964-AA81-1D85138C87A2}"/>
+              </a:ext>
+            </a:extLst>
+          </p:cNvPr>
+          <p:cNvSpPr>
+            <a:spLocks noGrp="1"/>
+          </p:cNvSpPr>
+          <p:nvPr>
+            <p:ph type="sldNum" sz="quarter" idx="12"/>
+          </p:nvPr>
+        </p:nvSpPr>
+        <p:spPr/>
+        <p:txBody>
+          <a:bodyPr/>
+          <a:lstStyle/>
+          <a:p>
+            <a:fld id="{6D78B8F9-767A-4546-9D20-2187B79FBE53}" type="slidenum">
+              <a:rPr lang="fr-BE" smtClean="0"/>
+              <a:t>11</a:t>
+            </a:fld>
+            <a:endParaRPr lang="fr-BE"/>
+          </a:p>
+        </p:txBody>
+      </p:sp>
+    </p:spTree>
+    <p:extLst>
+      <p:ext uri="{BB962C8B-B14F-4D97-AF65-F5344CB8AC3E}">
+        <p14:creationId xmlns:p14="http://schemas.microsoft.com/office/powerpoint/2010/main" val="2449368959"/>
+      </p:ext>
+    </p:extLst>
+  </p:cSld>
+  <p:clrMapOvr>
+    <a:masterClrMapping/>
+  </p:clrMapOvr>
+</p:sld>
+</file>
+
+<file path=ppt/slides/slide12.xml><?xml version="1.0" encoding="utf-8"?>
+<p:sld xmlns:a="http://schemas.openxmlformats.org/drawingml/2006/main" xmlns:r="http://schemas.openxmlformats.org/officeDocument/2006/relationships" xmlns:p="http://schemas.openxmlformats.org/presentationml/2006/main">
+  <p:cSld>
+    <p:spTree>
+      <p:nvGrpSpPr>
+        <p:cNvPr id="1" name=""/>
+        <p:cNvGrpSpPr/>
+        <p:nvPr/>
+      </p:nvGrpSpPr>
+      <p:grpSpPr>
+        <a:xfrm>
+          <a:off x="0" y="0"/>
+          <a:ext cx="0" cy="0"/>
+          <a:chOff x="0" y="0"/>
+          <a:chExt cx="0" cy="0"/>
+        </a:xfrm>
+      </p:grpSpPr>
+      <p:sp>
+        <p:nvSpPr>
+          <p:cNvPr id="2" name="Titre 1">
+            <a:extLst>
+              <a:ext uri="{FF2B5EF4-FFF2-40B4-BE49-F238E27FC236}">
+                <a16:creationId xmlns:a16="http://schemas.microsoft.com/office/drawing/2014/main" id="{B68311AB-3FCB-0A3F-7B5D-62731D43B0E9}"/>
+              </a:ext>
+            </a:extLst>
+          </p:cNvPr>
+          <p:cNvSpPr>
+            <a:spLocks noGrp="1"/>
+          </p:cNvSpPr>
+          <p:nvPr>
+            <p:ph type="title"/>
+          </p:nvPr>
+        </p:nvSpPr>
+        <p:spPr/>
+        <p:txBody>
+          <a:bodyPr/>
+          <a:lstStyle/>
+          <a:p>
+            <a:r>
+              <a:rPr lang="fr-BE" dirty="0"/>
+              <a:t>Groupe 42 : client </a:t>
+            </a:r>
+          </a:p>
+        </p:txBody>
+      </p:sp>
+      <p:pic>
+        <p:nvPicPr>
+          <p:cNvPr id="6" name="Espace réservé du contenu 5">
+            <a:extLst>
+              <a:ext uri="{FF2B5EF4-FFF2-40B4-BE49-F238E27FC236}">
+                <a16:creationId xmlns:a16="http://schemas.microsoft.com/office/drawing/2014/main" id="{E60A743A-A54D-6D1E-B418-4F260592A588}"/>
+              </a:ext>
+            </a:extLst>
+          </p:cNvPr>
+          <p:cNvPicPr>
+            <a:picLocks noGrp="1" noChangeAspect="1"/>
+          </p:cNvPicPr>
+          <p:nvPr>
+            <p:ph idx="1"/>
+          </p:nvPr>
+        </p:nvPicPr>
+        <p:blipFill>
+          <a:blip r:embed="rId2">
+            <a:extLst>
+              <a:ext uri="{28A0092B-C50C-407E-A947-70E740481C1C}">
+                <a14:useLocalDpi xmlns:a14="http://schemas.microsoft.com/office/drawing/2010/main" val="0"/>
+              </a:ext>
+            </a:extLst>
+          </a:blip>
+          <a:stretch>
+            <a:fillRect/>
+          </a:stretch>
+        </p:blipFill>
+        <p:spPr>
+          <a:xfrm>
+            <a:off x="0" y="3155140"/>
+            <a:ext cx="6402420" cy="3201210"/>
+          </a:xfrm>
+          <a:prstGeom prst="rect">
+            <a:avLst/>
+          </a:prstGeom>
+        </p:spPr>
+      </p:pic>
+      <p:sp>
+        <p:nvSpPr>
+          <p:cNvPr id="4" name="Espace réservé du numéro de diapositive 3">
+            <a:extLst>
+              <a:ext uri="{FF2B5EF4-FFF2-40B4-BE49-F238E27FC236}">
+                <a16:creationId xmlns:a16="http://schemas.microsoft.com/office/drawing/2014/main" id="{FFD7506A-80FB-5AD0-9477-CE5E1B5476A7}"/>
+              </a:ext>
+            </a:extLst>
+          </p:cNvPr>
+          <p:cNvSpPr>
+            <a:spLocks noGrp="1"/>
+          </p:cNvSpPr>
+          <p:nvPr>
+            <p:ph type="sldNum" sz="quarter" idx="12"/>
+          </p:nvPr>
+        </p:nvSpPr>
+        <p:spPr/>
+        <p:txBody>
+          <a:bodyPr/>
+          <a:lstStyle/>
+          <a:p>
+            <a:fld id="{6D78B8F9-767A-4546-9D20-2187B79FBE53}" type="slidenum">
+              <a:rPr lang="fr-BE" smtClean="0"/>
+              <a:t>12</a:t>
+            </a:fld>
+            <a:endParaRPr lang="fr-BE"/>
+          </a:p>
+        </p:txBody>
+      </p:sp>
+      <p:pic>
+        <p:nvPicPr>
+          <p:cNvPr id="8" name="Image 7">
+            <a:extLst>
+              <a:ext uri="{FF2B5EF4-FFF2-40B4-BE49-F238E27FC236}">
+                <a16:creationId xmlns:a16="http://schemas.microsoft.com/office/drawing/2014/main" id="{45644E7F-1B58-0673-3D96-61D96B02D8E3}"/>
+              </a:ext>
+            </a:extLst>
+          </p:cNvPr>
+          <p:cNvPicPr>
+            <a:picLocks noChangeAspect="1"/>
+          </p:cNvPicPr>
+          <p:nvPr/>
+        </p:nvPicPr>
+        <p:blipFill>
+          <a:blip r:embed="rId3">
+            <a:extLst>
+              <a:ext uri="{28A0092B-C50C-407E-A947-70E740481C1C}">
+                <a14:useLocalDpi xmlns:a14="http://schemas.microsoft.com/office/drawing/2010/main" val="0"/>
+              </a:ext>
+            </a:extLst>
+          </a:blip>
+          <a:stretch>
+            <a:fillRect/>
+          </a:stretch>
+        </p:blipFill>
+        <p:spPr>
+          <a:xfrm>
+            <a:off x="6402420" y="3073391"/>
+            <a:ext cx="5745179" cy="3282959"/>
+          </a:xfrm>
+          <a:prstGeom prst="rect">
+            <a:avLst/>
+          </a:prstGeom>
+        </p:spPr>
+      </p:pic>
+      <p:sp>
+        <p:nvSpPr>
+          <p:cNvPr id="9" name="ZoneTexte 8">
+            <a:extLst>
+              <a:ext uri="{FF2B5EF4-FFF2-40B4-BE49-F238E27FC236}">
+                <a16:creationId xmlns:a16="http://schemas.microsoft.com/office/drawing/2014/main" id="{771E1D62-6D5A-B1AA-5EE5-76B93678CBFA}"/>
+              </a:ext>
+            </a:extLst>
+          </p:cNvPr>
+          <p:cNvSpPr txBox="1"/>
+          <p:nvPr/>
+        </p:nvSpPr>
+        <p:spPr>
+          <a:xfrm>
+            <a:off x="719424" y="1428246"/>
+            <a:ext cx="11365992" cy="1477328"/>
+          </a:xfrm>
+          <a:prstGeom prst="rect">
+            <a:avLst/>
+          </a:prstGeom>
+          <a:noFill/>
+        </p:spPr>
+        <p:txBody>
+          <a:bodyPr wrap="square" rtlCol="0">
+            <a:spAutoFit/>
+          </a:bodyPr>
+          <a:lstStyle/>
+          <a:p>
+            <a:r>
+              <a:rPr lang="fr-BE" b="1" dirty="0"/>
+              <a:t>Débit moyen selon taille des fichiers :</a:t>
+            </a:r>
+          </a:p>
+          <a:p>
+            <a:pPr marL="285750" indent="-285750">
+              <a:buFont typeface="Arial" panose="020B0604020202020204" pitchFamily="34" charset="0"/>
+              <a:buChar char="•"/>
+            </a:pPr>
+            <a:r>
+              <a:rPr lang="fr-BE" dirty="0"/>
+              <a:t>Similaire à celui avec notre client</a:t>
+            </a:r>
+          </a:p>
+          <a:p>
+            <a:r>
+              <a:rPr lang="fr-BE" b="1" dirty="0"/>
+              <a:t>Débit moyen selon taux de perte :</a:t>
+            </a:r>
+          </a:p>
+          <a:p>
+            <a:pPr marL="285750" indent="-285750">
+              <a:buFont typeface="Arial" panose="020B0604020202020204" pitchFamily="34" charset="0"/>
+              <a:buChar char="•"/>
+            </a:pPr>
+            <a:r>
+              <a:rPr lang="fr-BE" dirty="0"/>
+              <a:t>Meilleur qu’avec notre client pour 5 et 10% de perte </a:t>
+            </a:r>
+          </a:p>
+          <a:p>
+            <a:pPr marL="285750" indent="-285750">
+              <a:buFont typeface="Arial" panose="020B0604020202020204" pitchFamily="34" charset="0"/>
+              <a:buChar char="•"/>
+            </a:pPr>
+            <a:r>
+              <a:rPr lang="fr-BE" dirty="0"/>
+              <a:t>Débit nulle à 30% de perte</a:t>
+            </a:r>
+          </a:p>
+        </p:txBody>
+      </p:sp>
+    </p:spTree>
+    <p:extLst>
+      <p:ext uri="{BB962C8B-B14F-4D97-AF65-F5344CB8AC3E}">
+        <p14:creationId xmlns:p14="http://schemas.microsoft.com/office/powerpoint/2010/main" val="840099709"/>
+      </p:ext>
+    </p:extLst>
+  </p:cSld>
+  <p:clrMapOvr>
+    <a:masterClrMapping/>
+  </p:clrMapOvr>
+</p:sld>
+</file>
+
+<file path=ppt/slides/slide13.xml><?xml version="1.0" encoding="utf-8"?>
+<p:sld xmlns:a="http://schemas.openxmlformats.org/drawingml/2006/main" xmlns:r="http://schemas.openxmlformats.org/officeDocument/2006/relationships" xmlns:p="http://schemas.openxmlformats.org/presentationml/2006/main">
+  <p:cSld>
+    <p:spTree>
+      <p:nvGrpSpPr>
+        <p:cNvPr id="1" name=""/>
+        <p:cNvGrpSpPr/>
+        <p:nvPr/>
+      </p:nvGrpSpPr>
+      <p:grpSpPr>
+        <a:xfrm>
+          <a:off x="0" y="0"/>
+          <a:ext cx="0" cy="0"/>
+          <a:chOff x="0" y="0"/>
+          <a:chExt cx="0" cy="0"/>
+        </a:xfrm>
+      </p:grpSpPr>
+      <p:sp>
+        <p:nvSpPr>
+          <p:cNvPr id="2" name="Titre 1">
+            <a:extLst>
+              <a:ext uri="{FF2B5EF4-FFF2-40B4-BE49-F238E27FC236}">
+                <a16:creationId xmlns:a16="http://schemas.microsoft.com/office/drawing/2014/main" id="{F0C50155-C276-445A-4D99-24B8E36453EE}"/>
+              </a:ext>
+            </a:extLst>
+          </p:cNvPr>
+          <p:cNvSpPr>
+            <a:spLocks noGrp="1"/>
+          </p:cNvSpPr>
+          <p:nvPr>
+            <p:ph type="title"/>
+          </p:nvPr>
+        </p:nvSpPr>
+        <p:spPr/>
+        <p:txBody>
+          <a:bodyPr/>
+          <a:lstStyle/>
+          <a:p>
+            <a:r>
+              <a:rPr lang="fr-BE" dirty="0"/>
+              <a:t>Groupe 42 : serveur</a:t>
+            </a:r>
+          </a:p>
+        </p:txBody>
+      </p:sp>
+      <p:pic>
+        <p:nvPicPr>
+          <p:cNvPr id="6" name="Espace réservé du contenu 5">
+            <a:extLst>
+              <a:ext uri="{FF2B5EF4-FFF2-40B4-BE49-F238E27FC236}">
+                <a16:creationId xmlns:a16="http://schemas.microsoft.com/office/drawing/2014/main" id="{AD568A98-3DE8-0E47-5186-7DD19EC47677}"/>
+              </a:ext>
+            </a:extLst>
+          </p:cNvPr>
+          <p:cNvPicPr>
+            <a:picLocks noGrp="1" noChangeAspect="1"/>
+          </p:cNvPicPr>
+          <p:nvPr>
+            <p:ph idx="1"/>
+          </p:nvPr>
+        </p:nvPicPr>
+        <p:blipFill>
+          <a:blip r:embed="rId2">
+            <a:extLst>
+              <a:ext uri="{28A0092B-C50C-407E-A947-70E740481C1C}">
+                <a14:useLocalDpi xmlns:a14="http://schemas.microsoft.com/office/drawing/2010/main" val="0"/>
+              </a:ext>
+            </a:extLst>
+          </a:blip>
+          <a:stretch>
+            <a:fillRect/>
+          </a:stretch>
+        </p:blipFill>
+        <p:spPr>
+          <a:xfrm>
+            <a:off x="207961" y="3293268"/>
+            <a:ext cx="6126163" cy="3063082"/>
+          </a:xfrm>
+          <a:prstGeom prst="rect">
+            <a:avLst/>
+          </a:prstGeom>
+        </p:spPr>
+      </p:pic>
+      <p:sp>
+        <p:nvSpPr>
+          <p:cNvPr id="4" name="Espace réservé du numéro de diapositive 3">
+            <a:extLst>
+              <a:ext uri="{FF2B5EF4-FFF2-40B4-BE49-F238E27FC236}">
+                <a16:creationId xmlns:a16="http://schemas.microsoft.com/office/drawing/2014/main" id="{242ED05C-0E69-D7BE-504F-2F027B8A83FF}"/>
+              </a:ext>
+            </a:extLst>
+          </p:cNvPr>
+          <p:cNvSpPr>
+            <a:spLocks noGrp="1"/>
+          </p:cNvSpPr>
+          <p:nvPr>
+            <p:ph type="sldNum" sz="quarter" idx="12"/>
+          </p:nvPr>
+        </p:nvSpPr>
+        <p:spPr/>
+        <p:txBody>
+          <a:bodyPr/>
+          <a:lstStyle/>
+          <a:p>
+            <a:fld id="{6D78B8F9-767A-4546-9D20-2187B79FBE53}" type="slidenum">
+              <a:rPr lang="fr-BE" smtClean="0"/>
+              <a:t>13</a:t>
+            </a:fld>
+            <a:endParaRPr lang="fr-BE"/>
+          </a:p>
+        </p:txBody>
+      </p:sp>
+      <p:pic>
+        <p:nvPicPr>
+          <p:cNvPr id="8" name="Image 7">
+            <a:extLst>
+              <a:ext uri="{FF2B5EF4-FFF2-40B4-BE49-F238E27FC236}">
+                <a16:creationId xmlns:a16="http://schemas.microsoft.com/office/drawing/2014/main" id="{12ABAEA9-19B7-F5C0-8529-36CF19C70320}"/>
+              </a:ext>
+            </a:extLst>
+          </p:cNvPr>
+          <p:cNvPicPr>
+            <a:picLocks noChangeAspect="1"/>
+          </p:cNvPicPr>
+          <p:nvPr/>
+        </p:nvPicPr>
+        <p:blipFill>
+          <a:blip r:embed="rId3">
+            <a:extLst>
+              <a:ext uri="{28A0092B-C50C-407E-A947-70E740481C1C}">
+                <a14:useLocalDpi xmlns:a14="http://schemas.microsoft.com/office/drawing/2010/main" val="0"/>
+              </a:ext>
+            </a:extLst>
+          </a:blip>
+          <a:stretch>
+            <a:fillRect/>
+          </a:stretch>
+        </p:blipFill>
+        <p:spPr>
+          <a:xfrm>
+            <a:off x="6334124" y="3204850"/>
+            <a:ext cx="5669856" cy="3239917"/>
+          </a:xfrm>
+          <a:prstGeom prst="rect">
+            <a:avLst/>
+          </a:prstGeom>
+        </p:spPr>
+      </p:pic>
+      <p:sp>
+        <p:nvSpPr>
+          <p:cNvPr id="11" name="ZoneTexte 10">
+            <a:extLst>
+              <a:ext uri="{FF2B5EF4-FFF2-40B4-BE49-F238E27FC236}">
+                <a16:creationId xmlns:a16="http://schemas.microsoft.com/office/drawing/2014/main" id="{756AB09F-4899-3160-930B-69A68862CCF1}"/>
+              </a:ext>
+            </a:extLst>
+          </p:cNvPr>
+          <p:cNvSpPr txBox="1"/>
+          <p:nvPr/>
+        </p:nvSpPr>
+        <p:spPr>
+          <a:xfrm>
+            <a:off x="651128" y="1587974"/>
+            <a:ext cx="11365992" cy="1477328"/>
+          </a:xfrm>
+          <a:prstGeom prst="rect">
+            <a:avLst/>
+          </a:prstGeom>
+          <a:noFill/>
+        </p:spPr>
+        <p:txBody>
+          <a:bodyPr wrap="square" rtlCol="0">
+            <a:spAutoFit/>
+          </a:bodyPr>
+          <a:lstStyle/>
+          <a:p>
+            <a:r>
+              <a:rPr lang="fr-BE" b="1" dirty="0"/>
+              <a:t>Débit moyen selon taille des fichiers :</a:t>
+            </a:r>
+          </a:p>
+          <a:p>
+            <a:pPr marL="285750" indent="-285750">
+              <a:buFont typeface="Arial" panose="020B0604020202020204" pitchFamily="34" charset="0"/>
+              <a:buChar char="•"/>
+            </a:pPr>
+            <a:r>
+              <a:rPr lang="fr-BE" dirty="0"/>
+              <a:t>Similaire à celui avec notre serveur</a:t>
+            </a:r>
+          </a:p>
+          <a:p>
+            <a:r>
+              <a:rPr lang="fr-BE" b="1" dirty="0"/>
+              <a:t>Débit moyen selon taux de perte :</a:t>
+            </a:r>
+          </a:p>
+          <a:p>
+            <a:pPr marL="285750" indent="-285750">
+              <a:buFont typeface="Arial" panose="020B0604020202020204" pitchFamily="34" charset="0"/>
+              <a:buChar char="•"/>
+            </a:pPr>
+            <a:r>
+              <a:rPr lang="fr-BE" dirty="0"/>
+              <a:t>Débit sans perte plus faible qu’avec notre serveur</a:t>
+            </a:r>
+          </a:p>
+          <a:p>
+            <a:pPr marL="285750" indent="-285750">
+              <a:buFont typeface="Arial" panose="020B0604020202020204" pitchFamily="34" charset="0"/>
+              <a:buChar char="•"/>
+            </a:pPr>
+            <a:r>
+              <a:rPr lang="fr-BE" dirty="0"/>
+              <a:t>Similaire à celui avec notre serveur à partir de 5% de pertes</a:t>
+            </a:r>
+          </a:p>
+        </p:txBody>
+      </p:sp>
+    </p:spTree>
+    <p:extLst>
+      <p:ext uri="{BB962C8B-B14F-4D97-AF65-F5344CB8AC3E}">
+        <p14:creationId xmlns:p14="http://schemas.microsoft.com/office/powerpoint/2010/main" val="712075142"/>
+      </p:ext>
+    </p:extLst>
+  </p:cSld>
+  <p:clrMapOvr>
+    <a:masterClrMapping/>
+  </p:clrMapOvr>
+</p:sld>
+</file>
+
+<file path=ppt/slides/slide14.xml><?xml version="1.0" encoding="utf-8"?>
+<p:sld xmlns:a="http://schemas.openxmlformats.org/drawingml/2006/main" xmlns:r="http://schemas.openxmlformats.org/officeDocument/2006/relationships" xmlns:p="http://schemas.openxmlformats.org/presentationml/2006/main">
+  <p:cSld>
+    <p:spTree>
+      <p:nvGrpSpPr>
+        <p:cNvPr id="1" name=""/>
+        <p:cNvGrpSpPr/>
+        <p:nvPr/>
+      </p:nvGrpSpPr>
+      <p:grpSpPr>
+        <a:xfrm>
+          <a:off x="0" y="0"/>
+          <a:ext cx="0" cy="0"/>
+          <a:chOff x="0" y="0"/>
+          <a:chExt cx="0" cy="0"/>
+        </a:xfrm>
+      </p:grpSpPr>
+      <p:sp>
+        <p:nvSpPr>
+          <p:cNvPr id="2" name="Titre 1">
+            <a:extLst>
+              <a:ext uri="{FF2B5EF4-FFF2-40B4-BE49-F238E27FC236}">
+                <a16:creationId xmlns:a16="http://schemas.microsoft.com/office/drawing/2014/main" id="{F250D55E-BC4A-33D1-6745-FC467447A717}"/>
+              </a:ext>
+            </a:extLst>
+          </p:cNvPr>
+          <p:cNvSpPr>
+            <a:spLocks noGrp="1"/>
+          </p:cNvSpPr>
+          <p:nvPr>
+            <p:ph type="title"/>
+          </p:nvPr>
+        </p:nvSpPr>
+        <p:spPr/>
+        <p:txBody>
+          <a:bodyPr/>
+          <a:lstStyle/>
+          <a:p>
+            <a:r>
+              <a:rPr lang="fr-BE" dirty="0"/>
+              <a:t>Groupe 61 : client</a:t>
+            </a:r>
+          </a:p>
+        </p:txBody>
+      </p:sp>
+      <p:pic>
+        <p:nvPicPr>
+          <p:cNvPr id="6" name="Espace réservé du contenu 5">
+            <a:extLst>
+              <a:ext uri="{FF2B5EF4-FFF2-40B4-BE49-F238E27FC236}">
+                <a16:creationId xmlns:a16="http://schemas.microsoft.com/office/drawing/2014/main" id="{FB55145F-030B-3E78-F392-1858143A71E6}"/>
+              </a:ext>
+            </a:extLst>
+          </p:cNvPr>
+          <p:cNvPicPr>
+            <a:picLocks noGrp="1" noChangeAspect="1"/>
+          </p:cNvPicPr>
+          <p:nvPr>
+            <p:ph idx="1"/>
+          </p:nvPr>
+        </p:nvPicPr>
+        <p:blipFill>
+          <a:blip r:embed="rId2">
+            <a:extLst>
+              <a:ext uri="{28A0092B-C50C-407E-A947-70E740481C1C}">
+                <a14:useLocalDpi xmlns:a14="http://schemas.microsoft.com/office/drawing/2010/main" val="0"/>
+              </a:ext>
+            </a:extLst>
+          </a:blip>
+          <a:stretch>
+            <a:fillRect/>
+          </a:stretch>
+        </p:blipFill>
+        <p:spPr>
+          <a:xfrm>
+            <a:off x="257968" y="3337321"/>
+            <a:ext cx="6038057" cy="3019029"/>
+          </a:xfrm>
+          <a:prstGeom prst="rect">
+            <a:avLst/>
+          </a:prstGeom>
+        </p:spPr>
+      </p:pic>
+      <p:sp>
+        <p:nvSpPr>
+          <p:cNvPr id="4" name="Espace réservé du numéro de diapositive 3">
+            <a:extLst>
+              <a:ext uri="{FF2B5EF4-FFF2-40B4-BE49-F238E27FC236}">
+                <a16:creationId xmlns:a16="http://schemas.microsoft.com/office/drawing/2014/main" id="{0EF9D598-00AC-BF91-5B26-0A0E9DF9E9E0}"/>
+              </a:ext>
+            </a:extLst>
+          </p:cNvPr>
+          <p:cNvSpPr>
+            <a:spLocks noGrp="1"/>
+          </p:cNvSpPr>
+          <p:nvPr>
+            <p:ph type="sldNum" sz="quarter" idx="12"/>
+          </p:nvPr>
+        </p:nvSpPr>
+        <p:spPr/>
+        <p:txBody>
+          <a:bodyPr/>
+          <a:lstStyle/>
+          <a:p>
+            <a:fld id="{6D78B8F9-767A-4546-9D20-2187B79FBE53}" type="slidenum">
+              <a:rPr lang="fr-BE" smtClean="0"/>
+              <a:t>14</a:t>
+            </a:fld>
+            <a:endParaRPr lang="fr-BE"/>
+          </a:p>
+        </p:txBody>
+      </p:sp>
+      <p:pic>
+        <p:nvPicPr>
+          <p:cNvPr id="8" name="Image 7">
+            <a:extLst>
+              <a:ext uri="{FF2B5EF4-FFF2-40B4-BE49-F238E27FC236}">
+                <a16:creationId xmlns:a16="http://schemas.microsoft.com/office/drawing/2014/main" id="{0CCD067A-F313-22E6-1938-30CC9BBFE7A4}"/>
+              </a:ext>
+            </a:extLst>
+          </p:cNvPr>
+          <p:cNvPicPr>
+            <a:picLocks noChangeAspect="1"/>
+          </p:cNvPicPr>
+          <p:nvPr/>
+        </p:nvPicPr>
+        <p:blipFill>
+          <a:blip r:embed="rId3">
+            <a:extLst>
+              <a:ext uri="{28A0092B-C50C-407E-A947-70E740481C1C}">
+                <a14:useLocalDpi xmlns:a14="http://schemas.microsoft.com/office/drawing/2010/main" val="0"/>
+              </a:ext>
+            </a:extLst>
+          </a:blip>
+          <a:stretch>
+            <a:fillRect/>
+          </a:stretch>
+        </p:blipFill>
+        <p:spPr>
+          <a:xfrm>
+            <a:off x="6296025" y="3204840"/>
+            <a:ext cx="5515143" cy="3151510"/>
+          </a:xfrm>
+          <a:prstGeom prst="rect">
+            <a:avLst/>
+          </a:prstGeom>
+        </p:spPr>
+      </p:pic>
+      <p:sp>
+        <p:nvSpPr>
+          <p:cNvPr id="11" name="ZoneTexte 10">
+            <a:extLst>
+              <a:ext uri="{FF2B5EF4-FFF2-40B4-BE49-F238E27FC236}">
+                <a16:creationId xmlns:a16="http://schemas.microsoft.com/office/drawing/2014/main" id="{E9D1786F-2836-3F58-1055-8E1BABB98737}"/>
+              </a:ext>
+            </a:extLst>
+          </p:cNvPr>
+          <p:cNvSpPr txBox="1"/>
+          <p:nvPr/>
+        </p:nvSpPr>
+        <p:spPr>
+          <a:xfrm>
+            <a:off x="613029" y="1569686"/>
+            <a:ext cx="11365992" cy="1477328"/>
+          </a:xfrm>
+          <a:prstGeom prst="rect">
+            <a:avLst/>
+          </a:prstGeom>
+          <a:noFill/>
+        </p:spPr>
+        <p:txBody>
+          <a:bodyPr wrap="square" rtlCol="0">
+            <a:spAutoFit/>
+          </a:bodyPr>
+          <a:lstStyle/>
+          <a:p>
+            <a:r>
+              <a:rPr lang="fr-BE" b="1" dirty="0"/>
+              <a:t>Débit moyen selon taille des fichiers :</a:t>
+            </a:r>
+          </a:p>
+          <a:p>
+            <a:pPr marL="285750" indent="-285750">
+              <a:buFont typeface="Arial" panose="020B0604020202020204" pitchFamily="34" charset="0"/>
+              <a:buChar char="•"/>
+            </a:pPr>
+            <a:r>
+              <a:rPr lang="fr-BE" dirty="0"/>
+              <a:t>Similaire à celui avec notre serveur</a:t>
+            </a:r>
+          </a:p>
+          <a:p>
+            <a:r>
+              <a:rPr lang="fr-BE" b="1" dirty="0"/>
+              <a:t>Débit moyen selon taux de perte :</a:t>
+            </a:r>
+          </a:p>
+          <a:p>
+            <a:pPr marL="285750" indent="-285750">
+              <a:buFont typeface="Arial" panose="020B0604020202020204" pitchFamily="34" charset="0"/>
+              <a:buChar char="•"/>
+            </a:pPr>
+            <a:r>
+              <a:rPr lang="fr-BE" dirty="0"/>
+              <a:t>Haut débit moyen malgré 5 à 20% de pertes</a:t>
+            </a:r>
+          </a:p>
+          <a:p>
+            <a:pPr marL="285750" indent="-285750">
+              <a:buFont typeface="Arial" panose="020B0604020202020204" pitchFamily="34" charset="0"/>
+              <a:buChar char="•"/>
+            </a:pPr>
+            <a:r>
+              <a:rPr lang="fr-BE" dirty="0"/>
+              <a:t>Débit nulle à 30% de pertes</a:t>
+            </a:r>
+          </a:p>
+        </p:txBody>
+      </p:sp>
+    </p:spTree>
+    <p:extLst>
+      <p:ext uri="{BB962C8B-B14F-4D97-AF65-F5344CB8AC3E}">
+        <p14:creationId xmlns:p14="http://schemas.microsoft.com/office/powerpoint/2010/main" val="3386175126"/>
+      </p:ext>
+    </p:extLst>
+  </p:cSld>
+  <p:clrMapOvr>
+    <a:masterClrMapping/>
+  </p:clrMapOvr>
+</p:sld>
+</file>
+
+<file path=ppt/slides/slide15.xml><?xml version="1.0" encoding="utf-8"?>
+<p:sld xmlns:a="http://schemas.openxmlformats.org/drawingml/2006/main" xmlns:r="http://schemas.openxmlformats.org/officeDocument/2006/relationships" xmlns:p="http://schemas.openxmlformats.org/presentationml/2006/main">
+  <p:cSld>
+    <p:spTree>
+      <p:nvGrpSpPr>
+        <p:cNvPr id="1" name=""/>
+        <p:cNvGrpSpPr/>
+        <p:nvPr/>
+      </p:nvGrpSpPr>
+      <p:grpSpPr>
+        <a:xfrm>
+          <a:off x="0" y="0"/>
+          <a:ext cx="0" cy="0"/>
+          <a:chOff x="0" y="0"/>
+          <a:chExt cx="0" cy="0"/>
+        </a:xfrm>
+      </p:grpSpPr>
+      <p:sp>
+        <p:nvSpPr>
+          <p:cNvPr id="2" name="Titre 1">
+            <a:extLst>
+              <a:ext uri="{FF2B5EF4-FFF2-40B4-BE49-F238E27FC236}">
+                <a16:creationId xmlns:a16="http://schemas.microsoft.com/office/drawing/2014/main" id="{6D86D28D-9027-7ED2-5949-D151544A2E87}"/>
+              </a:ext>
+            </a:extLst>
+          </p:cNvPr>
+          <p:cNvSpPr>
+            <a:spLocks noGrp="1"/>
+          </p:cNvSpPr>
+          <p:nvPr>
+            <p:ph type="title"/>
+          </p:nvPr>
+        </p:nvSpPr>
+        <p:spPr/>
+        <p:txBody>
+          <a:bodyPr/>
+          <a:lstStyle/>
+          <a:p>
+            <a:r>
+              <a:rPr lang="fr-BE" dirty="0"/>
+              <a:t>Groupe 61 : serveur</a:t>
+            </a:r>
+          </a:p>
+        </p:txBody>
+      </p:sp>
+      <p:sp>
+        <p:nvSpPr>
+          <p:cNvPr id="4" name="Espace réservé du numéro de diapositive 3">
+            <a:extLst>
+              <a:ext uri="{FF2B5EF4-FFF2-40B4-BE49-F238E27FC236}">
+                <a16:creationId xmlns:a16="http://schemas.microsoft.com/office/drawing/2014/main" id="{BA3CB471-0A5B-C2DB-13AE-DE4DA2DEBA25}"/>
+              </a:ext>
+            </a:extLst>
+          </p:cNvPr>
+          <p:cNvSpPr>
+            <a:spLocks noGrp="1"/>
+          </p:cNvSpPr>
+          <p:nvPr>
+            <p:ph type="sldNum" sz="quarter" idx="12"/>
+          </p:nvPr>
+        </p:nvSpPr>
+        <p:spPr/>
+        <p:txBody>
+          <a:bodyPr/>
+          <a:lstStyle/>
+          <a:p>
+            <a:fld id="{6D78B8F9-767A-4546-9D20-2187B79FBE53}" type="slidenum">
+              <a:rPr lang="fr-BE" smtClean="0"/>
+              <a:t>15</a:t>
+            </a:fld>
+            <a:endParaRPr lang="fr-BE"/>
+          </a:p>
+        </p:txBody>
+      </p:sp>
+      <p:sp>
+        <p:nvSpPr>
+          <p:cNvPr id="9" name="ZoneTexte 8">
+            <a:extLst>
+              <a:ext uri="{FF2B5EF4-FFF2-40B4-BE49-F238E27FC236}">
+                <a16:creationId xmlns:a16="http://schemas.microsoft.com/office/drawing/2014/main" id="{8B14A3B3-1B28-03E6-6E0F-0B8DE24881C6}"/>
+              </a:ext>
+            </a:extLst>
+          </p:cNvPr>
+          <p:cNvSpPr txBox="1"/>
+          <p:nvPr/>
+        </p:nvSpPr>
+        <p:spPr>
+          <a:xfrm>
+            <a:off x="689259" y="1569264"/>
+            <a:ext cx="11365992" cy="1477328"/>
+          </a:xfrm>
+          <a:prstGeom prst="rect">
+            <a:avLst/>
+          </a:prstGeom>
+          <a:noFill/>
+        </p:spPr>
+        <p:txBody>
+          <a:bodyPr wrap="square" rtlCol="0">
+            <a:spAutoFit/>
+          </a:bodyPr>
+          <a:lstStyle/>
+          <a:p>
+            <a:r>
+              <a:rPr lang="fr-BE" b="1" dirty="0"/>
+              <a:t>Débit moyen selon taille des fichiers :</a:t>
+            </a:r>
+          </a:p>
+          <a:p>
+            <a:pPr marL="285750" indent="-285750">
+              <a:buFont typeface="Arial" panose="020B0604020202020204" pitchFamily="34" charset="0"/>
+              <a:buChar char="•"/>
+            </a:pPr>
+            <a:r>
+              <a:rPr lang="fr-BE" dirty="0"/>
+              <a:t>Plus de transfert au-delà de 2MB (problème du serveur dans la gestion des fichiers volumineux)</a:t>
+            </a:r>
+          </a:p>
+          <a:p>
+            <a:pPr marL="285750" indent="-285750">
+              <a:buFont typeface="Arial" panose="020B0604020202020204" pitchFamily="34" charset="0"/>
+              <a:buChar char="•"/>
+            </a:pPr>
+            <a:r>
+              <a:rPr lang="fr-BE" dirty="0"/>
+              <a:t>Baisse surprenante du débit de 50KB à 100KB</a:t>
+            </a:r>
+          </a:p>
+          <a:p>
+            <a:r>
+              <a:rPr lang="fr-BE" b="1" dirty="0"/>
+              <a:t>Débit moyen selon taux de perte :</a:t>
+            </a:r>
+          </a:p>
+          <a:p>
+            <a:pPr marL="285750" indent="-285750">
+              <a:buFont typeface="Arial" panose="020B0604020202020204" pitchFamily="34" charset="0"/>
+              <a:buChar char="•"/>
+            </a:pPr>
+            <a:r>
+              <a:rPr lang="fr-BE" dirty="0"/>
+              <a:t>Débit très élevé même avec nombreuses pertes (~20 KB à 30% de perte)</a:t>
+            </a:r>
+          </a:p>
+        </p:txBody>
+      </p:sp>
+      <p:pic>
+        <p:nvPicPr>
+          <p:cNvPr id="10" name="Espace réservé du contenu 9">
+            <a:extLst>
+              <a:ext uri="{FF2B5EF4-FFF2-40B4-BE49-F238E27FC236}">
+                <a16:creationId xmlns:a16="http://schemas.microsoft.com/office/drawing/2014/main" id="{BA483148-C22C-1BA5-F10C-7FC420D95233}"/>
+              </a:ext>
+            </a:extLst>
+          </p:cNvPr>
+          <p:cNvPicPr>
+            <a:picLocks noGrp="1" noChangeAspect="1"/>
+          </p:cNvPicPr>
+          <p:nvPr>
+            <p:ph idx="1"/>
+          </p:nvPr>
+        </p:nvPicPr>
+        <p:blipFill>
+          <a:blip r:embed="rId2">
+            <a:extLst>
+              <a:ext uri="{28A0092B-C50C-407E-A947-70E740481C1C}">
+                <a14:useLocalDpi xmlns:a14="http://schemas.microsoft.com/office/drawing/2010/main" val="0"/>
+              </a:ext>
+            </a:extLst>
+          </a:blip>
+          <a:stretch>
+            <a:fillRect/>
+          </a:stretch>
+        </p:blipFill>
+        <p:spPr>
+          <a:xfrm>
+            <a:off x="387576" y="3379176"/>
+            <a:ext cx="5882540" cy="2941271"/>
+          </a:xfrm>
+          <a:prstGeom prst="rect">
+            <a:avLst/>
+          </a:prstGeom>
+        </p:spPr>
+      </p:pic>
+      <p:pic>
+        <p:nvPicPr>
+          <p:cNvPr id="12" name="Image 11">
+            <a:extLst>
+              <a:ext uri="{FF2B5EF4-FFF2-40B4-BE49-F238E27FC236}">
+                <a16:creationId xmlns:a16="http://schemas.microsoft.com/office/drawing/2014/main" id="{3753373D-568F-4B94-A757-5420DD991844}"/>
+              </a:ext>
+            </a:extLst>
+          </p:cNvPr>
+          <p:cNvPicPr>
+            <a:picLocks noChangeAspect="1"/>
+          </p:cNvPicPr>
+          <p:nvPr/>
+        </p:nvPicPr>
+        <p:blipFill>
+          <a:blip r:embed="rId3">
+            <a:extLst>
+              <a:ext uri="{28A0092B-C50C-407E-A947-70E740481C1C}">
+                <a14:useLocalDpi xmlns:a14="http://schemas.microsoft.com/office/drawing/2010/main" val="0"/>
+              </a:ext>
+            </a:extLst>
+          </a:blip>
+          <a:stretch>
+            <a:fillRect/>
+          </a:stretch>
+        </p:blipFill>
+        <p:spPr>
+          <a:xfrm>
+            <a:off x="6372255" y="3343275"/>
+            <a:ext cx="5272880" cy="3013075"/>
+          </a:xfrm>
+          <a:prstGeom prst="rect">
+            <a:avLst/>
+          </a:prstGeom>
+        </p:spPr>
+      </p:pic>
+    </p:spTree>
+    <p:extLst>
+      <p:ext uri="{BB962C8B-B14F-4D97-AF65-F5344CB8AC3E}">
+        <p14:creationId xmlns:p14="http://schemas.microsoft.com/office/powerpoint/2010/main" val="843684112"/>
+      </p:ext>
+    </p:extLst>
+  </p:cSld>
+  <p:clrMapOvr>
+    <a:masterClrMapping/>
+  </p:clrMapOvr>
+</p:sld>
+</file>
+
 <file path=ppt/slides/slide2.xml><?xml version="1.0" encoding="utf-8"?>
 <p:sld xmlns:a="http://schemas.openxmlformats.org/drawingml/2006/main" xmlns:r="http://schemas.openxmlformats.org/officeDocument/2006/relationships" xmlns:p="http://schemas.openxmlformats.org/presentationml/2006/main">
   <p:cSld>
@@ -4757,20 +5789,20 @@
         </p:nvSpPr>
         <p:spPr/>
         <p:txBody>
-          <a:bodyPr>
+          <a:bodyPr vert="horz" lIns="91440" tIns="45720" rIns="91440" bIns="45720" rtlCol="0" anchor="t">
             <a:normAutofit/>
           </a:bodyPr>
           <a:lstStyle/>
           <a:p>
             <a:r>
-              <a:rPr lang="fr-BE" dirty="0"/>
-              <a:t>Mesures : débit (bytes/sec), temps de transfert, nombre de retransmissions</a:t>
-            </a:r>
-          </a:p>
-          <a:p>
-            <a:r>
-              <a:rPr lang="fr-BE" dirty="0"/>
-              <a:t>Scénarios : réseau parfait, pertes, fichiers de tailles variés</a:t>
+              <a:rPr lang="fr-BE"/>
+              <a:t>Mesures : débit (bytes/sec) vs temps de transfert</a:t>
+            </a:r>
+          </a:p>
+          <a:p>
+            <a:r>
+              <a:rPr lang="fr-BE"/>
+              <a:t>Scénarios : réseau parfait, fichiers de tailles variés, pertes</a:t>
             </a:r>
           </a:p>
           <a:p>
@@ -4849,6 +5881,14 @@
 <file path=ppt/slides/slide8.xml><?xml version="1.0" encoding="utf-8"?>
 <p:sld xmlns:a="http://schemas.openxmlformats.org/drawingml/2006/main" xmlns:r="http://schemas.openxmlformats.org/officeDocument/2006/relationships" xmlns:p="http://schemas.openxmlformats.org/presentationml/2006/main">
   <p:cSld>
+    <p:bg>
+      <p:bgPr>
+        <a:solidFill>
+          <a:schemeClr val="bg1"/>
+        </a:solidFill>
+        <a:effectLst/>
+      </p:bgPr>
+    </p:bg>
     <p:spTree>
       <p:nvGrpSpPr>
         <p:cNvPr id="1" name=""/>
@@ -4863,1188 +5903,163 @@
           <a:chExt cx="0" cy="0"/>
         </a:xfrm>
       </p:grpSpPr>
-      <p:sp>
-        <p:nvSpPr>
-          <p:cNvPr id="3" name="Espace réservé du contenu 2">
-            <a:extLst>
-              <a:ext uri="{FF2B5EF4-FFF2-40B4-BE49-F238E27FC236}">
-                <a16:creationId xmlns:a16="http://schemas.microsoft.com/office/drawing/2014/main" id="{B3594255-E7EC-3F1F-DEE5-9B856BC9339B}"/>
-              </a:ext>
-            </a:extLst>
-          </p:cNvPr>
-          <p:cNvSpPr>
-            <a:spLocks noGrp="1"/>
-          </p:cNvSpPr>
-          <p:nvPr>
-            <p:ph idx="1"/>
-          </p:nvPr>
-        </p:nvSpPr>
+      <p:pic>
+        <p:nvPicPr>
+          <p:cNvPr id="17" name="Picture 16">
+            <a:extLst>
+              <a:ext uri="{FF2B5EF4-FFF2-40B4-BE49-F238E27FC236}">
+                <a16:creationId xmlns:a16="http://schemas.microsoft.com/office/drawing/2014/main" id="{29D71149-A580-7FA6-0B06-E981B7D78A39}"/>
+              </a:ext>
+            </a:extLst>
+          </p:cNvPr>
+          <p:cNvPicPr>
+            <a:picLocks noChangeAspect="1"/>
+          </p:cNvPicPr>
+          <p:nvPr/>
+        </p:nvPicPr>
+        <p:blipFill>
+          <a:blip r:embed="rId2"/>
+          <a:stretch>
+            <a:fillRect/>
+          </a:stretch>
+        </p:blipFill>
         <p:spPr>
           <a:xfrm>
-            <a:off x="838200" y="0"/>
-            <a:ext cx="10515600" cy="6766560"/>
+            <a:off x="88900" y="3535362"/>
+            <a:ext cx="6007100" cy="3003550"/>
+          </a:xfrm>
+          <a:prstGeom prst="rect">
+            <a:avLst/>
+          </a:prstGeom>
+        </p:spPr>
+      </p:pic>
+      <p:pic>
+        <p:nvPicPr>
+          <p:cNvPr id="16" name="Content Placeholder 15">
+            <a:extLst>
+              <a:ext uri="{FF2B5EF4-FFF2-40B4-BE49-F238E27FC236}">
+                <a16:creationId xmlns:a16="http://schemas.microsoft.com/office/drawing/2014/main" id="{02387920-2DD5-1701-504C-B8EABD92455C}"/>
+              </a:ext>
+            </a:extLst>
+          </p:cNvPr>
+          <p:cNvPicPr>
+            <a:picLocks noChangeAspect="1"/>
+          </p:cNvPicPr>
+          <p:nvPr/>
+        </p:nvPicPr>
+        <p:blipFill>
+          <a:blip r:embed="rId3"/>
+          <a:stretch>
+            <a:fillRect/>
+          </a:stretch>
+        </p:blipFill>
+        <p:spPr>
+          <a:xfrm>
+            <a:off x="6301200" y="3411537"/>
+            <a:ext cx="5472906" cy="3127375"/>
+          </a:xfrm>
+          <a:prstGeom prst="rect">
+            <a:avLst/>
+          </a:prstGeom>
+        </p:spPr>
+      </p:pic>
+      <p:sp>
+        <p:nvSpPr>
+          <p:cNvPr id="13" name="Espace réservé du numéro de diapositive 12">
+            <a:extLst>
+              <a:ext uri="{FF2B5EF4-FFF2-40B4-BE49-F238E27FC236}">
+                <a16:creationId xmlns:a16="http://schemas.microsoft.com/office/drawing/2014/main" id="{1DA15EBB-DA5D-6E92-320F-C1FDE0560A4C}"/>
+              </a:ext>
+            </a:extLst>
+          </p:cNvPr>
+          <p:cNvSpPr>
+            <a:spLocks noGrp="1"/>
+          </p:cNvSpPr>
+          <p:nvPr>
+            <p:ph type="sldNum" sz="quarter" idx="12"/>
+          </p:nvPr>
+        </p:nvSpPr>
+        <p:spPr>
+          <a:xfrm>
+            <a:off x="8610600" y="6356350"/>
+            <a:ext cx="2743200" cy="365125"/>
           </a:xfrm>
         </p:spPr>
         <p:txBody>
-          <a:bodyPr/>
-          <a:lstStyle/>
-          <a:p>
-            <a:pPr marL="0" indent="0">
-              <a:buNone/>
+          <a:bodyPr vert="horz" lIns="91440" tIns="45720" rIns="91440" bIns="45720" rtlCol="0" anchor="ctr">
+            <a:normAutofit/>
+          </a:bodyPr>
+          <a:lstStyle/>
+          <a:p>
+            <a:pPr>
+              <a:spcAft>
+                <a:spcPts val="600"/>
+              </a:spcAft>
             </a:pPr>
+            <a:fld id="{6D78B8F9-767A-4546-9D20-2187B79FBE53}" type="slidenum">
+              <a:rPr lang="en-US">
+                <a:solidFill>
+                  <a:schemeClr val="tx1">
+                    <a:tint val="75000"/>
+                  </a:schemeClr>
+                </a:solidFill>
+              </a:rPr>
+              <a:pPr>
+                <a:spcAft>
+                  <a:spcPts val="600"/>
+                </a:spcAft>
+              </a:pPr>
+              <a:t>8</a:t>
+            </a:fld>
+            <a:endParaRPr lang="en-US">
+              <a:solidFill>
+                <a:schemeClr val="tx1">
+                  <a:tint val="75000"/>
+                </a:schemeClr>
+              </a:solidFill>
+            </a:endParaRPr>
+          </a:p>
+        </p:txBody>
+      </p:sp>
+      <p:sp>
+        <p:nvSpPr>
+          <p:cNvPr id="5" name="Titre 1">
+            <a:extLst>
+              <a:ext uri="{FF2B5EF4-FFF2-40B4-BE49-F238E27FC236}">
+                <a16:creationId xmlns:a16="http://schemas.microsoft.com/office/drawing/2014/main" id="{0B01ED6C-4183-0ADD-30F4-1243706970EE}"/>
+              </a:ext>
+            </a:extLst>
+          </p:cNvPr>
+          <p:cNvSpPr>
+            <a:spLocks noGrp="1"/>
+          </p:cNvSpPr>
+          <p:nvPr>
+            <p:ph type="title"/>
+          </p:nvPr>
+        </p:nvSpPr>
+        <p:spPr>
+          <a:xfrm>
+            <a:off x="838200" y="365125"/>
+            <a:ext cx="10515600" cy="1325563"/>
+          </a:xfrm>
+        </p:spPr>
+        <p:txBody>
+          <a:bodyPr/>
+          <a:lstStyle/>
+          <a:p>
             <a:r>
               <a:rPr lang="fr-BE" dirty="0"/>
-              <a:t> </a:t>
-            </a:r>
-          </a:p>
-        </p:txBody>
-      </p:sp>
-      <p:graphicFrame>
-        <p:nvGraphicFramePr>
-          <p:cNvPr id="4" name="Tableau 3">
-            <a:extLst>
-              <a:ext uri="{FF2B5EF4-FFF2-40B4-BE49-F238E27FC236}">
-                <a16:creationId xmlns:a16="http://schemas.microsoft.com/office/drawing/2014/main" id="{A3FA5860-7BE6-9223-B071-F70F567C7CBF}"/>
-              </a:ext>
-            </a:extLst>
-          </p:cNvPr>
-          <p:cNvGraphicFramePr>
-            <a:graphicFrameLocks noGrp="1"/>
-          </p:cNvGraphicFramePr>
-          <p:nvPr>
-            <p:extLst>
-              <p:ext uri="{D42A27DB-BD31-4B8C-83A1-F6EECF244321}">
-                <p14:modId xmlns:p14="http://schemas.microsoft.com/office/powerpoint/2010/main" val="2237111868"/>
-              </p:ext>
-            </p:extLst>
-          </p:nvPr>
-        </p:nvGraphicFramePr>
-        <p:xfrm>
-          <a:off x="838200" y="561364"/>
-          <a:ext cx="7464552" cy="1463040"/>
-        </p:xfrm>
-        <a:graphic>
-          <a:graphicData uri="http://schemas.openxmlformats.org/drawingml/2006/table">
-            <a:tbl>
-              <a:tblPr/>
-              <a:tblGrid>
-                <a:gridCol w="1866138">
-                  <a:extLst>
-                    <a:ext uri="{9D8B030D-6E8A-4147-A177-3AD203B41FA5}">
-                      <a16:colId xmlns:a16="http://schemas.microsoft.com/office/drawing/2014/main" val="2205102735"/>
-                    </a:ext>
-                  </a:extLst>
-                </a:gridCol>
-                <a:gridCol w="1866138">
-                  <a:extLst>
-                    <a:ext uri="{9D8B030D-6E8A-4147-A177-3AD203B41FA5}">
-                      <a16:colId xmlns:a16="http://schemas.microsoft.com/office/drawing/2014/main" val="1732646216"/>
-                    </a:ext>
-                  </a:extLst>
-                </a:gridCol>
-                <a:gridCol w="1866138">
-                  <a:extLst>
-                    <a:ext uri="{9D8B030D-6E8A-4147-A177-3AD203B41FA5}">
-                      <a16:colId xmlns:a16="http://schemas.microsoft.com/office/drawing/2014/main" val="797674455"/>
-                    </a:ext>
-                  </a:extLst>
-                </a:gridCol>
-                <a:gridCol w="1866138">
-                  <a:extLst>
-                    <a:ext uri="{9D8B030D-6E8A-4147-A177-3AD203B41FA5}">
-                      <a16:colId xmlns:a16="http://schemas.microsoft.com/office/drawing/2014/main" val="1703387754"/>
-                    </a:ext>
-                  </a:extLst>
-                </a:gridCol>
-              </a:tblGrid>
-              <a:tr h="0">
-                <a:tc>
-                  <a:txBody>
-                    <a:bodyPr/>
-                    <a:lstStyle/>
-                    <a:p>
-                      <a:pPr>
-                        <a:buNone/>
-                      </a:pPr>
-                      <a:r>
-                        <a:rPr lang="fr-BE" dirty="0"/>
-                        <a:t>Taille fichier</a:t>
-                      </a:r>
-                    </a:p>
-                  </a:txBody>
-                  <a:tcPr anchor="ctr">
-                    <a:lnL>
-                      <a:noFill/>
-                    </a:lnL>
-                    <a:lnR>
-                      <a:noFill/>
-                    </a:lnR>
-                    <a:lnT>
-                      <a:noFill/>
-                    </a:lnT>
-                    <a:lnB>
-                      <a:noFill/>
-                    </a:lnB>
-                    <a:noFill/>
-                  </a:tcPr>
-                </a:tc>
-                <a:tc>
-                  <a:txBody>
-                    <a:bodyPr/>
-                    <a:lstStyle/>
-                    <a:p>
-                      <a:pPr>
-                        <a:buNone/>
-                      </a:pPr>
-                      <a:r>
-                        <a:rPr lang="fr-BE"/>
-                        <a:t>Temps</a:t>
-                      </a:r>
-                    </a:p>
-                  </a:txBody>
-                  <a:tcPr anchor="ctr">
-                    <a:lnL>
-                      <a:noFill/>
-                    </a:lnL>
-                    <a:lnR>
-                      <a:noFill/>
-                    </a:lnR>
-                    <a:lnT>
-                      <a:noFill/>
-                    </a:lnT>
-                    <a:lnB>
-                      <a:noFill/>
-                    </a:lnB>
-                    <a:noFill/>
-                  </a:tcPr>
-                </a:tc>
-                <a:tc>
-                  <a:txBody>
-                    <a:bodyPr/>
-                    <a:lstStyle/>
-                    <a:p>
-                      <a:pPr>
-                        <a:buNone/>
-                      </a:pPr>
-                      <a:r>
-                        <a:rPr lang="fr-BE"/>
-                        <a:t>Débit</a:t>
-                      </a:r>
-                    </a:p>
-                  </a:txBody>
-                  <a:tcPr anchor="ctr">
-                    <a:lnL>
-                      <a:noFill/>
-                    </a:lnL>
-                    <a:lnR>
-                      <a:noFill/>
-                    </a:lnR>
-                    <a:lnT>
-                      <a:noFill/>
-                    </a:lnT>
-                    <a:lnB>
-                      <a:noFill/>
-                    </a:lnB>
-                    <a:noFill/>
-                  </a:tcPr>
-                </a:tc>
-                <a:tc>
-                  <a:txBody>
-                    <a:bodyPr/>
-                    <a:lstStyle/>
-                    <a:p>
-                      <a:pPr>
-                        <a:buNone/>
-                      </a:pPr>
-                      <a:r>
-                        <a:rPr lang="fr-BE"/>
-                        <a:t>Retransmissions</a:t>
-                      </a:r>
-                    </a:p>
-                  </a:txBody>
-                  <a:tcPr anchor="ctr">
-                    <a:lnL>
-                      <a:noFill/>
-                    </a:lnL>
-                    <a:lnR>
-                      <a:noFill/>
-                    </a:lnR>
-                    <a:lnT>
-                      <a:noFill/>
-                    </a:lnT>
-                    <a:lnB>
-                      <a:noFill/>
-                    </a:lnB>
-                    <a:noFill/>
-                  </a:tcPr>
-                </a:tc>
-                <a:extLst>
-                  <a:ext uri="{0D108BD9-81ED-4DB2-BD59-A6C34878D82A}">
-                    <a16:rowId xmlns:a16="http://schemas.microsoft.com/office/drawing/2014/main" val="104180528"/>
-                  </a:ext>
-                </a:extLst>
-              </a:tr>
-              <a:tr h="0">
-                <a:tc>
-                  <a:txBody>
-                    <a:bodyPr/>
-                    <a:lstStyle/>
-                    <a:p>
-                      <a:pPr>
-                        <a:buNone/>
-                      </a:pPr>
-                      <a:r>
-                        <a:rPr lang="fr-BE"/>
-                        <a:t>500 B</a:t>
-                      </a:r>
-                    </a:p>
-                  </a:txBody>
-                  <a:tcPr anchor="ctr">
-                    <a:lnL>
-                      <a:noFill/>
-                    </a:lnL>
-                    <a:lnR>
-                      <a:noFill/>
-                    </a:lnR>
-                    <a:lnT>
-                      <a:noFill/>
-                    </a:lnT>
-                    <a:lnB>
-                      <a:noFill/>
-                    </a:lnB>
-                    <a:noFill/>
-                  </a:tcPr>
-                </a:tc>
-                <a:tc>
-                  <a:txBody>
-                    <a:bodyPr/>
-                    <a:lstStyle/>
-                    <a:p>
-                      <a:pPr>
-                        <a:buNone/>
-                      </a:pPr>
-                      <a:r>
-                        <a:rPr lang="fr-BE" dirty="0"/>
-                        <a:t>6 ms</a:t>
-                      </a:r>
-                    </a:p>
-                  </a:txBody>
-                  <a:tcPr anchor="ctr">
-                    <a:lnL>
-                      <a:noFill/>
-                    </a:lnL>
-                    <a:lnR>
-                      <a:noFill/>
-                    </a:lnR>
-                    <a:lnT>
-                      <a:noFill/>
-                    </a:lnT>
-                    <a:lnB>
-                      <a:noFill/>
-                    </a:lnB>
-                    <a:noFill/>
-                  </a:tcPr>
-                </a:tc>
-                <a:tc>
-                  <a:txBody>
-                    <a:bodyPr/>
-                    <a:lstStyle/>
-                    <a:p>
-                      <a:pPr>
-                        <a:buNone/>
-                      </a:pPr>
-                      <a:r>
-                        <a:rPr lang="fr-BE" dirty="0"/>
-                        <a:t>98 KB/s</a:t>
-                      </a:r>
-                    </a:p>
-                  </a:txBody>
-                  <a:tcPr anchor="ctr">
-                    <a:lnL>
-                      <a:noFill/>
-                    </a:lnL>
-                    <a:lnR>
-                      <a:noFill/>
-                    </a:lnR>
-                    <a:lnT>
-                      <a:noFill/>
-                    </a:lnT>
-                    <a:lnB>
-                      <a:noFill/>
-                    </a:lnB>
-                    <a:noFill/>
-                  </a:tcPr>
-                </a:tc>
-                <a:tc>
-                  <a:txBody>
-                    <a:bodyPr/>
-                    <a:lstStyle/>
-                    <a:p>
-                      <a:pPr>
-                        <a:buNone/>
-                      </a:pPr>
-                      <a:r>
-                        <a:rPr lang="fr-BE"/>
-                        <a:t>0</a:t>
-                      </a:r>
-                    </a:p>
-                  </a:txBody>
-                  <a:tcPr anchor="ctr">
-                    <a:lnL>
-                      <a:noFill/>
-                    </a:lnL>
-                    <a:lnR>
-                      <a:noFill/>
-                    </a:lnR>
-                    <a:lnT>
-                      <a:noFill/>
-                    </a:lnT>
-                    <a:lnB>
-                      <a:noFill/>
-                    </a:lnB>
-                    <a:noFill/>
-                  </a:tcPr>
-                </a:tc>
-                <a:extLst>
-                  <a:ext uri="{0D108BD9-81ED-4DB2-BD59-A6C34878D82A}">
-                    <a16:rowId xmlns:a16="http://schemas.microsoft.com/office/drawing/2014/main" val="206193627"/>
-                  </a:ext>
-                </a:extLst>
-              </a:tr>
-              <a:tr h="0">
-                <a:tc>
-                  <a:txBody>
-                    <a:bodyPr/>
-                    <a:lstStyle/>
-                    <a:p>
-                      <a:pPr>
-                        <a:buNone/>
-                      </a:pPr>
-                      <a:r>
-                        <a:rPr lang="fr-BE"/>
-                        <a:t>5 KB</a:t>
-                      </a:r>
-                    </a:p>
-                  </a:txBody>
-                  <a:tcPr anchor="ctr">
-                    <a:lnL>
-                      <a:noFill/>
-                    </a:lnL>
-                    <a:lnR>
-                      <a:noFill/>
-                    </a:lnR>
-                    <a:lnT>
-                      <a:noFill/>
-                    </a:lnT>
-                    <a:lnB>
-                      <a:noFill/>
-                    </a:lnB>
-                    <a:noFill/>
-                  </a:tcPr>
-                </a:tc>
-                <a:tc>
-                  <a:txBody>
-                    <a:bodyPr/>
-                    <a:lstStyle/>
-                    <a:p>
-                      <a:pPr>
-                        <a:buNone/>
-                      </a:pPr>
-                      <a:r>
-                        <a:rPr lang="fr-BE" dirty="0"/>
-                        <a:t>17 ms</a:t>
-                      </a:r>
-                    </a:p>
-                  </a:txBody>
-                  <a:tcPr anchor="ctr">
-                    <a:lnL>
-                      <a:noFill/>
-                    </a:lnL>
-                    <a:lnR>
-                      <a:noFill/>
-                    </a:lnR>
-                    <a:lnT>
-                      <a:noFill/>
-                    </a:lnT>
-                    <a:lnB>
-                      <a:noFill/>
-                    </a:lnB>
-                    <a:noFill/>
-                  </a:tcPr>
-                </a:tc>
-                <a:tc>
-                  <a:txBody>
-                    <a:bodyPr/>
-                    <a:lstStyle/>
-                    <a:p>
-                      <a:pPr>
-                        <a:buNone/>
-                      </a:pPr>
-                      <a:r>
-                        <a:rPr lang="fr-BE" dirty="0"/>
-                        <a:t>324 KB/s</a:t>
-                      </a:r>
-                    </a:p>
-                  </a:txBody>
-                  <a:tcPr anchor="ctr">
-                    <a:lnL>
-                      <a:noFill/>
-                    </a:lnL>
-                    <a:lnR>
-                      <a:noFill/>
-                    </a:lnR>
-                    <a:lnT>
-                      <a:noFill/>
-                    </a:lnT>
-                    <a:lnB>
-                      <a:noFill/>
-                    </a:lnB>
-                    <a:noFill/>
-                  </a:tcPr>
-                </a:tc>
-                <a:tc>
-                  <a:txBody>
-                    <a:bodyPr/>
-                    <a:lstStyle/>
-                    <a:p>
-                      <a:pPr>
-                        <a:buNone/>
-                      </a:pPr>
-                      <a:r>
-                        <a:rPr lang="fr-BE"/>
-                        <a:t>0</a:t>
-                      </a:r>
-                    </a:p>
-                  </a:txBody>
-                  <a:tcPr anchor="ctr">
-                    <a:lnL>
-                      <a:noFill/>
-                    </a:lnL>
-                    <a:lnR>
-                      <a:noFill/>
-                    </a:lnR>
-                    <a:lnT>
-                      <a:noFill/>
-                    </a:lnT>
-                    <a:lnB>
-                      <a:noFill/>
-                    </a:lnB>
-                    <a:noFill/>
-                  </a:tcPr>
-                </a:tc>
-                <a:extLst>
-                  <a:ext uri="{0D108BD9-81ED-4DB2-BD59-A6C34878D82A}">
-                    <a16:rowId xmlns:a16="http://schemas.microsoft.com/office/drawing/2014/main" val="2301649309"/>
-                  </a:ext>
-                </a:extLst>
-              </a:tr>
-              <a:tr h="0">
-                <a:tc>
-                  <a:txBody>
-                    <a:bodyPr/>
-                    <a:lstStyle/>
-                    <a:p>
-                      <a:pPr>
-                        <a:buNone/>
-                      </a:pPr>
-                      <a:r>
-                        <a:rPr lang="fr-BE"/>
-                        <a:t>50 KB</a:t>
-                      </a:r>
-                    </a:p>
-                  </a:txBody>
-                  <a:tcPr anchor="ctr">
-                    <a:lnL>
-                      <a:noFill/>
-                    </a:lnL>
-                    <a:lnR>
-                      <a:noFill/>
-                    </a:lnR>
-                    <a:lnT>
-                      <a:noFill/>
-                    </a:lnT>
-                    <a:lnB>
-                      <a:noFill/>
-                    </a:lnB>
-                    <a:noFill/>
-                  </a:tcPr>
-                </a:tc>
-                <a:tc>
-                  <a:txBody>
-                    <a:bodyPr/>
-                    <a:lstStyle/>
-                    <a:p>
-                      <a:pPr>
-                        <a:buNone/>
-                      </a:pPr>
-                      <a:r>
-                        <a:rPr lang="fr-BE" dirty="0"/>
-                        <a:t>85 ms</a:t>
-                      </a:r>
-                    </a:p>
-                  </a:txBody>
-                  <a:tcPr anchor="ctr">
-                    <a:lnL>
-                      <a:noFill/>
-                    </a:lnL>
-                    <a:lnR>
-                      <a:noFill/>
-                    </a:lnR>
-                    <a:lnT>
-                      <a:noFill/>
-                    </a:lnT>
-                    <a:lnB>
-                      <a:noFill/>
-                    </a:lnB>
-                    <a:noFill/>
-                  </a:tcPr>
-                </a:tc>
-                <a:tc>
-                  <a:txBody>
-                    <a:bodyPr/>
-                    <a:lstStyle/>
-                    <a:p>
-                      <a:pPr>
-                        <a:buNone/>
-                      </a:pPr>
-                      <a:r>
-                        <a:rPr lang="fr-BE" dirty="0"/>
-                        <a:t>619 KB/s</a:t>
-                      </a:r>
-                    </a:p>
-                  </a:txBody>
-                  <a:tcPr anchor="ctr">
-                    <a:lnL>
-                      <a:noFill/>
-                    </a:lnL>
-                    <a:lnR>
-                      <a:noFill/>
-                    </a:lnR>
-                    <a:lnT>
-                      <a:noFill/>
-                    </a:lnT>
-                    <a:lnB>
-                      <a:noFill/>
-                    </a:lnB>
-                    <a:noFill/>
-                  </a:tcPr>
-                </a:tc>
-                <a:tc>
-                  <a:txBody>
-                    <a:bodyPr/>
-                    <a:lstStyle/>
-                    <a:p>
-                      <a:pPr>
-                        <a:buNone/>
-                      </a:pPr>
-                      <a:r>
-                        <a:rPr lang="fr-BE" dirty="0"/>
-                        <a:t>0</a:t>
-                      </a:r>
-                    </a:p>
-                  </a:txBody>
-                  <a:tcPr anchor="ctr">
-                    <a:lnL>
-                      <a:noFill/>
-                    </a:lnL>
-                    <a:lnR>
-                      <a:noFill/>
-                    </a:lnR>
-                    <a:lnT>
-                      <a:noFill/>
-                    </a:lnT>
-                    <a:lnB>
-                      <a:noFill/>
-                    </a:lnB>
-                    <a:noFill/>
-                  </a:tcPr>
-                </a:tc>
-                <a:extLst>
-                  <a:ext uri="{0D108BD9-81ED-4DB2-BD59-A6C34878D82A}">
-                    <a16:rowId xmlns:a16="http://schemas.microsoft.com/office/drawing/2014/main" val="4152128043"/>
-                  </a:ext>
-                </a:extLst>
-              </a:tr>
-            </a:tbl>
-          </a:graphicData>
-        </a:graphic>
-      </p:graphicFrame>
-      <p:graphicFrame>
-        <p:nvGraphicFramePr>
-          <p:cNvPr id="7" name="Tableau 6">
-            <a:extLst>
-              <a:ext uri="{FF2B5EF4-FFF2-40B4-BE49-F238E27FC236}">
-                <a16:creationId xmlns:a16="http://schemas.microsoft.com/office/drawing/2014/main" id="{70892891-7F5D-F2F3-345B-E0F52702AB06}"/>
-              </a:ext>
-            </a:extLst>
-          </p:cNvPr>
-          <p:cNvGraphicFramePr>
-            <a:graphicFrameLocks noGrp="1"/>
-          </p:cNvGraphicFramePr>
-          <p:nvPr>
-            <p:extLst>
-              <p:ext uri="{D42A27DB-BD31-4B8C-83A1-F6EECF244321}">
-                <p14:modId xmlns:p14="http://schemas.microsoft.com/office/powerpoint/2010/main" val="962946953"/>
-              </p:ext>
-            </p:extLst>
-          </p:nvPr>
-        </p:nvGraphicFramePr>
-        <p:xfrm>
-          <a:off x="838200" y="2697480"/>
-          <a:ext cx="7546848" cy="1463040"/>
-        </p:xfrm>
-        <a:graphic>
-          <a:graphicData uri="http://schemas.openxmlformats.org/drawingml/2006/table">
-            <a:tbl>
-              <a:tblPr/>
-              <a:tblGrid>
-                <a:gridCol w="1886712">
-                  <a:extLst>
-                    <a:ext uri="{9D8B030D-6E8A-4147-A177-3AD203B41FA5}">
-                      <a16:colId xmlns:a16="http://schemas.microsoft.com/office/drawing/2014/main" val="4176000407"/>
-                    </a:ext>
-                  </a:extLst>
-                </a:gridCol>
-                <a:gridCol w="1886712">
-                  <a:extLst>
-                    <a:ext uri="{9D8B030D-6E8A-4147-A177-3AD203B41FA5}">
-                      <a16:colId xmlns:a16="http://schemas.microsoft.com/office/drawing/2014/main" val="890025117"/>
-                    </a:ext>
-                  </a:extLst>
-                </a:gridCol>
-                <a:gridCol w="1886712">
-                  <a:extLst>
-                    <a:ext uri="{9D8B030D-6E8A-4147-A177-3AD203B41FA5}">
-                      <a16:colId xmlns:a16="http://schemas.microsoft.com/office/drawing/2014/main" val="2112727141"/>
-                    </a:ext>
-                  </a:extLst>
-                </a:gridCol>
-                <a:gridCol w="1886712">
-                  <a:extLst>
-                    <a:ext uri="{9D8B030D-6E8A-4147-A177-3AD203B41FA5}">
-                      <a16:colId xmlns:a16="http://schemas.microsoft.com/office/drawing/2014/main" val="3296924093"/>
-                    </a:ext>
-                  </a:extLst>
-                </a:gridCol>
-              </a:tblGrid>
-              <a:tr h="0">
-                <a:tc>
-                  <a:txBody>
-                    <a:bodyPr/>
-                    <a:lstStyle/>
-                    <a:p>
-                      <a:pPr>
-                        <a:buNone/>
-                      </a:pPr>
-                      <a:r>
-                        <a:rPr lang="fr-BE"/>
-                        <a:t>Taille fichier</a:t>
-                      </a:r>
-                    </a:p>
-                  </a:txBody>
-                  <a:tcPr anchor="ctr">
-                    <a:lnL>
-                      <a:noFill/>
-                    </a:lnL>
-                    <a:lnR>
-                      <a:noFill/>
-                    </a:lnR>
-                    <a:lnT>
-                      <a:noFill/>
-                    </a:lnT>
-                    <a:lnB>
-                      <a:noFill/>
-                    </a:lnB>
-                    <a:noFill/>
-                  </a:tcPr>
-                </a:tc>
-                <a:tc>
-                  <a:txBody>
-                    <a:bodyPr/>
-                    <a:lstStyle/>
-                    <a:p>
-                      <a:pPr>
-                        <a:buNone/>
-                      </a:pPr>
-                      <a:r>
-                        <a:rPr lang="fr-BE"/>
-                        <a:t>Temps</a:t>
-                      </a:r>
-                    </a:p>
-                  </a:txBody>
-                  <a:tcPr anchor="ctr">
-                    <a:lnL>
-                      <a:noFill/>
-                    </a:lnL>
-                    <a:lnR>
-                      <a:noFill/>
-                    </a:lnR>
-                    <a:lnT>
-                      <a:noFill/>
-                    </a:lnT>
-                    <a:lnB>
-                      <a:noFill/>
-                    </a:lnB>
-                    <a:noFill/>
-                  </a:tcPr>
-                </a:tc>
-                <a:tc>
-                  <a:txBody>
-                    <a:bodyPr/>
-                    <a:lstStyle/>
-                    <a:p>
-                      <a:pPr>
-                        <a:buNone/>
-                      </a:pPr>
-                      <a:r>
-                        <a:rPr lang="fr-BE"/>
-                        <a:t>Débit</a:t>
-                      </a:r>
-                    </a:p>
-                  </a:txBody>
-                  <a:tcPr anchor="ctr">
-                    <a:lnL>
-                      <a:noFill/>
-                    </a:lnL>
-                    <a:lnR>
-                      <a:noFill/>
-                    </a:lnR>
-                    <a:lnT>
-                      <a:noFill/>
-                    </a:lnT>
-                    <a:lnB>
-                      <a:noFill/>
-                    </a:lnB>
-                    <a:noFill/>
-                  </a:tcPr>
-                </a:tc>
-                <a:tc>
-                  <a:txBody>
-                    <a:bodyPr/>
-                    <a:lstStyle/>
-                    <a:p>
-                      <a:pPr>
-                        <a:buNone/>
-                      </a:pPr>
-                      <a:r>
-                        <a:rPr lang="fr-BE"/>
-                        <a:t>Retransmissions</a:t>
-                      </a:r>
-                    </a:p>
-                  </a:txBody>
-                  <a:tcPr anchor="ctr">
-                    <a:lnL>
-                      <a:noFill/>
-                    </a:lnL>
-                    <a:lnR>
-                      <a:noFill/>
-                    </a:lnR>
-                    <a:lnT>
-                      <a:noFill/>
-                    </a:lnT>
-                    <a:lnB>
-                      <a:noFill/>
-                    </a:lnB>
-                    <a:noFill/>
-                  </a:tcPr>
-                </a:tc>
-                <a:extLst>
-                  <a:ext uri="{0D108BD9-81ED-4DB2-BD59-A6C34878D82A}">
-                    <a16:rowId xmlns:a16="http://schemas.microsoft.com/office/drawing/2014/main" val="1181159754"/>
-                  </a:ext>
-                </a:extLst>
-              </a:tr>
-              <a:tr h="0">
-                <a:tc>
-                  <a:txBody>
-                    <a:bodyPr/>
-                    <a:lstStyle/>
-                    <a:p>
-                      <a:pPr>
-                        <a:buNone/>
-                      </a:pPr>
-                      <a:r>
-                        <a:rPr lang="fr-BE"/>
-                        <a:t>500 B</a:t>
-                      </a:r>
-                    </a:p>
-                  </a:txBody>
-                  <a:tcPr anchor="ctr">
-                    <a:lnL>
-                      <a:noFill/>
-                    </a:lnL>
-                    <a:lnR>
-                      <a:noFill/>
-                    </a:lnR>
-                    <a:lnT>
-                      <a:noFill/>
-                    </a:lnT>
-                    <a:lnB>
-                      <a:noFill/>
-                    </a:lnB>
-                    <a:noFill/>
-                  </a:tcPr>
-                </a:tc>
-                <a:tc>
-                  <a:txBody>
-                    <a:bodyPr/>
-                    <a:lstStyle/>
-                    <a:p>
-                      <a:pPr>
-                        <a:buNone/>
-                      </a:pPr>
-                      <a:r>
-                        <a:rPr lang="fr-BE" dirty="0"/>
-                        <a:t>9 ms</a:t>
-                      </a:r>
-                    </a:p>
-                  </a:txBody>
-                  <a:tcPr anchor="ctr">
-                    <a:lnL>
-                      <a:noFill/>
-                    </a:lnL>
-                    <a:lnR>
-                      <a:noFill/>
-                    </a:lnR>
-                    <a:lnT>
-                      <a:noFill/>
-                    </a:lnT>
-                    <a:lnB>
-                      <a:noFill/>
-                    </a:lnB>
-                    <a:noFill/>
-                  </a:tcPr>
-                </a:tc>
-                <a:tc>
-                  <a:txBody>
-                    <a:bodyPr/>
-                    <a:lstStyle/>
-                    <a:p>
-                      <a:pPr>
-                        <a:buNone/>
-                      </a:pPr>
-                      <a:r>
-                        <a:rPr lang="fr-BE" dirty="0"/>
-                        <a:t>58 KB/s</a:t>
-                      </a:r>
-                    </a:p>
-                  </a:txBody>
-                  <a:tcPr anchor="ctr">
-                    <a:lnL>
-                      <a:noFill/>
-                    </a:lnL>
-                    <a:lnR>
-                      <a:noFill/>
-                    </a:lnR>
-                    <a:lnT>
-                      <a:noFill/>
-                    </a:lnT>
-                    <a:lnB>
-                      <a:noFill/>
-                    </a:lnB>
-                    <a:noFill/>
-                  </a:tcPr>
-                </a:tc>
-                <a:tc>
-                  <a:txBody>
-                    <a:bodyPr/>
-                    <a:lstStyle/>
-                    <a:p>
-                      <a:pPr>
-                        <a:buNone/>
-                      </a:pPr>
-                      <a:r>
-                        <a:rPr lang="fr-BE"/>
-                        <a:t>2</a:t>
-                      </a:r>
-                    </a:p>
-                  </a:txBody>
-                  <a:tcPr anchor="ctr">
-                    <a:lnL>
-                      <a:noFill/>
-                    </a:lnL>
-                    <a:lnR>
-                      <a:noFill/>
-                    </a:lnR>
-                    <a:lnT>
-                      <a:noFill/>
-                    </a:lnT>
-                    <a:lnB>
-                      <a:noFill/>
-                    </a:lnB>
-                    <a:noFill/>
-                  </a:tcPr>
-                </a:tc>
-                <a:extLst>
-                  <a:ext uri="{0D108BD9-81ED-4DB2-BD59-A6C34878D82A}">
-                    <a16:rowId xmlns:a16="http://schemas.microsoft.com/office/drawing/2014/main" val="1915089580"/>
-                  </a:ext>
-                </a:extLst>
-              </a:tr>
-              <a:tr h="0">
-                <a:tc>
-                  <a:txBody>
-                    <a:bodyPr/>
-                    <a:lstStyle/>
-                    <a:p>
-                      <a:pPr>
-                        <a:buNone/>
-                      </a:pPr>
-                      <a:r>
-                        <a:rPr lang="fr-BE"/>
-                        <a:t>5 KB</a:t>
-                      </a:r>
-                    </a:p>
-                  </a:txBody>
-                  <a:tcPr anchor="ctr">
-                    <a:lnL>
-                      <a:noFill/>
-                    </a:lnL>
-                    <a:lnR>
-                      <a:noFill/>
-                    </a:lnR>
-                    <a:lnT>
-                      <a:noFill/>
-                    </a:lnT>
-                    <a:lnB>
-                      <a:noFill/>
-                    </a:lnB>
-                    <a:noFill/>
-                  </a:tcPr>
-                </a:tc>
-                <a:tc>
-                  <a:txBody>
-                    <a:bodyPr/>
-                    <a:lstStyle/>
-                    <a:p>
-                      <a:pPr>
-                        <a:buNone/>
-                      </a:pPr>
-                      <a:r>
-                        <a:rPr lang="fr-BE" dirty="0"/>
-                        <a:t>39 ms</a:t>
-                      </a:r>
-                    </a:p>
-                  </a:txBody>
-                  <a:tcPr anchor="ctr">
-                    <a:lnL>
-                      <a:noFill/>
-                    </a:lnL>
-                    <a:lnR>
-                      <a:noFill/>
-                    </a:lnR>
-                    <a:lnT>
-                      <a:noFill/>
-                    </a:lnT>
-                    <a:lnB>
-                      <a:noFill/>
-                    </a:lnB>
-                    <a:noFill/>
-                  </a:tcPr>
-                </a:tc>
-                <a:tc>
-                  <a:txBody>
-                    <a:bodyPr/>
-                    <a:lstStyle/>
-                    <a:p>
-                      <a:pPr>
-                        <a:buNone/>
-                      </a:pPr>
-                      <a:r>
-                        <a:rPr lang="fr-BE" dirty="0"/>
-                        <a:t>133 KB/s</a:t>
-                      </a:r>
-                    </a:p>
-                  </a:txBody>
-                  <a:tcPr anchor="ctr">
-                    <a:lnL>
-                      <a:noFill/>
-                    </a:lnL>
-                    <a:lnR>
-                      <a:noFill/>
-                    </a:lnR>
-                    <a:lnT>
-                      <a:noFill/>
-                    </a:lnT>
-                    <a:lnB>
-                      <a:noFill/>
-                    </a:lnB>
-                    <a:noFill/>
-                  </a:tcPr>
-                </a:tc>
-                <a:tc>
-                  <a:txBody>
-                    <a:bodyPr/>
-                    <a:lstStyle/>
-                    <a:p>
-                      <a:pPr>
-                        <a:buNone/>
-                      </a:pPr>
-                      <a:r>
-                        <a:rPr lang="fr-BE" dirty="0"/>
-                        <a:t>13</a:t>
-                      </a:r>
-                    </a:p>
-                  </a:txBody>
-                  <a:tcPr anchor="ctr">
-                    <a:lnL>
-                      <a:noFill/>
-                    </a:lnL>
-                    <a:lnR>
-                      <a:noFill/>
-                    </a:lnR>
-                    <a:lnT>
-                      <a:noFill/>
-                    </a:lnT>
-                    <a:lnB>
-                      <a:noFill/>
-                    </a:lnB>
-                    <a:noFill/>
-                  </a:tcPr>
-                </a:tc>
-                <a:extLst>
-                  <a:ext uri="{0D108BD9-81ED-4DB2-BD59-A6C34878D82A}">
-                    <a16:rowId xmlns:a16="http://schemas.microsoft.com/office/drawing/2014/main" val="3328699980"/>
-                  </a:ext>
-                </a:extLst>
-              </a:tr>
-              <a:tr h="0">
-                <a:tc>
-                  <a:txBody>
-                    <a:bodyPr/>
-                    <a:lstStyle/>
-                    <a:p>
-                      <a:pPr>
-                        <a:buNone/>
-                      </a:pPr>
-                      <a:r>
-                        <a:rPr lang="fr-BE"/>
-                        <a:t>50 KB</a:t>
-                      </a:r>
-                    </a:p>
-                  </a:txBody>
-                  <a:tcPr anchor="ctr">
-                    <a:lnL>
-                      <a:noFill/>
-                    </a:lnL>
-                    <a:lnR>
-                      <a:noFill/>
-                    </a:lnR>
-                    <a:lnT>
-                      <a:noFill/>
-                    </a:lnT>
-                    <a:lnB>
-                      <a:noFill/>
-                    </a:lnB>
-                    <a:noFill/>
-                  </a:tcPr>
-                </a:tc>
-                <a:tc>
-                  <a:txBody>
-                    <a:bodyPr/>
-                    <a:lstStyle/>
-                    <a:p>
-                      <a:pPr>
-                        <a:buNone/>
-                      </a:pPr>
-                      <a:r>
-                        <a:rPr lang="fr-BE" dirty="0"/>
-                        <a:t>211 ms</a:t>
-                      </a:r>
-                    </a:p>
-                  </a:txBody>
-                  <a:tcPr anchor="ctr">
-                    <a:lnL>
-                      <a:noFill/>
-                    </a:lnL>
-                    <a:lnR>
-                      <a:noFill/>
-                    </a:lnR>
-                    <a:lnT>
-                      <a:noFill/>
-                    </a:lnT>
-                    <a:lnB>
-                      <a:noFill/>
-                    </a:lnB>
-                    <a:noFill/>
-                  </a:tcPr>
-                </a:tc>
-                <a:tc>
-                  <a:txBody>
-                    <a:bodyPr/>
-                    <a:lstStyle/>
-                    <a:p>
-                      <a:pPr>
-                        <a:buNone/>
-                      </a:pPr>
-                      <a:r>
-                        <a:rPr lang="fr-BE" dirty="0"/>
-                        <a:t>230 KB/s</a:t>
-                      </a:r>
-                    </a:p>
-                  </a:txBody>
-                  <a:tcPr anchor="ctr">
-                    <a:lnL>
-                      <a:noFill/>
-                    </a:lnL>
-                    <a:lnR>
-                      <a:noFill/>
-                    </a:lnR>
-                    <a:lnT>
-                      <a:noFill/>
-                    </a:lnT>
-                    <a:lnB>
-                      <a:noFill/>
-                    </a:lnB>
-                    <a:noFill/>
-                  </a:tcPr>
-                </a:tc>
-                <a:tc>
-                  <a:txBody>
-                    <a:bodyPr/>
-                    <a:lstStyle/>
-                    <a:p>
-                      <a:pPr>
-                        <a:buNone/>
-                      </a:pPr>
-                      <a:r>
-                        <a:rPr lang="fr-BE" dirty="0"/>
-                        <a:t>41</a:t>
-                      </a:r>
-                    </a:p>
-                  </a:txBody>
-                  <a:tcPr anchor="ctr">
-                    <a:lnL>
-                      <a:noFill/>
-                    </a:lnL>
-                    <a:lnR>
-                      <a:noFill/>
-                    </a:lnR>
-                    <a:lnT>
-                      <a:noFill/>
-                    </a:lnT>
-                    <a:lnB>
-                      <a:noFill/>
-                    </a:lnB>
-                    <a:noFill/>
-                  </a:tcPr>
-                </a:tc>
-                <a:extLst>
-                  <a:ext uri="{0D108BD9-81ED-4DB2-BD59-A6C34878D82A}">
-                    <a16:rowId xmlns:a16="http://schemas.microsoft.com/office/drawing/2014/main" val="2066704408"/>
-                  </a:ext>
-                </a:extLst>
-              </a:tr>
-            </a:tbl>
-          </a:graphicData>
-        </a:graphic>
-      </p:graphicFrame>
-      <p:sp>
-        <p:nvSpPr>
-          <p:cNvPr id="8" name="ZoneTexte 7">
-            <a:extLst>
-              <a:ext uri="{FF2B5EF4-FFF2-40B4-BE49-F238E27FC236}">
-                <a16:creationId xmlns:a16="http://schemas.microsoft.com/office/drawing/2014/main" id="{C47A4C76-4017-5CF2-508A-51FBD5C3D5D1}"/>
+              <a:t>Graphiques de performances</a:t>
+            </a:r>
+          </a:p>
+        </p:txBody>
+      </p:sp>
+      <p:sp>
+        <p:nvSpPr>
+          <p:cNvPr id="3" name="ZoneTexte 2">
+            <a:extLst>
+              <a:ext uri="{FF2B5EF4-FFF2-40B4-BE49-F238E27FC236}">
+                <a16:creationId xmlns:a16="http://schemas.microsoft.com/office/drawing/2014/main" id="{920DFE43-0C83-60AB-E862-1A286521D999}"/>
               </a:ext>
             </a:extLst>
           </p:cNvPr>
@@ -6053,8 +6068,8 @@
         </p:nvSpPr>
         <p:spPr>
           <a:xfrm>
-            <a:off x="838200" y="2216436"/>
-            <a:ext cx="2057400" cy="369332"/>
+            <a:off x="826008" y="1397675"/>
+            <a:ext cx="11365992" cy="2031325"/>
           </a:xfrm>
           <a:prstGeom prst="rect">
             <a:avLst/>
@@ -6069,677 +6084,62 @@
           <a:p>
             <a:r>
               <a:rPr lang="fr-BE" b="1" dirty="0"/>
-              <a:t>Pertes (5%)</a:t>
-            </a:r>
-          </a:p>
-        </p:txBody>
-      </p:sp>
-      <p:sp>
-        <p:nvSpPr>
-          <p:cNvPr id="9" name="ZoneTexte 8">
-            <a:extLst>
-              <a:ext uri="{FF2B5EF4-FFF2-40B4-BE49-F238E27FC236}">
-                <a16:creationId xmlns:a16="http://schemas.microsoft.com/office/drawing/2014/main" id="{8972BCAB-C111-396D-7FB5-4FBA2FE8765A}"/>
-              </a:ext>
-            </a:extLst>
-          </p:cNvPr>
-          <p:cNvSpPr txBox="1"/>
-          <p:nvPr/>
-        </p:nvSpPr>
-        <p:spPr>
-          <a:xfrm>
-            <a:off x="838200" y="91440"/>
-            <a:ext cx="2532888" cy="369332"/>
-          </a:xfrm>
-          <a:prstGeom prst="rect">
-            <a:avLst/>
-          </a:prstGeom>
-          <a:noFill/>
-        </p:spPr>
-        <p:txBody>
-          <a:bodyPr wrap="square" rtlCol="0">
-            <a:spAutoFit/>
-          </a:bodyPr>
-          <a:lstStyle/>
+              <a:t>Débit moyen selon taille des fichiers :</a:t>
+            </a:r>
+          </a:p>
+          <a:p>
+            <a:pPr marL="285750" indent="-285750">
+              <a:buFont typeface="Arial" panose="020B0604020202020204" pitchFamily="34" charset="0"/>
+              <a:buChar char="•"/>
+            </a:pPr>
+            <a:r>
+              <a:rPr lang="fr-BE" dirty="0"/>
+              <a:t>Augmentation croissante du débit avec la taille -&gt; </a:t>
+            </a:r>
+            <a:r>
+              <a:rPr lang="fr-FR" dirty="0"/>
+              <a:t>amortissement des coûts fixes, utilisation du pipeline (fenêtre glissante), réduction de l’impact du RTT</a:t>
+            </a:r>
+          </a:p>
+          <a:p>
+            <a:pPr marL="285750" indent="-285750">
+              <a:buFont typeface="Arial" panose="020B0604020202020204" pitchFamily="34" charset="0"/>
+              <a:buChar char="•"/>
+            </a:pPr>
+            <a:r>
+              <a:rPr lang="fr-FR" dirty="0"/>
+              <a:t>Stabilisation à partir de 5MB -&gt; </a:t>
+            </a:r>
+            <a:r>
+              <a:rPr lang="fr-BE" dirty="0"/>
+              <a:t>débit maximum du système atteint</a:t>
+            </a:r>
+          </a:p>
           <a:p>
             <a:r>
               <a:rPr lang="fr-BE" b="1" dirty="0"/>
-              <a:t>Réseau parfait</a:t>
-            </a:r>
-          </a:p>
-        </p:txBody>
-      </p:sp>
-      <p:graphicFrame>
-        <p:nvGraphicFramePr>
-          <p:cNvPr id="11" name="Tableau 10">
-            <a:extLst>
-              <a:ext uri="{FF2B5EF4-FFF2-40B4-BE49-F238E27FC236}">
-                <a16:creationId xmlns:a16="http://schemas.microsoft.com/office/drawing/2014/main" id="{E23F853A-1A2F-1761-A6CC-1AD191FF70EF}"/>
-              </a:ext>
-            </a:extLst>
-          </p:cNvPr>
-          <p:cNvGraphicFramePr>
-            <a:graphicFrameLocks noGrp="1"/>
-          </p:cNvGraphicFramePr>
-          <p:nvPr>
-            <p:extLst>
-              <p:ext uri="{D42A27DB-BD31-4B8C-83A1-F6EECF244321}">
-                <p14:modId xmlns:p14="http://schemas.microsoft.com/office/powerpoint/2010/main" val="3522110954"/>
-              </p:ext>
-            </p:extLst>
-          </p:nvPr>
-        </p:nvGraphicFramePr>
-        <p:xfrm>
-          <a:off x="838200" y="4833596"/>
-          <a:ext cx="7830312" cy="1463040"/>
-        </p:xfrm>
-        <a:graphic>
-          <a:graphicData uri="http://schemas.openxmlformats.org/drawingml/2006/table">
-            <a:tbl>
-              <a:tblPr/>
-              <a:tblGrid>
-                <a:gridCol w="1957578">
-                  <a:extLst>
-                    <a:ext uri="{9D8B030D-6E8A-4147-A177-3AD203B41FA5}">
-                      <a16:colId xmlns:a16="http://schemas.microsoft.com/office/drawing/2014/main" val="1366090509"/>
-                    </a:ext>
-                  </a:extLst>
-                </a:gridCol>
-                <a:gridCol w="1957578">
-                  <a:extLst>
-                    <a:ext uri="{9D8B030D-6E8A-4147-A177-3AD203B41FA5}">
-                      <a16:colId xmlns:a16="http://schemas.microsoft.com/office/drawing/2014/main" val="2545641747"/>
-                    </a:ext>
-                  </a:extLst>
-                </a:gridCol>
-                <a:gridCol w="1957578">
-                  <a:extLst>
-                    <a:ext uri="{9D8B030D-6E8A-4147-A177-3AD203B41FA5}">
-                      <a16:colId xmlns:a16="http://schemas.microsoft.com/office/drawing/2014/main" val="2372894590"/>
-                    </a:ext>
-                  </a:extLst>
-                </a:gridCol>
-                <a:gridCol w="1957578">
-                  <a:extLst>
-                    <a:ext uri="{9D8B030D-6E8A-4147-A177-3AD203B41FA5}">
-                      <a16:colId xmlns:a16="http://schemas.microsoft.com/office/drawing/2014/main" val="540934929"/>
-                    </a:ext>
-                  </a:extLst>
-                </a:gridCol>
-              </a:tblGrid>
-              <a:tr h="0">
-                <a:tc>
-                  <a:txBody>
-                    <a:bodyPr/>
-                    <a:lstStyle/>
-                    <a:p>
-                      <a:pPr>
-                        <a:buNone/>
-                      </a:pPr>
-                      <a:r>
-                        <a:rPr lang="fr-BE"/>
-                        <a:t>Taille fichier</a:t>
-                      </a:r>
-                    </a:p>
-                  </a:txBody>
-                  <a:tcPr anchor="ctr">
-                    <a:lnL>
-                      <a:noFill/>
-                    </a:lnL>
-                    <a:lnR>
-                      <a:noFill/>
-                    </a:lnR>
-                    <a:lnT>
-                      <a:noFill/>
-                    </a:lnT>
-                    <a:lnB>
-                      <a:noFill/>
-                    </a:lnB>
-                    <a:noFill/>
-                  </a:tcPr>
-                </a:tc>
-                <a:tc>
-                  <a:txBody>
-                    <a:bodyPr/>
-                    <a:lstStyle/>
-                    <a:p>
-                      <a:pPr>
-                        <a:buNone/>
-                      </a:pPr>
-                      <a:r>
-                        <a:rPr lang="fr-BE"/>
-                        <a:t>Temps</a:t>
-                      </a:r>
-                    </a:p>
-                  </a:txBody>
-                  <a:tcPr anchor="ctr">
-                    <a:lnL>
-                      <a:noFill/>
-                    </a:lnL>
-                    <a:lnR>
-                      <a:noFill/>
-                    </a:lnR>
-                    <a:lnT>
-                      <a:noFill/>
-                    </a:lnT>
-                    <a:lnB>
-                      <a:noFill/>
-                    </a:lnB>
-                    <a:noFill/>
-                  </a:tcPr>
-                </a:tc>
-                <a:tc>
-                  <a:txBody>
-                    <a:bodyPr/>
-                    <a:lstStyle/>
-                    <a:p>
-                      <a:pPr>
-                        <a:buNone/>
-                      </a:pPr>
-                      <a:r>
-                        <a:rPr lang="fr-BE"/>
-                        <a:t>Débit</a:t>
-                      </a:r>
-                    </a:p>
-                  </a:txBody>
-                  <a:tcPr anchor="ctr">
-                    <a:lnL>
-                      <a:noFill/>
-                    </a:lnL>
-                    <a:lnR>
-                      <a:noFill/>
-                    </a:lnR>
-                    <a:lnT>
-                      <a:noFill/>
-                    </a:lnT>
-                    <a:lnB>
-                      <a:noFill/>
-                    </a:lnB>
-                    <a:noFill/>
-                  </a:tcPr>
-                </a:tc>
-                <a:tc>
-                  <a:txBody>
-                    <a:bodyPr/>
-                    <a:lstStyle/>
-                    <a:p>
-                      <a:pPr>
-                        <a:buNone/>
-                      </a:pPr>
-                      <a:r>
-                        <a:rPr lang="fr-BE"/>
-                        <a:t>Retransmissions</a:t>
-                      </a:r>
-                    </a:p>
-                  </a:txBody>
-                  <a:tcPr anchor="ctr">
-                    <a:lnL>
-                      <a:noFill/>
-                    </a:lnL>
-                    <a:lnR>
-                      <a:noFill/>
-                    </a:lnR>
-                    <a:lnT>
-                      <a:noFill/>
-                    </a:lnT>
-                    <a:lnB>
-                      <a:noFill/>
-                    </a:lnB>
-                    <a:noFill/>
-                  </a:tcPr>
-                </a:tc>
-                <a:extLst>
-                  <a:ext uri="{0D108BD9-81ED-4DB2-BD59-A6C34878D82A}">
-                    <a16:rowId xmlns:a16="http://schemas.microsoft.com/office/drawing/2014/main" val="2689981673"/>
-                  </a:ext>
-                </a:extLst>
-              </a:tr>
-              <a:tr h="0">
-                <a:tc>
-                  <a:txBody>
-                    <a:bodyPr/>
-                    <a:lstStyle/>
-                    <a:p>
-                      <a:pPr>
-                        <a:buNone/>
-                      </a:pPr>
-                      <a:r>
-                        <a:rPr lang="fr-BE"/>
-                        <a:t>500 B</a:t>
-                      </a:r>
-                    </a:p>
-                  </a:txBody>
-                  <a:tcPr anchor="ctr">
-                    <a:lnL>
-                      <a:noFill/>
-                    </a:lnL>
-                    <a:lnR>
-                      <a:noFill/>
-                    </a:lnR>
-                    <a:lnT>
-                      <a:noFill/>
-                    </a:lnT>
-                    <a:lnB>
-                      <a:noFill/>
-                    </a:lnB>
-                    <a:noFill/>
-                  </a:tcPr>
-                </a:tc>
-                <a:tc>
-                  <a:txBody>
-                    <a:bodyPr/>
-                    <a:lstStyle/>
-                    <a:p>
-                      <a:pPr>
-                        <a:buNone/>
-                      </a:pPr>
-                      <a:r>
-                        <a:rPr lang="fr-BE" dirty="0"/>
-                        <a:t>14 ms</a:t>
-                      </a:r>
-                    </a:p>
-                  </a:txBody>
-                  <a:tcPr anchor="ctr">
-                    <a:lnL>
-                      <a:noFill/>
-                    </a:lnL>
-                    <a:lnR>
-                      <a:noFill/>
-                    </a:lnR>
-                    <a:lnT>
-                      <a:noFill/>
-                    </a:lnT>
-                    <a:lnB>
-                      <a:noFill/>
-                    </a:lnB>
-                    <a:noFill/>
-                  </a:tcPr>
-                </a:tc>
-                <a:tc>
-                  <a:txBody>
-                    <a:bodyPr/>
-                    <a:lstStyle/>
-                    <a:p>
-                      <a:pPr>
-                        <a:buNone/>
-                      </a:pPr>
-                      <a:r>
-                        <a:rPr lang="fr-BE" dirty="0"/>
-                        <a:t>46 KB/s</a:t>
-                      </a:r>
-                    </a:p>
-                  </a:txBody>
-                  <a:tcPr anchor="ctr">
-                    <a:lnL>
-                      <a:noFill/>
-                    </a:lnL>
-                    <a:lnR>
-                      <a:noFill/>
-                    </a:lnR>
-                    <a:lnT>
-                      <a:noFill/>
-                    </a:lnT>
-                    <a:lnB>
-                      <a:noFill/>
-                    </a:lnB>
-                    <a:noFill/>
-                  </a:tcPr>
-                </a:tc>
-                <a:tc>
-                  <a:txBody>
-                    <a:bodyPr/>
-                    <a:lstStyle/>
-                    <a:p>
-                      <a:pPr>
-                        <a:buNone/>
-                      </a:pPr>
-                      <a:r>
-                        <a:rPr lang="fr-BE" dirty="0"/>
-                        <a:t>4</a:t>
-                      </a:r>
-                    </a:p>
-                  </a:txBody>
-                  <a:tcPr anchor="ctr">
-                    <a:lnL>
-                      <a:noFill/>
-                    </a:lnL>
-                    <a:lnR>
-                      <a:noFill/>
-                    </a:lnR>
-                    <a:lnT>
-                      <a:noFill/>
-                    </a:lnT>
-                    <a:lnB>
-                      <a:noFill/>
-                    </a:lnB>
-                    <a:noFill/>
-                  </a:tcPr>
-                </a:tc>
-                <a:extLst>
-                  <a:ext uri="{0D108BD9-81ED-4DB2-BD59-A6C34878D82A}">
-                    <a16:rowId xmlns:a16="http://schemas.microsoft.com/office/drawing/2014/main" val="185995019"/>
-                  </a:ext>
-                </a:extLst>
-              </a:tr>
-              <a:tr h="0">
-                <a:tc>
-                  <a:txBody>
-                    <a:bodyPr/>
-                    <a:lstStyle/>
-                    <a:p>
-                      <a:pPr>
-                        <a:buNone/>
-                      </a:pPr>
-                      <a:r>
-                        <a:rPr lang="fr-BE"/>
-                        <a:t>5 KB</a:t>
-                      </a:r>
-                    </a:p>
-                  </a:txBody>
-                  <a:tcPr anchor="ctr">
-                    <a:lnL>
-                      <a:noFill/>
-                    </a:lnL>
-                    <a:lnR>
-                      <a:noFill/>
-                    </a:lnR>
-                    <a:lnT>
-                      <a:noFill/>
-                    </a:lnT>
-                    <a:lnB>
-                      <a:noFill/>
-                    </a:lnB>
-                    <a:noFill/>
-                  </a:tcPr>
-                </a:tc>
-                <a:tc>
-                  <a:txBody>
-                    <a:bodyPr/>
-                    <a:lstStyle/>
-                    <a:p>
-                      <a:pPr>
-                        <a:buNone/>
-                      </a:pPr>
-                      <a:r>
-                        <a:rPr lang="fr-BE" dirty="0"/>
-                        <a:t>67 ms</a:t>
-                      </a:r>
-                    </a:p>
-                  </a:txBody>
-                  <a:tcPr anchor="ctr">
-                    <a:lnL>
-                      <a:noFill/>
-                    </a:lnL>
-                    <a:lnR>
-                      <a:noFill/>
-                    </a:lnR>
-                    <a:lnT>
-                      <a:noFill/>
-                    </a:lnT>
-                    <a:lnB>
-                      <a:noFill/>
-                    </a:lnB>
-                    <a:noFill/>
-                  </a:tcPr>
-                </a:tc>
-                <a:tc>
-                  <a:txBody>
-                    <a:bodyPr/>
-                    <a:lstStyle/>
-                    <a:p>
-                      <a:pPr>
-                        <a:buNone/>
-                      </a:pPr>
-                      <a:r>
-                        <a:rPr lang="fr-BE" dirty="0"/>
-                        <a:t>94 KB/s</a:t>
-                      </a:r>
-                    </a:p>
-                  </a:txBody>
-                  <a:tcPr anchor="ctr">
-                    <a:lnL>
-                      <a:noFill/>
-                    </a:lnL>
-                    <a:lnR>
-                      <a:noFill/>
-                    </a:lnR>
-                    <a:lnT>
-                      <a:noFill/>
-                    </a:lnT>
-                    <a:lnB>
-                      <a:noFill/>
-                    </a:lnB>
-                    <a:noFill/>
-                  </a:tcPr>
-                </a:tc>
-                <a:tc>
-                  <a:txBody>
-                    <a:bodyPr/>
-                    <a:lstStyle/>
-                    <a:p>
-                      <a:pPr>
-                        <a:buNone/>
-                      </a:pPr>
-                      <a:r>
-                        <a:rPr lang="fr-BE" dirty="0"/>
-                        <a:t>23</a:t>
-                      </a:r>
-                    </a:p>
-                  </a:txBody>
-                  <a:tcPr anchor="ctr">
-                    <a:lnL>
-                      <a:noFill/>
-                    </a:lnL>
-                    <a:lnR>
-                      <a:noFill/>
-                    </a:lnR>
-                    <a:lnT>
-                      <a:noFill/>
-                    </a:lnT>
-                    <a:lnB>
-                      <a:noFill/>
-                    </a:lnB>
-                    <a:noFill/>
-                  </a:tcPr>
-                </a:tc>
-                <a:extLst>
-                  <a:ext uri="{0D108BD9-81ED-4DB2-BD59-A6C34878D82A}">
-                    <a16:rowId xmlns:a16="http://schemas.microsoft.com/office/drawing/2014/main" val="2816722628"/>
-                  </a:ext>
-                </a:extLst>
-              </a:tr>
-              <a:tr h="0">
-                <a:tc>
-                  <a:txBody>
-                    <a:bodyPr/>
-                    <a:lstStyle/>
-                    <a:p>
-                      <a:pPr>
-                        <a:buNone/>
-                      </a:pPr>
-                      <a:r>
-                        <a:rPr lang="fr-BE"/>
-                        <a:t>50 KB</a:t>
-                      </a:r>
-                    </a:p>
-                  </a:txBody>
-                  <a:tcPr anchor="ctr">
-                    <a:lnL>
-                      <a:noFill/>
-                    </a:lnL>
-                    <a:lnR>
-                      <a:noFill/>
-                    </a:lnR>
-                    <a:lnT>
-                      <a:noFill/>
-                    </a:lnT>
-                    <a:lnB>
-                      <a:noFill/>
-                    </a:lnB>
-                    <a:noFill/>
-                  </a:tcPr>
-                </a:tc>
-                <a:tc>
-                  <a:txBody>
-                    <a:bodyPr/>
-                    <a:lstStyle/>
-                    <a:p>
-                      <a:pPr>
-                        <a:buNone/>
-                      </a:pPr>
-                      <a:r>
-                        <a:rPr lang="fr-BE" dirty="0"/>
-                        <a:t>442 ms</a:t>
-                      </a:r>
-                    </a:p>
-                  </a:txBody>
-                  <a:tcPr anchor="ctr">
-                    <a:lnL>
-                      <a:noFill/>
-                    </a:lnL>
-                    <a:lnR>
-                      <a:noFill/>
-                    </a:lnR>
-                    <a:lnT>
-                      <a:noFill/>
-                    </a:lnT>
-                    <a:lnB>
-                      <a:noFill/>
-                    </a:lnB>
-                    <a:noFill/>
-                  </a:tcPr>
-                </a:tc>
-                <a:tc>
-                  <a:txBody>
-                    <a:bodyPr/>
-                    <a:lstStyle/>
-                    <a:p>
-                      <a:pPr>
-                        <a:buNone/>
-                      </a:pPr>
-                      <a:r>
-                        <a:rPr lang="fr-BE" dirty="0"/>
-                        <a:t>141 KB/s</a:t>
-                      </a:r>
-                    </a:p>
-                  </a:txBody>
-                  <a:tcPr anchor="ctr">
-                    <a:lnL>
-                      <a:noFill/>
-                    </a:lnL>
-                    <a:lnR>
-                      <a:noFill/>
-                    </a:lnR>
-                    <a:lnT>
-                      <a:noFill/>
-                    </a:lnT>
-                    <a:lnB>
-                      <a:noFill/>
-                    </a:lnB>
-                    <a:noFill/>
-                  </a:tcPr>
-                </a:tc>
-                <a:tc>
-                  <a:txBody>
-                    <a:bodyPr/>
-                    <a:lstStyle/>
-                    <a:p>
-                      <a:pPr>
-                        <a:buNone/>
-                      </a:pPr>
-                      <a:r>
-                        <a:rPr lang="fr-BE" dirty="0"/>
-                        <a:t>99</a:t>
-                      </a:r>
-                    </a:p>
-                  </a:txBody>
-                  <a:tcPr anchor="ctr">
-                    <a:lnL>
-                      <a:noFill/>
-                    </a:lnL>
-                    <a:lnR>
-                      <a:noFill/>
-                    </a:lnR>
-                    <a:lnT>
-                      <a:noFill/>
-                    </a:lnT>
-                    <a:lnB>
-                      <a:noFill/>
-                    </a:lnB>
-                    <a:noFill/>
-                  </a:tcPr>
-                </a:tc>
-                <a:extLst>
-                  <a:ext uri="{0D108BD9-81ED-4DB2-BD59-A6C34878D82A}">
-                    <a16:rowId xmlns:a16="http://schemas.microsoft.com/office/drawing/2014/main" val="3324136742"/>
-                  </a:ext>
-                </a:extLst>
-              </a:tr>
-            </a:tbl>
-          </a:graphicData>
-        </a:graphic>
-      </p:graphicFrame>
-      <p:sp>
-        <p:nvSpPr>
-          <p:cNvPr id="12" name="ZoneTexte 11">
-            <a:extLst>
-              <a:ext uri="{FF2B5EF4-FFF2-40B4-BE49-F238E27FC236}">
-                <a16:creationId xmlns:a16="http://schemas.microsoft.com/office/drawing/2014/main" id="{23E9FAAC-2008-81F4-280D-FD0B2A9844EC}"/>
-              </a:ext>
-            </a:extLst>
-          </p:cNvPr>
-          <p:cNvSpPr txBox="1"/>
-          <p:nvPr/>
-        </p:nvSpPr>
-        <p:spPr>
-          <a:xfrm>
-            <a:off x="838200" y="4363672"/>
-            <a:ext cx="1499616" cy="369332"/>
-          </a:xfrm>
-          <a:prstGeom prst="rect">
-            <a:avLst/>
-          </a:prstGeom>
-          <a:noFill/>
-        </p:spPr>
-        <p:txBody>
-          <a:bodyPr wrap="square" rtlCol="0">
-            <a:spAutoFit/>
-          </a:bodyPr>
-          <a:lstStyle/>
-          <a:p>
-            <a:r>
-              <a:rPr lang="fr-BE" b="1" dirty="0"/>
-              <a:t>Pertes (10%)</a:t>
-            </a:r>
-          </a:p>
-        </p:txBody>
-      </p:sp>
-      <p:sp>
-        <p:nvSpPr>
-          <p:cNvPr id="13" name="Espace réservé du numéro de diapositive 12">
-            <a:extLst>
-              <a:ext uri="{FF2B5EF4-FFF2-40B4-BE49-F238E27FC236}">
-                <a16:creationId xmlns:a16="http://schemas.microsoft.com/office/drawing/2014/main" id="{1DA15EBB-DA5D-6E92-320F-C1FDE0560A4C}"/>
-              </a:ext>
-            </a:extLst>
-          </p:cNvPr>
-          <p:cNvSpPr>
-            <a:spLocks noGrp="1"/>
-          </p:cNvSpPr>
-          <p:nvPr>
-            <p:ph type="sldNum" sz="quarter" idx="12"/>
-          </p:nvPr>
-        </p:nvSpPr>
-        <p:spPr/>
-        <p:txBody>
-          <a:bodyPr/>
-          <a:lstStyle/>
-          <a:p>
-            <a:fld id="{6D78B8F9-767A-4546-9D20-2187B79FBE53}" type="slidenum">
-              <a:rPr lang="fr-BE" smtClean="0"/>
-              <a:t>8</a:t>
-            </a:fld>
-            <a:endParaRPr lang="fr-BE"/>
+              <a:t>Débit moyen selon taux de perte :</a:t>
+            </a:r>
+          </a:p>
+          <a:p>
+            <a:pPr marL="285750" indent="-285750">
+              <a:buFont typeface="Arial" panose="020B0604020202020204" pitchFamily="34" charset="0"/>
+              <a:buChar char="•"/>
+            </a:pPr>
+            <a:r>
+              <a:rPr lang="fr-BE" dirty="0"/>
+              <a:t>Chute du débit dès 5% de pertes -&gt; retransmissions et timeouts saturent le protocole</a:t>
+            </a:r>
+          </a:p>
+          <a:p>
+            <a:pPr marL="285750" indent="-285750">
+              <a:buFont typeface="Arial" panose="020B0604020202020204" pitchFamily="34" charset="0"/>
+              <a:buChar char="•"/>
+            </a:pPr>
+            <a:r>
+              <a:rPr lang="fr-BE" dirty="0"/>
+              <a:t>Débit stable de 5 à 20% -&gt; protocole déjà saturé par retransmissions et timeout</a:t>
+            </a:r>
           </a:p>
         </p:txBody>
       </p:sp>
@@ -6819,7 +6219,7 @@
         </p:nvSpPr>
         <p:spPr/>
         <p:txBody>
-          <a:bodyPr>
+          <a:bodyPr vert="horz" lIns="91440" tIns="45720" rIns="91440" bIns="45720" rtlCol="0" anchor="t">
             <a:normAutofit/>
           </a:bodyPr>
           <a:lstStyle/>
@@ -6880,7 +6280,15 @@
             </a:r>
             <a:r>
               <a:rPr lang="fr-FR" dirty="0"/>
-              <a:t>pertes, corruption, multi-clients </a:t>
+              <a:t>pertes, corruption, </a:t>
+            </a:r>
+            <a:r>
+              <a:rPr lang="fr-FR" dirty="0" err="1"/>
+              <a:t>dedoublement</a:t>
+            </a:r>
+            <a:r>
+              <a:rPr lang="fr-FR" dirty="0"/>
+              <a:t>, multi-clients </a:t>
             </a:r>
           </a:p>
           <a:p>
